--- a/docs/第4组汇报PPT.pptx
+++ b/docs/第4组汇报PPT.pptx
@@ -1,30 +1,30 @@
 
 <file path=ppt/presentation.xml><?xml version="1.0" encoding="utf-8"?>
-<p:presentation xmlns:a="http://schemas.openxmlformats.org/drawingml/2006/main" xmlns:r="http://schemas.openxmlformats.org/officeDocument/2006/relationships" xmlns:p="http://schemas.openxmlformats.org/presentationml/2006/main" saveSubsetFonts="1" autoCompressPictures="0">
+<p:presentation xmlns:a="http://schemas.openxmlformats.org/drawingml/2006/main" xmlns:r="http://schemas.openxmlformats.org/officeDocument/2006/relationships" xmlns:p="http://schemas.openxmlformats.org/presentationml/2006/main" autoCompressPictures="0">
   <p:sldMasterIdLst>
     <p:sldMasterId id="2147483648" r:id="rId1"/>
   </p:sldMasterIdLst>
   <p:sldIdLst>
-    <p:sldId id="256" r:id="rId7"/>
-    <p:sldId id="257" r:id="rId8"/>
-    <p:sldId id="258" r:id="rId9"/>
-    <p:sldId id="259" r:id="rId10"/>
-    <p:sldId id="260" r:id="rId11"/>
-    <p:sldId id="261" r:id="rId12"/>
-    <p:sldId id="262" r:id="rId13"/>
-    <p:sldId id="263" r:id="rId14"/>
-    <p:sldId id="264" r:id="rId15"/>
-    <p:sldId id="265" r:id="rId16"/>
-    <p:sldId id="266" r:id="rId17"/>
-    <p:sldId id="267" r:id="rId18"/>
-    <p:sldId id="268" r:id="rId19"/>
-    <p:sldId id="269" r:id="rId20"/>
-    <p:sldId id="270" r:id="rId21"/>
-    <p:sldId id="271" r:id="rId22"/>
-    <p:sldId id="272" r:id="rId23"/>
-    <p:sldId id="273" r:id="rId24"/>
+    <p:sldId id="256" r:id="rId3"/>
+    <p:sldId id="257" r:id="rId4"/>
+    <p:sldId id="258" r:id="rId5"/>
+    <p:sldId id="259" r:id="rId6"/>
+    <p:sldId id="260" r:id="rId7"/>
+    <p:sldId id="261" r:id="rId8"/>
+    <p:sldId id="262" r:id="rId9"/>
+    <p:sldId id="263" r:id="rId10"/>
+    <p:sldId id="264" r:id="rId11"/>
+    <p:sldId id="265" r:id="rId12"/>
+    <p:sldId id="266" r:id="rId13"/>
+    <p:sldId id="267" r:id="rId14"/>
+    <p:sldId id="268" r:id="rId15"/>
+    <p:sldId id="269" r:id="rId16"/>
+    <p:sldId id="270" r:id="rId17"/>
+    <p:sldId id="271" r:id="rId18"/>
+    <p:sldId id="272" r:id="rId19"/>
+    <p:sldId id="273" r:id="rId20"/>
   </p:sldIdLst>
-  <p:sldSz cx="12191695" cy="6858000" type="screen4x3"/>
+  <p:sldSz cx="12191365" cy="6858000" type="screen4x3"/>
   <p:notesSz cx="6858000" cy="9144000"/>
   <p:defaultTextStyle>
     <a:defPPr>
@@ -121,6 +121,22 @@
       </a:defRPr>
     </a:lvl9pPr>
   </p:defaultTextStyle>
+  <p:extLst>
+    <p:ext uri="{EFAFB233-063F-42B5-8137-9DF3F51BA10A}">
+      <p15:sldGuideLst xmlns:p15="http://schemas.microsoft.com/office/powerpoint/2012/main">
+        <p15:guide id="1" orient="horz" pos="2160" userDrawn="1">
+          <p15:clr>
+            <a:srgbClr val="A4A3A4"/>
+          </p15:clr>
+        </p15:guide>
+        <p15:guide id="2" pos="2880" userDrawn="1">
+          <p15:clr>
+            <a:srgbClr val="A4A3A4"/>
+          </p15:clr>
+        </p15:guide>
+      </p15:sldGuideLst>
+    </p:ext>
+  </p:extLst>
 </p:presentation>
 </file>
 
@@ -305,7 +321,6 @@
           <a:p>
             <a:fld id="{5BCAD085-E8A6-8845-BD4E-CB4CCA059FC4}" type="datetimeFigureOut">
               <a:rPr lang="en-US" smtClean="0"/>
-              <a:t>1/27/13</a:t>
             </a:fld>
             <a:endParaRPr lang="en-US"/>
           </a:p>
@@ -347,18 +362,12 @@
           <a:p>
             <a:fld id="{C1FF6DA9-008F-8B48-92A6-B652298478BF}" type="slidenum">
               <a:rPr lang="en-US" smtClean="0"/>
-              <a:t>‹#›</a:t>
             </a:fld>
             <a:endParaRPr lang="en-US"/>
           </a:p>
         </p:txBody>
       </p:sp>
     </p:spTree>
-    <p:extLst>
-      <p:ext uri="{BB962C8B-B14F-4D97-AF65-F5344CB8AC3E}">
-        <p14:creationId xmlns:p14="http://schemas.microsoft.com/office/powerpoint/2010/main" val="3168075583"/>
-      </p:ext>
-    </p:extLst>
   </p:cSld>
   <p:clrMapOvr>
     <a:masterClrMapping/>
@@ -426,6 +435,7 @@
               <a:rPr lang="en-US" smtClean="0"/>
               <a:t>Click to edit Master text styles</a:t>
             </a:r>
+            <a:endParaRPr lang="en-US" smtClean="0"/>
           </a:p>
           <a:p>
             <a:pPr lvl="1"/>
@@ -433,6 +443,7 @@
               <a:rPr lang="en-US" smtClean="0"/>
               <a:t>Second level</a:t>
             </a:r>
+            <a:endParaRPr lang="en-US" smtClean="0"/>
           </a:p>
           <a:p>
             <a:pPr lvl="2"/>
@@ -440,6 +451,7 @@
               <a:rPr lang="en-US" smtClean="0"/>
               <a:t>Third level</a:t>
             </a:r>
+            <a:endParaRPr lang="en-US" smtClean="0"/>
           </a:p>
           <a:p>
             <a:pPr lvl="3"/>
@@ -447,6 +459,7 @@
               <a:rPr lang="en-US" smtClean="0"/>
               <a:t>Fourth level</a:t>
             </a:r>
+            <a:endParaRPr lang="en-US" smtClean="0"/>
           </a:p>
           <a:p>
             <a:pPr lvl="4"/>
@@ -475,7 +488,6 @@
           <a:p>
             <a:fld id="{5BCAD085-E8A6-8845-BD4E-CB4CCA059FC4}" type="datetimeFigureOut">
               <a:rPr lang="en-US" smtClean="0"/>
-              <a:t>1/27/13</a:t>
             </a:fld>
             <a:endParaRPr lang="en-US"/>
           </a:p>
@@ -517,18 +529,12 @@
           <a:p>
             <a:fld id="{C1FF6DA9-008F-8B48-92A6-B652298478BF}" type="slidenum">
               <a:rPr lang="en-US" smtClean="0"/>
-              <a:t>‹#›</a:t>
             </a:fld>
             <a:endParaRPr lang="en-US"/>
           </a:p>
         </p:txBody>
       </p:sp>
     </p:spTree>
-    <p:extLst>
-      <p:ext uri="{BB962C8B-B14F-4D97-AF65-F5344CB8AC3E}">
-        <p14:creationId xmlns:p14="http://schemas.microsoft.com/office/powerpoint/2010/main" val="2910927964"/>
-      </p:ext>
-    </p:extLst>
   </p:cSld>
   <p:clrMapOvr>
     <a:masterClrMapping/>
@@ -606,6 +612,7 @@
               <a:rPr lang="en-US" smtClean="0"/>
               <a:t>Click to edit Master text styles</a:t>
             </a:r>
+            <a:endParaRPr lang="en-US" smtClean="0"/>
           </a:p>
           <a:p>
             <a:pPr lvl="1"/>
@@ -613,6 +620,7 @@
               <a:rPr lang="en-US" smtClean="0"/>
               <a:t>Second level</a:t>
             </a:r>
+            <a:endParaRPr lang="en-US" smtClean="0"/>
           </a:p>
           <a:p>
             <a:pPr lvl="2"/>
@@ -620,6 +628,7 @@
               <a:rPr lang="en-US" smtClean="0"/>
               <a:t>Third level</a:t>
             </a:r>
+            <a:endParaRPr lang="en-US" smtClean="0"/>
           </a:p>
           <a:p>
             <a:pPr lvl="3"/>
@@ -627,6 +636,7 @@
               <a:rPr lang="en-US" smtClean="0"/>
               <a:t>Fourth level</a:t>
             </a:r>
+            <a:endParaRPr lang="en-US" smtClean="0"/>
           </a:p>
           <a:p>
             <a:pPr lvl="4"/>
@@ -655,7 +665,6 @@
           <a:p>
             <a:fld id="{5BCAD085-E8A6-8845-BD4E-CB4CCA059FC4}" type="datetimeFigureOut">
               <a:rPr lang="en-US" smtClean="0"/>
-              <a:t>1/27/13</a:t>
             </a:fld>
             <a:endParaRPr lang="en-US"/>
           </a:p>
@@ -697,18 +706,12 @@
           <a:p>
             <a:fld id="{C1FF6DA9-008F-8B48-92A6-B652298478BF}" type="slidenum">
               <a:rPr lang="en-US" smtClean="0"/>
-              <a:t>‹#›</a:t>
             </a:fld>
             <a:endParaRPr lang="en-US"/>
           </a:p>
         </p:txBody>
       </p:sp>
     </p:spTree>
-    <p:extLst>
-      <p:ext uri="{BB962C8B-B14F-4D97-AF65-F5344CB8AC3E}">
-        <p14:creationId xmlns:p14="http://schemas.microsoft.com/office/powerpoint/2010/main" val="3612223792"/>
-      </p:ext>
-    </p:extLst>
   </p:cSld>
   <p:clrMapOvr>
     <a:masterClrMapping/>
@@ -776,6 +779,7 @@
               <a:rPr lang="en-US" smtClean="0"/>
               <a:t>Click to edit Master text styles</a:t>
             </a:r>
+            <a:endParaRPr lang="en-US" smtClean="0"/>
           </a:p>
           <a:p>
             <a:pPr lvl="1"/>
@@ -783,6 +787,7 @@
               <a:rPr lang="en-US" smtClean="0"/>
               <a:t>Second level</a:t>
             </a:r>
+            <a:endParaRPr lang="en-US" smtClean="0"/>
           </a:p>
           <a:p>
             <a:pPr lvl="2"/>
@@ -790,6 +795,7 @@
               <a:rPr lang="en-US" smtClean="0"/>
               <a:t>Third level</a:t>
             </a:r>
+            <a:endParaRPr lang="en-US" smtClean="0"/>
           </a:p>
           <a:p>
             <a:pPr lvl="3"/>
@@ -797,6 +803,7 @@
               <a:rPr lang="en-US" smtClean="0"/>
               <a:t>Fourth level</a:t>
             </a:r>
+            <a:endParaRPr lang="en-US" smtClean="0"/>
           </a:p>
           <a:p>
             <a:pPr lvl="4"/>
@@ -825,7 +832,6 @@
           <a:p>
             <a:fld id="{5BCAD085-E8A6-8845-BD4E-CB4CCA059FC4}" type="datetimeFigureOut">
               <a:rPr lang="en-US" smtClean="0"/>
-              <a:t>1/27/13</a:t>
             </a:fld>
             <a:endParaRPr lang="en-US"/>
           </a:p>
@@ -867,18 +873,12 @@
           <a:p>
             <a:fld id="{C1FF6DA9-008F-8B48-92A6-B652298478BF}" type="slidenum">
               <a:rPr lang="en-US" smtClean="0"/>
-              <a:t>‹#›</a:t>
             </a:fld>
             <a:endParaRPr lang="en-US"/>
           </a:p>
         </p:txBody>
       </p:sp>
     </p:spTree>
-    <p:extLst>
-      <p:ext uri="{BB962C8B-B14F-4D97-AF65-F5344CB8AC3E}">
-        <p14:creationId xmlns:p14="http://schemas.microsoft.com/office/powerpoint/2010/main" val="2614314258"/>
-      </p:ext>
-    </p:extLst>
   </p:cSld>
   <p:clrMapOvr>
     <a:masterClrMapping/>
@@ -1051,6 +1051,7 @@
               <a:rPr lang="en-US" smtClean="0"/>
               <a:t>Click to edit Master text styles</a:t>
             </a:r>
+            <a:endParaRPr lang="en-US" smtClean="0"/>
           </a:p>
         </p:txBody>
       </p:sp>
@@ -1071,7 +1072,6 @@
           <a:p>
             <a:fld id="{5BCAD085-E8A6-8845-BD4E-CB4CCA059FC4}" type="datetimeFigureOut">
               <a:rPr lang="en-US" smtClean="0"/>
-              <a:t>1/27/13</a:t>
             </a:fld>
             <a:endParaRPr lang="en-US"/>
           </a:p>
@@ -1113,18 +1113,12 @@
           <a:p>
             <a:fld id="{C1FF6DA9-008F-8B48-92A6-B652298478BF}" type="slidenum">
               <a:rPr lang="en-US" smtClean="0"/>
-              <a:t>‹#›</a:t>
             </a:fld>
             <a:endParaRPr lang="en-US"/>
           </a:p>
         </p:txBody>
       </p:sp>
     </p:spTree>
-    <p:extLst>
-      <p:ext uri="{BB962C8B-B14F-4D97-AF65-F5344CB8AC3E}">
-        <p14:creationId xmlns:p14="http://schemas.microsoft.com/office/powerpoint/2010/main" val="960648375"/>
-      </p:ext>
-    </p:extLst>
   </p:cSld>
   <p:clrMapOvr>
     <a:masterClrMapping/>
@@ -1225,6 +1219,7 @@
               <a:rPr lang="en-US" smtClean="0"/>
               <a:t>Click to edit Master text styles</a:t>
             </a:r>
+            <a:endParaRPr lang="en-US" smtClean="0"/>
           </a:p>
           <a:p>
             <a:pPr lvl="1"/>
@@ -1232,6 +1227,7 @@
               <a:rPr lang="en-US" smtClean="0"/>
               <a:t>Second level</a:t>
             </a:r>
+            <a:endParaRPr lang="en-US" smtClean="0"/>
           </a:p>
           <a:p>
             <a:pPr lvl="2"/>
@@ -1239,6 +1235,7 @@
               <a:rPr lang="en-US" smtClean="0"/>
               <a:t>Third level</a:t>
             </a:r>
+            <a:endParaRPr lang="en-US" smtClean="0"/>
           </a:p>
           <a:p>
             <a:pPr lvl="3"/>
@@ -1246,6 +1243,7 @@
               <a:rPr lang="en-US" smtClean="0"/>
               <a:t>Fourth level</a:t>
             </a:r>
+            <a:endParaRPr lang="en-US" smtClean="0"/>
           </a:p>
           <a:p>
             <a:pPr lvl="4"/>
@@ -1310,6 +1308,7 @@
               <a:rPr lang="en-US" smtClean="0"/>
               <a:t>Click to edit Master text styles</a:t>
             </a:r>
+            <a:endParaRPr lang="en-US" smtClean="0"/>
           </a:p>
           <a:p>
             <a:pPr lvl="1"/>
@@ -1317,6 +1316,7 @@
               <a:rPr lang="en-US" smtClean="0"/>
               <a:t>Second level</a:t>
             </a:r>
+            <a:endParaRPr lang="en-US" smtClean="0"/>
           </a:p>
           <a:p>
             <a:pPr lvl="2"/>
@@ -1324,6 +1324,7 @@
               <a:rPr lang="en-US" smtClean="0"/>
               <a:t>Third level</a:t>
             </a:r>
+            <a:endParaRPr lang="en-US" smtClean="0"/>
           </a:p>
           <a:p>
             <a:pPr lvl="3"/>
@@ -1331,6 +1332,7 @@
               <a:rPr lang="en-US" smtClean="0"/>
               <a:t>Fourth level</a:t>
             </a:r>
+            <a:endParaRPr lang="en-US" smtClean="0"/>
           </a:p>
           <a:p>
             <a:pPr lvl="4"/>
@@ -1359,7 +1361,6 @@
           <a:p>
             <a:fld id="{5BCAD085-E8A6-8845-BD4E-CB4CCA059FC4}" type="datetimeFigureOut">
               <a:rPr lang="en-US" smtClean="0"/>
-              <a:t>1/27/13</a:t>
             </a:fld>
             <a:endParaRPr lang="en-US"/>
           </a:p>
@@ -1401,18 +1402,12 @@
           <a:p>
             <a:fld id="{C1FF6DA9-008F-8B48-92A6-B652298478BF}" type="slidenum">
               <a:rPr lang="en-US" smtClean="0"/>
-              <a:t>‹#›</a:t>
             </a:fld>
             <a:endParaRPr lang="en-US"/>
           </a:p>
         </p:txBody>
       </p:sp>
     </p:spTree>
-    <p:extLst>
-      <p:ext uri="{BB962C8B-B14F-4D97-AF65-F5344CB8AC3E}">
-        <p14:creationId xmlns:p14="http://schemas.microsoft.com/office/powerpoint/2010/main" val="2782244947"/>
-      </p:ext>
-    </p:extLst>
   </p:cSld>
   <p:clrMapOvr>
     <a:masterClrMapping/>
@@ -1526,6 +1521,7 @@
               <a:rPr lang="en-US" smtClean="0"/>
               <a:t>Click to edit Master text styles</a:t>
             </a:r>
+            <a:endParaRPr lang="en-US" smtClean="0"/>
           </a:p>
         </p:txBody>
       </p:sp>
@@ -1582,6 +1578,7 @@
               <a:rPr lang="en-US" smtClean="0"/>
               <a:t>Click to edit Master text styles</a:t>
             </a:r>
+            <a:endParaRPr lang="en-US" smtClean="0"/>
           </a:p>
           <a:p>
             <a:pPr lvl="1"/>
@@ -1589,6 +1586,7 @@
               <a:rPr lang="en-US" smtClean="0"/>
               <a:t>Second level</a:t>
             </a:r>
+            <a:endParaRPr lang="en-US" smtClean="0"/>
           </a:p>
           <a:p>
             <a:pPr lvl="2"/>
@@ -1596,6 +1594,7 @@
               <a:rPr lang="en-US" smtClean="0"/>
               <a:t>Third level</a:t>
             </a:r>
+            <a:endParaRPr lang="en-US" smtClean="0"/>
           </a:p>
           <a:p>
             <a:pPr lvl="3"/>
@@ -1603,6 +1602,7 @@
               <a:rPr lang="en-US" smtClean="0"/>
               <a:t>Fourth level</a:t>
             </a:r>
+            <a:endParaRPr lang="en-US" smtClean="0"/>
           </a:p>
           <a:p>
             <a:pPr lvl="4"/>
@@ -1676,6 +1676,7 @@
               <a:rPr lang="en-US" smtClean="0"/>
               <a:t>Click to edit Master text styles</a:t>
             </a:r>
+            <a:endParaRPr lang="en-US" smtClean="0"/>
           </a:p>
         </p:txBody>
       </p:sp>
@@ -1732,6 +1733,7 @@
               <a:rPr lang="en-US" smtClean="0"/>
               <a:t>Click to edit Master text styles</a:t>
             </a:r>
+            <a:endParaRPr lang="en-US" smtClean="0"/>
           </a:p>
           <a:p>
             <a:pPr lvl="1"/>
@@ -1739,6 +1741,7 @@
               <a:rPr lang="en-US" smtClean="0"/>
               <a:t>Second level</a:t>
             </a:r>
+            <a:endParaRPr lang="en-US" smtClean="0"/>
           </a:p>
           <a:p>
             <a:pPr lvl="2"/>
@@ -1746,6 +1749,7 @@
               <a:rPr lang="en-US" smtClean="0"/>
               <a:t>Third level</a:t>
             </a:r>
+            <a:endParaRPr lang="en-US" smtClean="0"/>
           </a:p>
           <a:p>
             <a:pPr lvl="3"/>
@@ -1753,6 +1757,7 @@
               <a:rPr lang="en-US" smtClean="0"/>
               <a:t>Fourth level</a:t>
             </a:r>
+            <a:endParaRPr lang="en-US" smtClean="0"/>
           </a:p>
           <a:p>
             <a:pPr lvl="4"/>
@@ -1781,7 +1786,6 @@
           <a:p>
             <a:fld id="{5BCAD085-E8A6-8845-BD4E-CB4CCA059FC4}" type="datetimeFigureOut">
               <a:rPr lang="en-US" smtClean="0"/>
-              <a:t>1/27/13</a:t>
             </a:fld>
             <a:endParaRPr lang="en-US"/>
           </a:p>
@@ -1823,18 +1827,12 @@
           <a:p>
             <a:fld id="{C1FF6DA9-008F-8B48-92A6-B652298478BF}" type="slidenum">
               <a:rPr lang="en-US" smtClean="0"/>
-              <a:t>‹#›</a:t>
             </a:fld>
             <a:endParaRPr lang="en-US"/>
           </a:p>
         </p:txBody>
       </p:sp>
     </p:spTree>
-    <p:extLst>
-      <p:ext uri="{BB962C8B-B14F-4D97-AF65-F5344CB8AC3E}">
-        <p14:creationId xmlns:p14="http://schemas.microsoft.com/office/powerpoint/2010/main" val="990158736"/>
-      </p:ext>
-    </p:extLst>
   </p:cSld>
   <p:clrMapOvr>
     <a:masterClrMapping/>
@@ -1899,7 +1897,6 @@
           <a:p>
             <a:fld id="{5BCAD085-E8A6-8845-BD4E-CB4CCA059FC4}" type="datetimeFigureOut">
               <a:rPr lang="en-US" smtClean="0"/>
-              <a:t>1/27/13</a:t>
             </a:fld>
             <a:endParaRPr lang="en-US"/>
           </a:p>
@@ -1941,18 +1938,12 @@
           <a:p>
             <a:fld id="{C1FF6DA9-008F-8B48-92A6-B652298478BF}" type="slidenum">
               <a:rPr lang="en-US" smtClean="0"/>
-              <a:t>‹#›</a:t>
             </a:fld>
             <a:endParaRPr lang="en-US"/>
           </a:p>
         </p:txBody>
       </p:sp>
     </p:spTree>
-    <p:extLst>
-      <p:ext uri="{BB962C8B-B14F-4D97-AF65-F5344CB8AC3E}">
-        <p14:creationId xmlns:p14="http://schemas.microsoft.com/office/powerpoint/2010/main" val="727027711"/>
-      </p:ext>
-    </p:extLst>
   </p:cSld>
   <p:clrMapOvr>
     <a:masterClrMapping/>
@@ -1994,7 +1985,6 @@
           <a:p>
             <a:fld id="{5BCAD085-E8A6-8845-BD4E-CB4CCA059FC4}" type="datetimeFigureOut">
               <a:rPr lang="en-US" smtClean="0"/>
-              <a:t>1/27/13</a:t>
             </a:fld>
             <a:endParaRPr lang="en-US"/>
           </a:p>
@@ -2036,18 +2026,12 @@
           <a:p>
             <a:fld id="{C1FF6DA9-008F-8B48-92A6-B652298478BF}" type="slidenum">
               <a:rPr lang="en-US" smtClean="0"/>
-              <a:t>‹#›</a:t>
             </a:fld>
             <a:endParaRPr lang="en-US"/>
           </a:p>
         </p:txBody>
       </p:sp>
     </p:spTree>
-    <p:extLst>
-      <p:ext uri="{BB962C8B-B14F-4D97-AF65-F5344CB8AC3E}">
-        <p14:creationId xmlns:p14="http://schemas.microsoft.com/office/powerpoint/2010/main" val="1212999818"/>
-      </p:ext>
-    </p:extLst>
   </p:cSld>
   <p:clrMapOvr>
     <a:masterClrMapping/>
@@ -2157,6 +2141,7 @@
               <a:rPr lang="en-US" smtClean="0"/>
               <a:t>Click to edit Master text styles</a:t>
             </a:r>
+            <a:endParaRPr lang="en-US" smtClean="0"/>
           </a:p>
           <a:p>
             <a:pPr lvl="1"/>
@@ -2164,6 +2149,7 @@
               <a:rPr lang="en-US" smtClean="0"/>
               <a:t>Second level</a:t>
             </a:r>
+            <a:endParaRPr lang="en-US" smtClean="0"/>
           </a:p>
           <a:p>
             <a:pPr lvl="2"/>
@@ -2171,6 +2157,7 @@
               <a:rPr lang="en-US" smtClean="0"/>
               <a:t>Third level</a:t>
             </a:r>
+            <a:endParaRPr lang="en-US" smtClean="0"/>
           </a:p>
           <a:p>
             <a:pPr lvl="3"/>
@@ -2178,6 +2165,7 @@
               <a:rPr lang="en-US" smtClean="0"/>
               <a:t>Fourth level</a:t>
             </a:r>
+            <a:endParaRPr lang="en-US" smtClean="0"/>
           </a:p>
           <a:p>
             <a:pPr lvl="4"/>
@@ -2251,6 +2239,7 @@
               <a:rPr lang="en-US" smtClean="0"/>
               <a:t>Click to edit Master text styles</a:t>
             </a:r>
+            <a:endParaRPr lang="en-US" smtClean="0"/>
           </a:p>
         </p:txBody>
       </p:sp>
@@ -2271,7 +2260,6 @@
           <a:p>
             <a:fld id="{5BCAD085-E8A6-8845-BD4E-CB4CCA059FC4}" type="datetimeFigureOut">
               <a:rPr lang="en-US" smtClean="0"/>
-              <a:t>1/27/13</a:t>
             </a:fld>
             <a:endParaRPr lang="en-US"/>
           </a:p>
@@ -2313,18 +2301,12 @@
           <a:p>
             <a:fld id="{C1FF6DA9-008F-8B48-92A6-B652298478BF}" type="slidenum">
               <a:rPr lang="en-US" smtClean="0"/>
-              <a:t>‹#›</a:t>
             </a:fld>
             <a:endParaRPr lang="en-US"/>
           </a:p>
         </p:txBody>
       </p:sp>
     </p:spTree>
-    <p:extLst>
-      <p:ext uri="{BB962C8B-B14F-4D97-AF65-F5344CB8AC3E}">
-        <p14:creationId xmlns:p14="http://schemas.microsoft.com/office/powerpoint/2010/main" val="1840726560"/>
-      </p:ext>
-    </p:extLst>
   </p:cSld>
   <p:clrMapOvr>
     <a:masterClrMapping/>
@@ -2504,6 +2486,7 @@
               <a:rPr lang="en-US" smtClean="0"/>
               <a:t>Click to edit Master text styles</a:t>
             </a:r>
+            <a:endParaRPr lang="en-US" smtClean="0"/>
           </a:p>
         </p:txBody>
       </p:sp>
@@ -2524,7 +2507,6 @@
           <a:p>
             <a:fld id="{5BCAD085-E8A6-8845-BD4E-CB4CCA059FC4}" type="datetimeFigureOut">
               <a:rPr lang="en-US" smtClean="0"/>
-              <a:t>1/27/13</a:t>
             </a:fld>
             <a:endParaRPr lang="en-US"/>
           </a:p>
@@ -2566,18 +2548,12 @@
           <a:p>
             <a:fld id="{C1FF6DA9-008F-8B48-92A6-B652298478BF}" type="slidenum">
               <a:rPr lang="en-US" smtClean="0"/>
-              <a:t>‹#›</a:t>
             </a:fld>
             <a:endParaRPr lang="en-US"/>
           </a:p>
         </p:txBody>
       </p:sp>
     </p:spTree>
-    <p:extLst>
-      <p:ext uri="{BB962C8B-B14F-4D97-AF65-F5344CB8AC3E}">
-        <p14:creationId xmlns:p14="http://schemas.microsoft.com/office/powerpoint/2010/main" val="3889236939"/>
-      </p:ext>
-    </p:extLst>
   </p:cSld>
   <p:clrMapOvr>
     <a:masterClrMapping/>
@@ -2670,6 +2646,7 @@
               <a:rPr lang="en-US" smtClean="0"/>
               <a:t>Click to edit Master text styles</a:t>
             </a:r>
+            <a:endParaRPr lang="en-US" smtClean="0"/>
           </a:p>
           <a:p>
             <a:pPr lvl="1"/>
@@ -2677,6 +2654,7 @@
               <a:rPr lang="en-US" smtClean="0"/>
               <a:t>Second level</a:t>
             </a:r>
+            <a:endParaRPr lang="en-US" smtClean="0"/>
           </a:p>
           <a:p>
             <a:pPr lvl="2"/>
@@ -2684,6 +2662,7 @@
               <a:rPr lang="en-US" smtClean="0"/>
               <a:t>Third level</a:t>
             </a:r>
+            <a:endParaRPr lang="en-US" smtClean="0"/>
           </a:p>
           <a:p>
             <a:pPr lvl="3"/>
@@ -2691,6 +2670,7 @@
               <a:rPr lang="en-US" smtClean="0"/>
               <a:t>Fourth level</a:t>
             </a:r>
+            <a:endParaRPr lang="en-US" smtClean="0"/>
           </a:p>
           <a:p>
             <a:pPr lvl="4"/>
@@ -2737,7 +2717,6 @@
           <a:p>
             <a:fld id="{5BCAD085-E8A6-8845-BD4E-CB4CCA059FC4}" type="datetimeFigureOut">
               <a:rPr lang="en-US" smtClean="0"/>
-              <a:t>1/27/13</a:t>
             </a:fld>
             <a:endParaRPr lang="en-US"/>
           </a:p>
@@ -2815,18 +2794,12 @@
           <a:p>
             <a:fld id="{C1FF6DA9-008F-8B48-92A6-B652298478BF}" type="slidenum">
               <a:rPr lang="en-US" smtClean="0"/>
-              <a:t>‹#›</a:t>
             </a:fld>
             <a:endParaRPr lang="en-US"/>
           </a:p>
         </p:txBody>
       </p:sp>
     </p:spTree>
-    <p:extLst>
-      <p:ext uri="{BB962C8B-B14F-4D97-AF65-F5344CB8AC3E}">
-        <p14:creationId xmlns:p14="http://schemas.microsoft.com/office/powerpoint/2010/main" val="2209977519"/>
-      </p:ext>
-    </p:extLst>
   </p:cSld>
   <p:clrMap bg1="lt1" tx1="dk1" bg2="lt2" tx2="dk2" accent1="accent1" accent2="accent2" accent3="accent3" accent4="accent4" accent5="accent5" accent6="accent6" hlink="hlink" folHlink="folHlink"/>
   <p:sldLayoutIdLst>
@@ -2864,7 +2837,7 @@
         <a:spcBef>
           <a:spcPct val="20000"/>
         </a:spcBef>
-        <a:buFont typeface="Arial"/>
+        <a:buFont typeface="Arial" panose="020B0604020202020204"/>
         <a:buChar char="•"/>
         <a:defRPr sz="3200" kern="1200">
           <a:solidFill>
@@ -2879,7 +2852,7 @@
         <a:spcBef>
           <a:spcPct val="20000"/>
         </a:spcBef>
-        <a:buFont typeface="Arial"/>
+        <a:buFont typeface="Arial" panose="020B0604020202020204"/>
         <a:buChar char="–"/>
         <a:defRPr sz="2800" kern="1200">
           <a:solidFill>
@@ -2894,7 +2867,7 @@
         <a:spcBef>
           <a:spcPct val="20000"/>
         </a:spcBef>
-        <a:buFont typeface="Arial"/>
+        <a:buFont typeface="Arial" panose="020B0604020202020204"/>
         <a:buChar char="•"/>
         <a:defRPr sz="2400" kern="1200">
           <a:solidFill>
@@ -2909,7 +2882,7 @@
         <a:spcBef>
           <a:spcPct val="20000"/>
         </a:spcBef>
-        <a:buFont typeface="Arial"/>
+        <a:buFont typeface="Arial" panose="020B0604020202020204"/>
         <a:buChar char="–"/>
         <a:defRPr sz="2000" kern="1200">
           <a:solidFill>
@@ -2924,7 +2897,7 @@
         <a:spcBef>
           <a:spcPct val="20000"/>
         </a:spcBef>
-        <a:buFont typeface="Arial"/>
+        <a:buFont typeface="Arial" panose="020B0604020202020204"/>
         <a:buChar char="»"/>
         <a:defRPr sz="2000" kern="1200">
           <a:solidFill>
@@ -2939,7 +2912,7 @@
         <a:spcBef>
           <a:spcPct val="20000"/>
         </a:spcBef>
-        <a:buFont typeface="Arial"/>
+        <a:buFont typeface="Arial" panose="020B0604020202020204"/>
         <a:buChar char="•"/>
         <a:defRPr sz="2000" kern="1200">
           <a:solidFill>
@@ -2954,7 +2927,7 @@
         <a:spcBef>
           <a:spcPct val="20000"/>
         </a:spcBef>
-        <a:buFont typeface="Arial"/>
+        <a:buFont typeface="Arial" panose="020B0604020202020204"/>
         <a:buChar char="•"/>
         <a:defRPr sz="2000" kern="1200">
           <a:solidFill>
@@ -2969,7 +2942,7 @@
         <a:spcBef>
           <a:spcPct val="20000"/>
         </a:spcBef>
-        <a:buFont typeface="Arial"/>
+        <a:buFont typeface="Arial" panose="020B0604020202020204"/>
         <a:buChar char="•"/>
         <a:defRPr sz="2000" kern="1200">
           <a:solidFill>
@@ -2984,7 +2957,7 @@
         <a:spcBef>
           <a:spcPct val="20000"/>
         </a:spcBef>
-        <a:buFont typeface="Arial"/>
+        <a:buFont typeface="Arial" panose="020B0604020202020204"/>
         <a:buChar char="•"/>
         <a:defRPr sz="2000" kern="1200">
           <a:solidFill>
@@ -3096,7 +3069,7 @@
 </file>
 
 <file path=ppt/slides/slide1.xml><?xml version="1.0" encoding="utf-8"?>
-<p:sld xmlns:a="http://schemas.openxmlformats.org/drawingml/2006/main" xmlns:p="http://schemas.openxmlformats.org/presentationml/2006/main" xmlns:r="http://schemas.openxmlformats.org/officeDocument/2006/relationships">
+<p:sld xmlns:a="http://schemas.openxmlformats.org/drawingml/2006/main" xmlns:r="http://schemas.openxmlformats.org/officeDocument/2006/relationships" xmlns:p="http://schemas.openxmlformats.org/presentationml/2006/main">
   <p:cSld>
     <p:spTree>
       <p:nvGrpSpPr>
@@ -3223,7 +3196,7 @@
                 <a:solidFill>
                   <a:srgbClr val="FFFFFF"/>
                 </a:solidFill>
-                <a:latin typeface="Microsoft YaHei"/>
+                <a:latin typeface="微软雅黑" panose="020B0503020204020204" charset="-122"/>
               </a:defRPr>
             </a:pPr>
             <a:r>
@@ -3262,7 +3235,7 @@
                 <a:solidFill>
                   <a:srgbClr val="8B5CF6"/>
                 </a:solidFill>
-                <a:latin typeface="Microsoft YaHei"/>
+                <a:latin typeface="微软雅黑" panose="020B0503020204020204" charset="-122"/>
               </a:defRPr>
             </a:pPr>
             <a:r>
@@ -3301,7 +3274,7 @@
                 <a:solidFill>
                   <a:srgbClr val="BBC5D5"/>
                 </a:solidFill>
-                <a:latin typeface="Microsoft YaHei"/>
+                <a:latin typeface="微软雅黑" panose="020B0503020204020204" charset="-122"/>
               </a:defRPr>
             </a:pPr>
             <a:r>
@@ -3340,7 +3313,7 @@
                 <a:solidFill>
                   <a:srgbClr val="9AA6B5"/>
                 </a:solidFill>
-                <a:latin typeface="Microsoft YaHei"/>
+                <a:latin typeface="微软雅黑" panose="020B0503020204020204" charset="-122"/>
               </a:defRPr>
             </a:pPr>
             <a:r>
@@ -3356,7 +3329,7 @@
                 <a:solidFill>
                   <a:srgbClr val="9AA6B5"/>
                 </a:solidFill>
-                <a:latin typeface="Microsoft YaHei"/>
+                <a:latin typeface="微软雅黑" panose="020B0503020204020204" charset="-122"/>
               </a:defRPr>
             </a:pPr>
             <a:r>
@@ -3374,7 +3347,7 @@
 </file>
 
 <file path=ppt/slides/slide10.xml><?xml version="1.0" encoding="utf-8"?>
-<p:sld xmlns:a="http://schemas.openxmlformats.org/drawingml/2006/main" xmlns:p="http://schemas.openxmlformats.org/presentationml/2006/main" xmlns:r="http://schemas.openxmlformats.org/officeDocument/2006/relationships">
+<p:sld xmlns:a="http://schemas.openxmlformats.org/drawingml/2006/main" xmlns:r="http://schemas.openxmlformats.org/officeDocument/2006/relationships" xmlns:p="http://schemas.openxmlformats.org/presentationml/2006/main">
   <p:cSld>
     <p:spTree>
       <p:nvGrpSpPr>
@@ -3457,7 +3430,7 @@
                 <a:solidFill>
                   <a:srgbClr val="1E293B"/>
                 </a:solidFill>
-                <a:latin typeface="Microsoft YaHei"/>
+                <a:latin typeface="微软雅黑" panose="020B0503020204020204" charset="-122"/>
               </a:defRPr>
             </a:pPr>
             <a:r>
@@ -3496,7 +3469,7 @@
                 <a:solidFill>
                   <a:srgbClr val="5A6474"/>
                 </a:solidFill>
-                <a:latin typeface="Microsoft YaHei"/>
+                <a:latin typeface="微软雅黑" panose="020B0503020204020204" charset="-122"/>
               </a:defRPr>
             </a:pPr>
             <a:r>
@@ -3581,7 +3554,7 @@
                 <a:solidFill>
                   <a:srgbClr val="8B5CF6"/>
                 </a:solidFill>
-                <a:latin typeface="Microsoft YaHei"/>
+                <a:latin typeface="微软雅黑" panose="020B0503020204020204" charset="-122"/>
               </a:rPr>
               <a:t>▍MockToolRegistry</a:t>
             </a:r>
@@ -3590,10 +3563,16 @@
                 <a:solidFill>
                   <a:srgbClr val="1E293B"/>
                 </a:solidFill>
-                <a:latin typeface="Microsoft YaHei"/>
+                <a:latin typeface="微软雅黑" panose="020B0503020204020204" charset="-122"/>
               </a:rPr>
               <a:t>  57 个工具与正式版同名/同参/同返回，内存实现不改磁盘，安全可复现</a:t>
             </a:r>
+            <a:endParaRPr sz="1800">
+              <a:solidFill>
+                <a:srgbClr val="1E293B"/>
+              </a:solidFill>
+              <a:latin typeface="微软雅黑" panose="020B0503020204020204" charset="-122"/>
+            </a:endParaRPr>
           </a:p>
           <a:p>
             <a:pPr>
@@ -3606,7 +3585,7 @@
                 <a:solidFill>
                   <a:srgbClr val="8B5CF6"/>
                 </a:solidFill>
-                <a:latin typeface="Microsoft YaHei"/>
+                <a:latin typeface="微软雅黑" panose="020B0503020204020204" charset="-122"/>
               </a:rPr>
               <a:t>▍MockSkillLibrary / MockOSServiceAPI</a:t>
             </a:r>
@@ -3615,10 +3594,16 @@
                 <a:solidFill>
                   <a:srgbClr val="1E293B"/>
                 </a:solidFill>
-                <a:latin typeface="Microsoft YaHei"/>
+                <a:latin typeface="微软雅黑" panose="020B0503020204020204" charset="-122"/>
               </a:rPr>
               <a:t>  26 技能与统一 API 入口的 Mock，三件套全覆盖</a:t>
             </a:r>
+            <a:endParaRPr sz="1800">
+              <a:solidFill>
+                <a:srgbClr val="1E293B"/>
+              </a:solidFill>
+              <a:latin typeface="微软雅黑" panose="020B0503020204020204" charset="-122"/>
+            </a:endParaRPr>
           </a:p>
           <a:p>
             <a:pPr>
@@ -3631,7 +3616,7 @@
                 <a:solidFill>
                   <a:srgbClr val="8B5CF6"/>
                 </a:solidFill>
-                <a:latin typeface="Microsoft YaHei"/>
+                <a:latin typeface="微软雅黑" panose="020B0503020204020204" charset="-122"/>
               </a:rPr>
               <a:t>▍联调价值</a:t>
             </a:r>
@@ -3640,10 +3625,16 @@
                 <a:solidFill>
                   <a:srgbClr val="1E293B"/>
                 </a:solidFill>
-                <a:latin typeface="Microsoft YaHei"/>
+                <a:latin typeface="微软雅黑" panose="020B0503020204020204" charset="-122"/>
               </a:rPr>
               <a:t>  第 1/2/3 组可离线开发与联调，不被第 4 组真实实现阻塞</a:t>
             </a:r>
+            <a:endParaRPr sz="1800">
+              <a:solidFill>
+                <a:srgbClr val="1E293B"/>
+              </a:solidFill>
+              <a:latin typeface="微软雅黑" panose="020B0503020204020204" charset="-122"/>
+            </a:endParaRPr>
           </a:p>
           <a:p>
             <a:pPr>
@@ -3656,7 +3647,7 @@
                 <a:solidFill>
                   <a:srgbClr val="8B5CF6"/>
                 </a:solidFill>
-                <a:latin typeface="Microsoft YaHei"/>
+                <a:latin typeface="微软雅黑" panose="020B0503020204020204" charset="-122"/>
               </a:rPr>
               <a:t>▍真实 LLM 联调</a:t>
             </a:r>
@@ -3665,10 +3656,16 @@
                 <a:solidFill>
                   <a:srgbClr val="1E293B"/>
                 </a:solidFill>
-                <a:latin typeface="Microsoft YaHei"/>
+                <a:latin typeface="微软雅黑" panose="020B0503020204020204" charset="-122"/>
               </a:rPr>
               <a:t>  阿里云百炼 qwen3.5-plus function-calling 真机驱动多步工具调用（证据 docs/evidence/agent_qwen_live.md）</a:t>
             </a:r>
+            <a:endParaRPr sz="1800">
+              <a:solidFill>
+                <a:srgbClr val="1E293B"/>
+              </a:solidFill>
+              <a:latin typeface="微软雅黑" panose="020B0503020204020204" charset="-122"/>
+            </a:endParaRPr>
           </a:p>
           <a:p>
             <a:pPr>
@@ -3681,7 +3678,7 @@
                 <a:solidFill>
                   <a:srgbClr val="8B5CF6"/>
                 </a:solidFill>
-                <a:latin typeface="Microsoft YaHei"/>
+                <a:latin typeface="微软雅黑" panose="020B0503020204020204" charset="-122"/>
               </a:rPr>
               <a:t>▍邮件/QQ 真机</a:t>
             </a:r>
@@ -3690,10 +3687,16 @@
                 <a:solidFill>
                   <a:srgbClr val="1E293B"/>
                 </a:solidFill>
-                <a:latin typeface="Microsoft YaHei"/>
+                <a:latin typeface="微软雅黑" panose="020B0503020204020204" charset="-122"/>
               </a:rPr>
               <a:t>  send_email SMTP+IMAP 闭环到达核验；QQ 会话经屏幕 OCR 核对标题后读写（证据见 evidence/）</a:t>
             </a:r>
+            <a:endParaRPr sz="1800">
+              <a:solidFill>
+                <a:srgbClr val="1E293B"/>
+              </a:solidFill>
+              <a:latin typeface="微软雅黑" panose="020B0503020204020204" charset="-122"/>
+            </a:endParaRPr>
           </a:p>
         </p:txBody>
       </p:sp>
@@ -3727,7 +3730,7 @@
                 <a:solidFill>
                   <a:srgbClr val="5A6474"/>
                 </a:solidFill>
-                <a:latin typeface="Microsoft YaHei"/>
+                <a:latin typeface="微软雅黑" panose="020B0503020204020204" charset="-122"/>
               </a:defRPr>
             </a:pPr>
             <a:r>
@@ -3745,7 +3748,7 @@
 </file>
 
 <file path=ppt/slides/slide11.xml><?xml version="1.0" encoding="utf-8"?>
-<p:sld xmlns:a="http://schemas.openxmlformats.org/drawingml/2006/main" xmlns:p="http://schemas.openxmlformats.org/presentationml/2006/main" xmlns:r="http://schemas.openxmlformats.org/officeDocument/2006/relationships">
+<p:sld xmlns:a="http://schemas.openxmlformats.org/drawingml/2006/main" xmlns:r="http://schemas.openxmlformats.org/officeDocument/2006/relationships" xmlns:p="http://schemas.openxmlformats.org/presentationml/2006/main">
   <p:cSld>
     <p:spTree>
       <p:nvGrpSpPr>
@@ -3828,7 +3831,7 @@
                 <a:solidFill>
                   <a:srgbClr val="1E293B"/>
                 </a:solidFill>
-                <a:latin typeface="Microsoft YaHei"/>
+                <a:latin typeface="微软雅黑" panose="020B0503020204020204" charset="-122"/>
               </a:defRPr>
             </a:pPr>
             <a:r>
@@ -3867,7 +3870,7 @@
                 <a:solidFill>
                   <a:srgbClr val="5A6474"/>
                 </a:solidFill>
-                <a:latin typeface="Microsoft YaHei"/>
+                <a:latin typeface="微软雅黑" panose="020B0503020204020204" charset="-122"/>
               </a:defRPr>
             </a:pPr>
             <a:r>
@@ -3994,7 +3997,7 @@
                 <a:solidFill>
                   <a:srgbClr val="FFFFFF"/>
                 </a:solidFill>
-                <a:latin typeface="Microsoft YaHei"/>
+                <a:latin typeface="微软雅黑" panose="020B0503020204020204" charset="-122"/>
               </a:defRPr>
             </a:pPr>
             <a:r>
@@ -4033,7 +4036,7 @@
                 <a:solidFill>
                   <a:srgbClr val="FFFFFF"/>
                 </a:solidFill>
-                <a:latin typeface="Microsoft YaHei"/>
+                <a:latin typeface="微软雅黑" panose="020B0503020204020204" charset="-122"/>
               </a:defRPr>
             </a:pPr>
             <a:r>
@@ -4116,7 +4119,7 @@
                 <a:solidFill>
                   <a:srgbClr val="8B5CF6"/>
                 </a:solidFill>
-                <a:latin typeface="Microsoft YaHei"/>
+                <a:latin typeface="微软雅黑" panose="020B0503020204020204" charset="-122"/>
               </a:defRPr>
             </a:pPr>
             <a:r>
@@ -4155,7 +4158,7 @@
                 <a:solidFill>
                   <a:srgbClr val="5A6474"/>
                 </a:solidFill>
-                <a:latin typeface="Microsoft YaHei"/>
+                <a:latin typeface="微软雅黑" panose="020B0503020204020204" charset="-122"/>
               </a:defRPr>
             </a:pPr>
             <a:r>
@@ -4238,7 +4241,7 @@
                 <a:solidFill>
                   <a:srgbClr val="8B5CF6"/>
                 </a:solidFill>
-                <a:latin typeface="Microsoft YaHei"/>
+                <a:latin typeface="微软雅黑" panose="020B0503020204020204" charset="-122"/>
               </a:defRPr>
             </a:pPr>
             <a:r>
@@ -4277,7 +4280,7 @@
                 <a:solidFill>
                   <a:srgbClr val="5A6474"/>
                 </a:solidFill>
-                <a:latin typeface="Microsoft YaHei"/>
+                <a:latin typeface="微软雅黑" panose="020B0503020204020204" charset="-122"/>
               </a:defRPr>
             </a:pPr>
             <a:r>
@@ -4360,7 +4363,7 @@
                 <a:solidFill>
                   <a:srgbClr val="8B5CF6"/>
                 </a:solidFill>
-                <a:latin typeface="Microsoft YaHei"/>
+                <a:latin typeface="微软雅黑" panose="020B0503020204020204" charset="-122"/>
               </a:defRPr>
             </a:pPr>
             <a:r>
@@ -4399,7 +4402,7 @@
                 <a:solidFill>
                   <a:srgbClr val="5A6474"/>
                 </a:solidFill>
-                <a:latin typeface="Microsoft YaHei"/>
+                <a:latin typeface="微软雅黑" panose="020B0503020204020204" charset="-122"/>
               </a:defRPr>
             </a:pPr>
             <a:r>
@@ -4482,7 +4485,7 @@
                 <a:solidFill>
                   <a:srgbClr val="8B5CF6"/>
                 </a:solidFill>
-                <a:latin typeface="Microsoft YaHei"/>
+                <a:latin typeface="微软雅黑" panose="020B0503020204020204" charset="-122"/>
               </a:defRPr>
             </a:pPr>
             <a:r>
@@ -4521,7 +4524,7 @@
                 <a:solidFill>
                   <a:srgbClr val="5A6474"/>
                 </a:solidFill>
-                <a:latin typeface="Microsoft YaHei"/>
+                <a:latin typeface="微软雅黑" panose="020B0503020204020204" charset="-122"/>
               </a:defRPr>
             </a:pPr>
             <a:r>
@@ -4539,7 +4542,7 @@
         <p:spPr>
           <a:xfrm>
             <a:off x="640080" y="3840480"/>
-            <a:ext cx="10881360" cy="2651760"/>
+            <a:ext cx="10881360" cy="1035050"/>
           </a:xfrm>
           <a:prstGeom prst="rect">
             <a:avLst/>
@@ -4562,7 +4565,7 @@
                 <a:solidFill>
                   <a:srgbClr val="8B5CF6"/>
                 </a:solidFill>
-                <a:latin typeface="Microsoft YaHei"/>
+                <a:latin typeface="微软雅黑" panose="020B0503020204020204" charset="-122"/>
               </a:rPr>
               <a:t>▍覆盖映射</a:t>
             </a:r>
@@ -4571,10 +4574,16 @@
                 <a:solidFill>
                   <a:srgbClr val="1E293B"/>
                 </a:solidFill>
-                <a:latin typeface="Microsoft YaHei"/>
+                <a:latin typeface="微软雅黑" panose="020B0503020204020204" charset="-122"/>
               </a:rPr>
               <a:t>  设计书功能要求→测试用例一一映射：接口/统计/签名/Mock/异常/恢复</a:t>
             </a:r>
+            <a:endParaRPr sz="1600">
+              <a:solidFill>
+                <a:srgbClr val="1E293B"/>
+              </a:solidFill>
+              <a:latin typeface="微软雅黑" panose="020B0503020204020204" charset="-122"/>
+            </a:endParaRPr>
           </a:p>
           <a:p>
             <a:pPr>
@@ -4587,7 +4596,7 @@
                 <a:solidFill>
                   <a:srgbClr val="8B5CF6"/>
                 </a:solidFill>
-                <a:latin typeface="Microsoft YaHei"/>
+                <a:latin typeface="微软雅黑" panose="020B0503020204020204" charset="-122"/>
               </a:rPr>
               <a:t>▍运行方式</a:t>
             </a:r>
@@ -4596,10 +4605,16 @@
                 <a:solidFill>
                   <a:srgbClr val="1E293B"/>
                 </a:solidFill>
-                <a:latin typeface="Microsoft YaHei"/>
+                <a:latin typeface="微软雅黑" panose="020B0503020204020204" charset="-122"/>
               </a:rPr>
               <a:t>  python -m pytest -q（全量），或定向 pytest tests/test_tool_registry.py 等</a:t>
             </a:r>
+            <a:endParaRPr sz="1600">
+              <a:solidFill>
+                <a:srgbClr val="1E293B"/>
+              </a:solidFill>
+              <a:latin typeface="微软雅黑" panose="020B0503020204020204" charset="-122"/>
+            </a:endParaRPr>
           </a:p>
           <a:p>
             <a:pPr>
@@ -4612,7 +4627,7 @@
                 <a:solidFill>
                   <a:srgbClr val="8B5CF6"/>
                 </a:solidFill>
-                <a:latin typeface="Microsoft YaHei"/>
+                <a:latin typeface="微软雅黑" panose="020B0503020204020204" charset="-122"/>
               </a:rPr>
               <a:t>▍跨平台</a:t>
             </a:r>
@@ -4621,10 +4636,34 @@
                 <a:solidFill>
                   <a:srgbClr val="1E293B"/>
                 </a:solidFill>
-                <a:latin typeface="Microsoft YaHei"/>
+                <a:latin typeface="微软雅黑" panose="020B0503020204020204" charset="-122"/>
               </a:rPr>
-              <a:t>  Windows 实测通过；Ubuntu 20.04 兼容验证；代码路径全 pathlib + UTF-8</a:t>
-            </a:r>
+              <a:t>  Windows 实测通过；Ubuntu 2</a:t>
+            </a:r>
+            <a:r>
+              <a:rPr lang="en-US" sz="1600">
+                <a:solidFill>
+                  <a:srgbClr val="1E293B"/>
+                </a:solidFill>
+                <a:latin typeface="微软雅黑" panose="020B0503020204020204" charset="-122"/>
+              </a:rPr>
+              <a:t>2</a:t>
+            </a:r>
+            <a:r>
+              <a:rPr sz="1600">
+                <a:solidFill>
+                  <a:srgbClr val="1E293B"/>
+                </a:solidFill>
+                <a:latin typeface="微软雅黑" panose="020B0503020204020204" charset="-122"/>
+              </a:rPr>
+              <a:t>.04 兼容验证；代码路径全 pathlib + UTF-8</a:t>
+            </a:r>
+            <a:endParaRPr sz="1600">
+              <a:solidFill>
+                <a:srgbClr val="1E293B"/>
+              </a:solidFill>
+              <a:latin typeface="微软雅黑" panose="020B0503020204020204" charset="-122"/>
+            </a:endParaRPr>
           </a:p>
         </p:txBody>
       </p:sp>
@@ -4658,7 +4697,7 @@
                 <a:solidFill>
                   <a:srgbClr val="5A6474"/>
                 </a:solidFill>
-                <a:latin typeface="Microsoft YaHei"/>
+                <a:latin typeface="微软雅黑" panose="020B0503020204020204" charset="-122"/>
               </a:defRPr>
             </a:pPr>
             <a:r>
@@ -4676,7 +4715,7 @@
 </file>
 
 <file path=ppt/slides/slide12.xml><?xml version="1.0" encoding="utf-8"?>
-<p:sld xmlns:a="http://schemas.openxmlformats.org/drawingml/2006/main" xmlns:p="http://schemas.openxmlformats.org/presentationml/2006/main" xmlns:r="http://schemas.openxmlformats.org/officeDocument/2006/relationships">
+<p:sld xmlns:a="http://schemas.openxmlformats.org/drawingml/2006/main" xmlns:r="http://schemas.openxmlformats.org/officeDocument/2006/relationships" xmlns:p="http://schemas.openxmlformats.org/presentationml/2006/main">
   <p:cSld>
     <p:spTree>
       <p:nvGrpSpPr>
@@ -4759,7 +4798,7 @@
                 <a:solidFill>
                   <a:srgbClr val="1E293B"/>
                 </a:solidFill>
-                <a:latin typeface="Microsoft YaHei"/>
+                <a:latin typeface="微软雅黑" panose="020B0503020204020204" charset="-122"/>
               </a:defRPr>
             </a:pPr>
             <a:r>
@@ -4798,7 +4837,7 @@
                 <a:solidFill>
                   <a:srgbClr val="5A6474"/>
                 </a:solidFill>
-                <a:latin typeface="Microsoft YaHei"/>
+                <a:latin typeface="微软雅黑" panose="020B0503020204020204" charset="-122"/>
               </a:defRPr>
             </a:pPr>
             <a:r>
@@ -4925,7 +4964,7 @@
                 <a:solidFill>
                   <a:srgbClr val="8B5CF6"/>
                 </a:solidFill>
-                <a:latin typeface="Microsoft YaHei"/>
+                <a:latin typeface="微软雅黑" panose="020B0503020204020204" charset="-122"/>
               </a:defRPr>
             </a:pPr>
             <a:r>
@@ -4964,7 +5003,7 @@
                 <a:solidFill>
                   <a:srgbClr val="1E293B"/>
                 </a:solidFill>
-                <a:latin typeface="Microsoft YaHei"/>
+                <a:latin typeface="微软雅黑" panose="020B0503020204020204" charset="-122"/>
               </a:defRPr>
             </a:pPr>
             <a:r>
@@ -5003,7 +5042,7 @@
                 <a:solidFill>
                   <a:srgbClr val="8B5CF6"/>
                 </a:solidFill>
-                <a:latin typeface="Microsoft YaHei"/>
+                <a:latin typeface="微软雅黑" panose="020B0503020204020204" charset="-122"/>
               </a:defRPr>
             </a:pPr>
             <a:r>
@@ -5086,7 +5125,7 @@
                 <a:solidFill>
                   <a:srgbClr val="8B5CF6"/>
                 </a:solidFill>
-                <a:latin typeface="Microsoft YaHei"/>
+                <a:latin typeface="微软雅黑" panose="020B0503020204020204" charset="-122"/>
               </a:defRPr>
             </a:pPr>
             <a:r>
@@ -5125,7 +5164,7 @@
                 <a:solidFill>
                   <a:srgbClr val="1E293B"/>
                 </a:solidFill>
-                <a:latin typeface="Microsoft YaHei"/>
+                <a:latin typeface="微软雅黑" panose="020B0503020204020204" charset="-122"/>
               </a:defRPr>
             </a:pPr>
             <a:r>
@@ -5164,7 +5203,7 @@
                 <a:solidFill>
                   <a:srgbClr val="8B5CF6"/>
                 </a:solidFill>
-                <a:latin typeface="Microsoft YaHei"/>
+                <a:latin typeface="微软雅黑" panose="020B0503020204020204" charset="-122"/>
               </a:defRPr>
             </a:pPr>
             <a:r>
@@ -5247,7 +5286,7 @@
                 <a:solidFill>
                   <a:srgbClr val="8B5CF6"/>
                 </a:solidFill>
-                <a:latin typeface="Microsoft YaHei"/>
+                <a:latin typeface="微软雅黑" panose="020B0503020204020204" charset="-122"/>
               </a:defRPr>
             </a:pPr>
             <a:r>
@@ -5286,7 +5325,7 @@
                 <a:solidFill>
                   <a:srgbClr val="1E293B"/>
                 </a:solidFill>
-                <a:latin typeface="Microsoft YaHei"/>
+                <a:latin typeface="微软雅黑" panose="020B0503020204020204" charset="-122"/>
               </a:defRPr>
             </a:pPr>
             <a:r>
@@ -5325,7 +5364,7 @@
                 <a:solidFill>
                   <a:srgbClr val="8B5CF6"/>
                 </a:solidFill>
-                <a:latin typeface="Microsoft YaHei"/>
+                <a:latin typeface="微软雅黑" panose="020B0503020204020204" charset="-122"/>
               </a:defRPr>
             </a:pPr>
             <a:r>
@@ -5408,7 +5447,7 @@
                 <a:solidFill>
                   <a:srgbClr val="8B5CF6"/>
                 </a:solidFill>
-                <a:latin typeface="Microsoft YaHei"/>
+                <a:latin typeface="微软雅黑" panose="020B0503020204020204" charset="-122"/>
               </a:defRPr>
             </a:pPr>
             <a:r>
@@ -5447,7 +5486,7 @@
                 <a:solidFill>
                   <a:srgbClr val="1E293B"/>
                 </a:solidFill>
-                <a:latin typeface="Microsoft YaHei"/>
+                <a:latin typeface="微软雅黑" panose="020B0503020204020204" charset="-122"/>
               </a:defRPr>
             </a:pPr>
             <a:r>
@@ -5486,7 +5525,7 @@
                 <a:solidFill>
                   <a:srgbClr val="8B5CF6"/>
                 </a:solidFill>
-                <a:latin typeface="Microsoft YaHei"/>
+                <a:latin typeface="微软雅黑" panose="020B0503020204020204" charset="-122"/>
               </a:defRPr>
             </a:pPr>
             <a:r>
@@ -5569,7 +5608,7 @@
                 <a:solidFill>
                   <a:srgbClr val="8B5CF6"/>
                 </a:solidFill>
-                <a:latin typeface="Microsoft YaHei"/>
+                <a:latin typeface="微软雅黑" panose="020B0503020204020204" charset="-122"/>
               </a:defRPr>
             </a:pPr>
             <a:r>
@@ -5608,7 +5647,7 @@
                 <a:solidFill>
                   <a:srgbClr val="1E293B"/>
                 </a:solidFill>
-                <a:latin typeface="Microsoft YaHei"/>
+                <a:latin typeface="微软雅黑" panose="020B0503020204020204" charset="-122"/>
               </a:defRPr>
             </a:pPr>
             <a:r>
@@ -5647,7 +5686,7 @@
                 <a:solidFill>
                   <a:srgbClr val="8B5CF6"/>
                 </a:solidFill>
-                <a:latin typeface="Microsoft YaHei"/>
+                <a:latin typeface="微软雅黑" panose="020B0503020204020204" charset="-122"/>
               </a:defRPr>
             </a:pPr>
             <a:r>
@@ -5730,7 +5769,7 @@
                 <a:solidFill>
                   <a:srgbClr val="8B5CF6"/>
                 </a:solidFill>
-                <a:latin typeface="Microsoft YaHei"/>
+                <a:latin typeface="微软雅黑" panose="020B0503020204020204" charset="-122"/>
               </a:defRPr>
             </a:pPr>
             <a:r>
@@ -5769,7 +5808,7 @@
                 <a:solidFill>
                   <a:srgbClr val="1E293B"/>
                 </a:solidFill>
-                <a:latin typeface="Microsoft YaHei"/>
+                <a:latin typeface="微软雅黑" panose="020B0503020204020204" charset="-122"/>
               </a:defRPr>
             </a:pPr>
             <a:r>
@@ -5808,7 +5847,7 @@
                 <a:solidFill>
                   <a:srgbClr val="8B5CF6"/>
                 </a:solidFill>
-                <a:latin typeface="Microsoft YaHei"/>
+                <a:latin typeface="微软雅黑" panose="020B0503020204020204" charset="-122"/>
               </a:defRPr>
             </a:pPr>
             <a:r>
@@ -5891,7 +5930,7 @@
                 <a:solidFill>
                   <a:srgbClr val="1E293B"/>
                 </a:solidFill>
-                <a:latin typeface="Microsoft YaHei"/>
+                <a:latin typeface="微软雅黑" panose="020B0503020204020204" charset="-122"/>
               </a:defRPr>
             </a:pPr>
             <a:r>
@@ -5907,7 +5946,7 @@
                 <a:solidFill>
                   <a:srgbClr val="1E293B"/>
                 </a:solidFill>
-                <a:latin typeface="Microsoft YaHei"/>
+                <a:latin typeface="微软雅黑" panose="020B0503020204020204" charset="-122"/>
               </a:defRPr>
             </a:pPr>
             <a:r>
@@ -5923,7 +5962,7 @@
                 <a:solidFill>
                   <a:srgbClr val="1E293B"/>
                 </a:solidFill>
-                <a:latin typeface="Microsoft YaHei"/>
+                <a:latin typeface="微软雅黑" panose="020B0503020204020204" charset="-122"/>
               </a:defRPr>
             </a:pPr>
             <a:r>
@@ -5939,7 +5978,7 @@
                 <a:solidFill>
                   <a:srgbClr val="1E293B"/>
                 </a:solidFill>
-                <a:latin typeface="Microsoft YaHei"/>
+                <a:latin typeface="微软雅黑" panose="020B0503020204020204" charset="-122"/>
               </a:defRPr>
             </a:pPr>
             <a:r>
@@ -5955,7 +5994,7 @@
                 <a:solidFill>
                   <a:srgbClr val="1E293B"/>
                 </a:solidFill>
-                <a:latin typeface="Microsoft YaHei"/>
+                <a:latin typeface="微软雅黑" panose="020B0503020204020204" charset="-122"/>
               </a:defRPr>
             </a:pPr>
             <a:r>
@@ -5971,7 +6010,7 @@
                 <a:solidFill>
                   <a:srgbClr val="1E293B"/>
                 </a:solidFill>
-                <a:latin typeface="Microsoft YaHei"/>
+                <a:latin typeface="微软雅黑" panose="020B0503020204020204" charset="-122"/>
               </a:defRPr>
             </a:pPr>
             <a:r>
@@ -6010,7 +6049,7 @@
                 <a:solidFill>
                   <a:srgbClr val="5A6474"/>
                 </a:solidFill>
-                <a:latin typeface="Microsoft YaHei"/>
+                <a:latin typeface="微软雅黑" panose="020B0503020204020204" charset="-122"/>
               </a:defRPr>
             </a:pPr>
             <a:r>
@@ -6028,7 +6067,7 @@
 </file>
 
 <file path=ppt/slides/slide13.xml><?xml version="1.0" encoding="utf-8"?>
-<p:sld xmlns:a="http://schemas.openxmlformats.org/drawingml/2006/main" xmlns:p="http://schemas.openxmlformats.org/presentationml/2006/main" xmlns:r="http://schemas.openxmlformats.org/officeDocument/2006/relationships">
+<p:sld xmlns:a="http://schemas.openxmlformats.org/drawingml/2006/main" xmlns:r="http://schemas.openxmlformats.org/officeDocument/2006/relationships" xmlns:p="http://schemas.openxmlformats.org/presentationml/2006/main">
   <p:cSld>
     <p:spTree>
       <p:nvGrpSpPr>
@@ -6111,7 +6150,7 @@
                 <a:solidFill>
                   <a:srgbClr val="1E293B"/>
                 </a:solidFill>
-                <a:latin typeface="Microsoft YaHei"/>
+                <a:latin typeface="微软雅黑" panose="020B0503020204020204" charset="-122"/>
               </a:defRPr>
             </a:pPr>
             <a:r>
@@ -6150,7 +6189,7 @@
                 <a:solidFill>
                   <a:srgbClr val="5A6474"/>
                 </a:solidFill>
-                <a:latin typeface="Microsoft YaHei"/>
+                <a:latin typeface="微软雅黑" panose="020B0503020204020204" charset="-122"/>
               </a:defRPr>
             </a:pPr>
             <a:r>
@@ -6277,7 +6316,7 @@
                 <a:solidFill>
                   <a:srgbClr val="8B5CF6"/>
                 </a:solidFill>
-                <a:latin typeface="Microsoft YaHei"/>
+                <a:latin typeface="微软雅黑" panose="020B0503020204020204" charset="-122"/>
               </a:defRPr>
             </a:pPr>
             <a:r>
@@ -6316,7 +6355,7 @@
                 <a:solidFill>
                   <a:srgbClr val="1E293B"/>
                 </a:solidFill>
-                <a:latin typeface="Microsoft YaHei"/>
+                <a:latin typeface="微软雅黑" panose="020B0503020204020204" charset="-122"/>
               </a:defRPr>
             </a:pPr>
             <a:r>
@@ -6399,7 +6438,7 @@
                 <a:solidFill>
                   <a:srgbClr val="8B5CF6"/>
                 </a:solidFill>
-                <a:latin typeface="Microsoft YaHei"/>
+                <a:latin typeface="微软雅黑" panose="020B0503020204020204" charset="-122"/>
               </a:defRPr>
             </a:pPr>
             <a:r>
@@ -6438,7 +6477,7 @@
                 <a:solidFill>
                   <a:srgbClr val="1E293B"/>
                 </a:solidFill>
-                <a:latin typeface="Microsoft YaHei"/>
+                <a:latin typeface="微软雅黑" panose="020B0503020204020204" charset="-122"/>
               </a:defRPr>
             </a:pPr>
             <a:r>
@@ -6521,7 +6560,7 @@
                 <a:solidFill>
                   <a:srgbClr val="8B5CF6"/>
                 </a:solidFill>
-                <a:latin typeface="Microsoft YaHei"/>
+                <a:latin typeface="微软雅黑" panose="020B0503020204020204" charset="-122"/>
               </a:defRPr>
             </a:pPr>
             <a:r>
@@ -6560,7 +6599,7 @@
                 <a:solidFill>
                   <a:srgbClr val="1E293B"/>
                 </a:solidFill>
-                <a:latin typeface="Microsoft YaHei"/>
+                <a:latin typeface="微软雅黑" panose="020B0503020204020204" charset="-122"/>
               </a:defRPr>
             </a:pPr>
             <a:r>
@@ -6643,7 +6682,7 @@
                 <a:solidFill>
                   <a:srgbClr val="8B5CF6"/>
                 </a:solidFill>
-                <a:latin typeface="Microsoft YaHei"/>
+                <a:latin typeface="微软雅黑" panose="020B0503020204020204" charset="-122"/>
               </a:defRPr>
             </a:pPr>
             <a:r>
@@ -6682,7 +6721,7 @@
                 <a:solidFill>
                   <a:srgbClr val="1E293B"/>
                 </a:solidFill>
-                <a:latin typeface="Microsoft YaHei"/>
+                <a:latin typeface="微软雅黑" panose="020B0503020204020204" charset="-122"/>
               </a:defRPr>
             </a:pPr>
             <a:r>
@@ -6765,7 +6804,7 @@
                 <a:solidFill>
                   <a:srgbClr val="8B5CF6"/>
                 </a:solidFill>
-                <a:latin typeface="Microsoft YaHei"/>
+                <a:latin typeface="微软雅黑" panose="020B0503020204020204" charset="-122"/>
               </a:defRPr>
             </a:pPr>
             <a:r>
@@ -6804,7 +6843,7 @@
                 <a:solidFill>
                   <a:srgbClr val="1E293B"/>
                 </a:solidFill>
-                <a:latin typeface="Microsoft YaHei"/>
+                <a:latin typeface="微软雅黑" panose="020B0503020204020204" charset="-122"/>
               </a:defRPr>
             </a:pPr>
             <a:r>
@@ -6887,7 +6926,7 @@
                 <a:solidFill>
                   <a:srgbClr val="8B5CF6"/>
                 </a:solidFill>
-                <a:latin typeface="Microsoft YaHei"/>
+                <a:latin typeface="微软雅黑" panose="020B0503020204020204" charset="-122"/>
               </a:defRPr>
             </a:pPr>
             <a:r>
@@ -6926,7 +6965,7 @@
                 <a:solidFill>
                   <a:srgbClr val="1E293B"/>
                 </a:solidFill>
-                <a:latin typeface="Microsoft YaHei"/>
+                <a:latin typeface="微软雅黑" panose="020B0503020204020204" charset="-122"/>
               </a:defRPr>
             </a:pPr>
             <a:r>
@@ -6965,7 +7004,7 @@
                 <a:solidFill>
                   <a:srgbClr val="5A6474"/>
                 </a:solidFill>
-                <a:latin typeface="Microsoft YaHei"/>
+                <a:latin typeface="微软雅黑" panose="020B0503020204020204" charset="-122"/>
               </a:defRPr>
             </a:pPr>
             <a:r>
@@ -7004,7 +7043,7 @@
                 <a:solidFill>
                   <a:srgbClr val="5A6474"/>
                 </a:solidFill>
-                <a:latin typeface="Microsoft YaHei"/>
+                <a:latin typeface="微软雅黑" panose="020B0503020204020204" charset="-122"/>
               </a:defRPr>
             </a:pPr>
             <a:r>
@@ -7022,7 +7061,7 @@
 </file>
 
 <file path=ppt/slides/slide14.xml><?xml version="1.0" encoding="utf-8"?>
-<p:sld xmlns:a="http://schemas.openxmlformats.org/drawingml/2006/main" xmlns:p="http://schemas.openxmlformats.org/presentationml/2006/main" xmlns:r="http://schemas.openxmlformats.org/officeDocument/2006/relationships">
+<p:sld xmlns:a="http://schemas.openxmlformats.org/drawingml/2006/main" xmlns:r="http://schemas.openxmlformats.org/officeDocument/2006/relationships" xmlns:p="http://schemas.openxmlformats.org/presentationml/2006/main">
   <p:cSld>
     <p:spTree>
       <p:nvGrpSpPr>
@@ -7105,7 +7144,7 @@
                 <a:solidFill>
                   <a:srgbClr val="1E293B"/>
                 </a:solidFill>
-                <a:latin typeface="Microsoft YaHei"/>
+                <a:latin typeface="微软雅黑" panose="020B0503020204020204" charset="-122"/>
               </a:defRPr>
             </a:pPr>
             <a:r>
@@ -7144,7 +7183,7 @@
                 <a:solidFill>
                   <a:srgbClr val="5A6474"/>
                 </a:solidFill>
-                <a:latin typeface="Microsoft YaHei"/>
+                <a:latin typeface="微软雅黑" panose="020B0503020204020204" charset="-122"/>
               </a:defRPr>
             </a:pPr>
             <a:r>
@@ -7229,7 +7268,7 @@
                 <a:solidFill>
                   <a:srgbClr val="8B5CF6"/>
                 </a:solidFill>
-                <a:latin typeface="Microsoft YaHei"/>
+                <a:latin typeface="微软雅黑" panose="020B0503020204020204" charset="-122"/>
               </a:rPr>
               <a:t>▍token 优化</a:t>
             </a:r>
@@ -7238,10 +7277,16 @@
                 <a:solidFill>
                   <a:srgbClr val="1E293B"/>
                 </a:solidFill>
-                <a:latin typeface="Microsoft YaHei"/>
+                <a:latin typeface="微软雅黑" panose="020B0503020204020204" charset="-122"/>
               </a:rPr>
               <a:t>  工具结果超长自动截断(默认 4000 字符) + 循环上限(15 步) + max_tokens，对齐 LangGraph 社区实践</a:t>
             </a:r>
+            <a:endParaRPr sz="1700">
+              <a:solidFill>
+                <a:srgbClr val="1E293B"/>
+              </a:solidFill>
+              <a:latin typeface="微软雅黑" panose="020B0503020204020204" charset="-122"/>
+            </a:endParaRPr>
           </a:p>
           <a:p>
             <a:pPr>
@@ -7254,7 +7299,7 @@
                 <a:solidFill>
                   <a:srgbClr val="8B5CF6"/>
                 </a:solidFill>
-                <a:latin typeface="Microsoft YaHei"/>
+                <a:latin typeface="微软雅黑" panose="020B0503020204020204" charset="-122"/>
               </a:rPr>
               <a:t>▍连接复用</a:t>
             </a:r>
@@ -7263,10 +7308,16 @@
                 <a:solidFill>
                   <a:srgbClr val="1E293B"/>
                 </a:solidFill>
-                <a:latin typeface="Microsoft YaHei"/>
+                <a:latin typeface="微软雅黑" panose="020B0503020204020204" charset="-122"/>
               </a:rPr>
               <a:t>  requests.Session 线程本地复用 TCP/TLS 连接，避免反复握手</a:t>
             </a:r>
+            <a:endParaRPr sz="1700">
+              <a:solidFill>
+                <a:srgbClr val="1E293B"/>
+              </a:solidFill>
+              <a:latin typeface="微软雅黑" panose="020B0503020204020204" charset="-122"/>
+            </a:endParaRPr>
           </a:p>
           <a:p>
             <a:pPr>
@@ -7279,7 +7330,7 @@
                 <a:solidFill>
                   <a:srgbClr val="8B5CF6"/>
                 </a:solidFill>
-                <a:latin typeface="Microsoft YaHei"/>
+                <a:latin typeface="微软雅黑" panose="020B0503020204020204" charset="-122"/>
               </a:rPr>
               <a:t>▍联网双模式</a:t>
             </a:r>
@@ -7288,10 +7339,16 @@
                 <a:solidFill>
                   <a:srgbClr val="1E293B"/>
                 </a:solidFill>
-                <a:latin typeface="Microsoft YaHei"/>
+                <a:latin typeface="微软雅黑" panose="020B0503020204020204" charset="-122"/>
               </a:rPr>
               <a:t>  百炼服务端搜索(enable_search) / 本地搜索工具，总开关统一管理，隐藏低质量本地搜索</a:t>
             </a:r>
+            <a:endParaRPr sz="1700">
+              <a:solidFill>
+                <a:srgbClr val="1E293B"/>
+              </a:solidFill>
+              <a:latin typeface="微软雅黑" panose="020B0503020204020204" charset="-122"/>
+            </a:endParaRPr>
           </a:p>
           <a:p>
             <a:pPr>
@@ -7304,7 +7361,7 @@
                 <a:solidFill>
                   <a:srgbClr val="8B5CF6"/>
                 </a:solidFill>
-                <a:latin typeface="Microsoft YaHei"/>
+                <a:latin typeface="微软雅黑" panose="020B0503020204020204" charset="-122"/>
               </a:rPr>
               <a:t>▍代码解释器</a:t>
             </a:r>
@@ -7313,10 +7370,16 @@
                 <a:solidFill>
                   <a:srgbClr val="1E293B"/>
                 </a:solidFill>
-                <a:latin typeface="Microsoft YaHei"/>
+                <a:latin typeface="微软雅黑" panose="020B0503020204020204" charset="-122"/>
               </a:rPr>
               <a:t>  纯计算回合自动启用百炼服务端 Python 沙箱（123²¹ 精确算出），模型不支持自动探测停用</a:t>
             </a:r>
+            <a:endParaRPr sz="1700">
+              <a:solidFill>
+                <a:srgbClr val="1E293B"/>
+              </a:solidFill>
+              <a:latin typeface="微软雅黑" panose="020B0503020204020204" charset="-122"/>
+            </a:endParaRPr>
           </a:p>
           <a:p>
             <a:pPr>
@@ -7329,7 +7392,7 @@
                 <a:solidFill>
                   <a:srgbClr val="8B5CF6"/>
                 </a:solidFill>
-                <a:latin typeface="Microsoft YaHei"/>
+                <a:latin typeface="微软雅黑" panose="020B0503020204020204" charset="-122"/>
               </a:rPr>
               <a:t>▍跨平台</a:t>
             </a:r>
@@ -7338,10 +7401,16 @@
                 <a:solidFill>
                   <a:srgbClr val="1E293B"/>
                 </a:solidFill>
-                <a:latin typeface="Microsoft YaHei"/>
+                <a:latin typeface="微软雅黑" panose="020B0503020204020204" charset="-122"/>
               </a:rPr>
               <a:t>  Windows/Linux 双实现层（Win32 ctypes / xdotool+wmctrl），CDP 跨平台，全 pathlib + UTF-8</a:t>
             </a:r>
+            <a:endParaRPr sz="1700">
+              <a:solidFill>
+                <a:srgbClr val="1E293B"/>
+              </a:solidFill>
+              <a:latin typeface="微软雅黑" panose="020B0503020204020204" charset="-122"/>
+            </a:endParaRPr>
           </a:p>
           <a:p>
             <a:pPr>
@@ -7354,7 +7423,7 @@
                 <a:solidFill>
                   <a:srgbClr val="8B5CF6"/>
                 </a:solidFill>
-                <a:latin typeface="Microsoft YaHei"/>
+                <a:latin typeface="微软雅黑" panose="020B0503020204020204" charset="-122"/>
               </a:rPr>
               <a:t>▍他人部署</a:t>
             </a:r>
@@ -7363,10 +7432,16 @@
                 <a:solidFill>
                   <a:srgbClr val="1E293B"/>
                 </a:solidFill>
-                <a:latin typeface="Microsoft YaHei"/>
+                <a:latin typeface="微软雅黑" panose="020B0503020204020204" charset="-122"/>
               </a:rPr>
               <a:t>  空 key 模板 config.yaml.example + setup_linux.sh 一键配置，个人 key 不入库</a:t>
             </a:r>
+            <a:endParaRPr sz="1700">
+              <a:solidFill>
+                <a:srgbClr val="1E293B"/>
+              </a:solidFill>
+              <a:latin typeface="微软雅黑" panose="020B0503020204020204" charset="-122"/>
+            </a:endParaRPr>
           </a:p>
         </p:txBody>
       </p:sp>
@@ -7400,7 +7475,7 @@
                 <a:solidFill>
                   <a:srgbClr val="5A6474"/>
                 </a:solidFill>
-                <a:latin typeface="Microsoft YaHei"/>
+                <a:latin typeface="微软雅黑" panose="020B0503020204020204" charset="-122"/>
               </a:defRPr>
             </a:pPr>
             <a:r>
@@ -7418,7 +7493,7 @@
 </file>
 
 <file path=ppt/slides/slide15.xml><?xml version="1.0" encoding="utf-8"?>
-<p:sld xmlns:a="http://schemas.openxmlformats.org/drawingml/2006/main" xmlns:p="http://schemas.openxmlformats.org/presentationml/2006/main" xmlns:r="http://schemas.openxmlformats.org/officeDocument/2006/relationships">
+<p:sld xmlns:a="http://schemas.openxmlformats.org/drawingml/2006/main" xmlns:r="http://schemas.openxmlformats.org/officeDocument/2006/relationships" xmlns:p="http://schemas.openxmlformats.org/presentationml/2006/main">
   <p:cSld>
     <p:spTree>
       <p:nvGrpSpPr>
@@ -7501,7 +7576,7 @@
                 <a:solidFill>
                   <a:srgbClr val="1E293B"/>
                 </a:solidFill>
-                <a:latin typeface="Microsoft YaHei"/>
+                <a:latin typeface="微软雅黑" panose="020B0503020204020204" charset="-122"/>
               </a:defRPr>
             </a:pPr>
             <a:r>
@@ -7540,7 +7615,7 @@
                 <a:solidFill>
                   <a:srgbClr val="5A6474"/>
                 </a:solidFill>
-                <a:latin typeface="Microsoft YaHei"/>
+                <a:latin typeface="微软雅黑" panose="020B0503020204020204" charset="-122"/>
               </a:defRPr>
             </a:pPr>
             <a:r>
@@ -7667,7 +7742,7 @@
                 <a:solidFill>
                   <a:srgbClr val="8B5CF6"/>
                 </a:solidFill>
-                <a:latin typeface="Microsoft YaHei"/>
+                <a:latin typeface="微软雅黑" panose="020B0503020204020204" charset="-122"/>
               </a:defRPr>
             </a:pPr>
             <a:r>
@@ -7706,7 +7781,7 @@
                 <a:solidFill>
                   <a:srgbClr val="1E293B"/>
                 </a:solidFill>
-                <a:latin typeface="Microsoft YaHei"/>
+                <a:latin typeface="微软雅黑" panose="020B0503020204020204" charset="-122"/>
               </a:defRPr>
             </a:pPr>
             <a:r>
@@ -7745,7 +7820,7 @@
                 <a:solidFill>
                   <a:srgbClr val="5A6474"/>
                 </a:solidFill>
-                <a:latin typeface="Microsoft YaHei"/>
+                <a:latin typeface="微软雅黑" panose="020B0503020204020204" charset="-122"/>
               </a:defRPr>
             </a:pPr>
             <a:r>
@@ -7828,7 +7903,7 @@
                 <a:solidFill>
                   <a:srgbClr val="8B5CF6"/>
                 </a:solidFill>
-                <a:latin typeface="Microsoft YaHei"/>
+                <a:latin typeface="微软雅黑" panose="020B0503020204020204" charset="-122"/>
               </a:defRPr>
             </a:pPr>
             <a:r>
@@ -7867,7 +7942,7 @@
                 <a:solidFill>
                   <a:srgbClr val="1E293B"/>
                 </a:solidFill>
-                <a:latin typeface="Microsoft YaHei"/>
+                <a:latin typeface="微软雅黑" panose="020B0503020204020204" charset="-122"/>
               </a:defRPr>
             </a:pPr>
             <a:r>
@@ -7906,7 +7981,7 @@
                 <a:solidFill>
                   <a:srgbClr val="5A6474"/>
                 </a:solidFill>
-                <a:latin typeface="Microsoft YaHei"/>
+                <a:latin typeface="微软雅黑" panose="020B0503020204020204" charset="-122"/>
               </a:defRPr>
             </a:pPr>
             <a:r>
@@ -7989,7 +8064,7 @@
                 <a:solidFill>
                   <a:srgbClr val="8B5CF6"/>
                 </a:solidFill>
-                <a:latin typeface="Microsoft YaHei"/>
+                <a:latin typeface="微软雅黑" panose="020B0503020204020204" charset="-122"/>
               </a:defRPr>
             </a:pPr>
             <a:r>
@@ -8028,7 +8103,7 @@
                 <a:solidFill>
                   <a:srgbClr val="1E293B"/>
                 </a:solidFill>
-                <a:latin typeface="Microsoft YaHei"/>
+                <a:latin typeface="微软雅黑" panose="020B0503020204020204" charset="-122"/>
               </a:defRPr>
             </a:pPr>
             <a:r>
@@ -8067,7 +8142,7 @@
                 <a:solidFill>
                   <a:srgbClr val="5A6474"/>
                 </a:solidFill>
-                <a:latin typeface="Microsoft YaHei"/>
+                <a:latin typeface="微软雅黑" panose="020B0503020204020204" charset="-122"/>
               </a:defRPr>
             </a:pPr>
             <a:r>
@@ -8150,7 +8225,7 @@
                 <a:solidFill>
                   <a:srgbClr val="8B5CF6"/>
                 </a:solidFill>
-                <a:latin typeface="Microsoft YaHei"/>
+                <a:latin typeface="微软雅黑" panose="020B0503020204020204" charset="-122"/>
               </a:defRPr>
             </a:pPr>
             <a:r>
@@ -8189,7 +8264,7 @@
                 <a:solidFill>
                   <a:srgbClr val="1E293B"/>
                 </a:solidFill>
-                <a:latin typeface="Microsoft YaHei"/>
+                <a:latin typeface="微软雅黑" panose="020B0503020204020204" charset="-122"/>
               </a:defRPr>
             </a:pPr>
             <a:r>
@@ -8228,7 +8303,7 @@
                 <a:solidFill>
                   <a:srgbClr val="5A6474"/>
                 </a:solidFill>
-                <a:latin typeface="Microsoft YaHei"/>
+                <a:latin typeface="微软雅黑" panose="020B0503020204020204" charset="-122"/>
               </a:defRPr>
             </a:pPr>
             <a:r>
@@ -8269,7 +8344,7 @@
                 <a:solidFill>
                   <a:srgbClr val="8B5CF6"/>
                 </a:solidFill>
-                <a:latin typeface="Microsoft YaHei"/>
+                <a:latin typeface="微软雅黑" panose="020B0503020204020204" charset="-122"/>
               </a:rPr>
               <a:t>▍架构价值</a:t>
             </a:r>
@@ -8278,10 +8353,16 @@
                 <a:solidFill>
                   <a:srgbClr val="1E293B"/>
                 </a:solidFill>
-                <a:latin typeface="Microsoft YaHei"/>
+                <a:latin typeface="微软雅黑" panose="020B0503020204020204" charset="-122"/>
               </a:rPr>
               <a:t>  工具层成为「决策」与「能力」的适配面，为 5 组数据流提供统一契约</a:t>
             </a:r>
+            <a:endParaRPr sz="1700">
+              <a:solidFill>
+                <a:srgbClr val="1E293B"/>
+              </a:solidFill>
+              <a:latin typeface="微软雅黑" panose="020B0503020204020204" charset="-122"/>
+            </a:endParaRPr>
           </a:p>
           <a:p>
             <a:pPr>
@@ -8294,7 +8375,7 @@
                 <a:solidFill>
                   <a:srgbClr val="8B5CF6"/>
                 </a:solidFill>
-                <a:latin typeface="Microsoft YaHei"/>
+                <a:latin typeface="微软雅黑" panose="020B0503020204020204" charset="-122"/>
               </a:rPr>
               <a:t>▍工程规范</a:t>
             </a:r>
@@ -8303,10 +8384,16 @@
                 <a:solidFill>
                   <a:srgbClr val="1E293B"/>
                 </a:solidFill>
-                <a:latin typeface="Microsoft YaHei"/>
+                <a:latin typeface="微软雅黑" panose="020B0503020204020204" charset="-122"/>
               </a:rPr>
               <a:t>  11 条 ADR 决策记录 + 全注释 + 512 测试，代码质量可追溯</a:t>
             </a:r>
+            <a:endParaRPr sz="1700">
+              <a:solidFill>
+                <a:srgbClr val="1E293B"/>
+              </a:solidFill>
+              <a:latin typeface="微软雅黑" panose="020B0503020204020204" charset="-122"/>
+            </a:endParaRPr>
           </a:p>
           <a:p>
             <a:pPr>
@@ -8319,7 +8406,7 @@
                 <a:solidFill>
                   <a:srgbClr val="8B5CF6"/>
                 </a:solidFill>
-                <a:latin typeface="Microsoft YaHei"/>
+                <a:latin typeface="微软雅黑" panose="020B0503020204020204" charset="-122"/>
               </a:rPr>
               <a:t>▍演示能力</a:t>
             </a:r>
@@ -8328,10 +8415,16 @@
                 <a:solidFill>
                   <a:srgbClr val="1E293B"/>
                 </a:solidFill>
-                <a:latin typeface="Microsoft YaHei"/>
+                <a:latin typeface="微软雅黑" panose="020B0503020204020204" charset="-122"/>
               </a:rPr>
               <a:t>  6 个设计书演示场景全覆盖，核心场景 6 真机跑通</a:t>
             </a:r>
+            <a:endParaRPr sz="1700">
+              <a:solidFill>
+                <a:srgbClr val="1E293B"/>
+              </a:solidFill>
+              <a:latin typeface="微软雅黑" panose="020B0503020204020204" charset="-122"/>
+            </a:endParaRPr>
           </a:p>
         </p:txBody>
       </p:sp>
@@ -8365,7 +8458,7 @@
                 <a:solidFill>
                   <a:srgbClr val="5A6474"/>
                 </a:solidFill>
-                <a:latin typeface="Microsoft YaHei"/>
+                <a:latin typeface="微软雅黑" panose="020B0503020204020204" charset="-122"/>
               </a:defRPr>
             </a:pPr>
             <a:r>
@@ -8383,7 +8476,7 @@
 </file>
 
 <file path=ppt/slides/slide16.xml><?xml version="1.0" encoding="utf-8"?>
-<p:sld xmlns:a="http://schemas.openxmlformats.org/drawingml/2006/main" xmlns:p="http://schemas.openxmlformats.org/presentationml/2006/main" xmlns:r="http://schemas.openxmlformats.org/officeDocument/2006/relationships">
+<p:sld xmlns:a="http://schemas.openxmlformats.org/drawingml/2006/main" xmlns:r="http://schemas.openxmlformats.org/officeDocument/2006/relationships" xmlns:p="http://schemas.openxmlformats.org/presentationml/2006/main">
   <p:cSld>
     <p:spTree>
       <p:nvGrpSpPr>
@@ -8466,7 +8559,7 @@
                 <a:solidFill>
                   <a:srgbClr val="1E293B"/>
                 </a:solidFill>
-                <a:latin typeface="Microsoft YaHei"/>
+                <a:latin typeface="微软雅黑" panose="020B0503020204020204" charset="-122"/>
               </a:defRPr>
             </a:pPr>
             <a:r>
@@ -8505,7 +8598,7 @@
                 <a:solidFill>
                   <a:srgbClr val="5A6474"/>
                 </a:solidFill>
-                <a:latin typeface="Microsoft YaHei"/>
+                <a:latin typeface="微软雅黑" panose="020B0503020204020204" charset="-122"/>
               </a:defRPr>
             </a:pPr>
             <a:r>
@@ -8632,7 +8725,7 @@
                 <a:solidFill>
                   <a:srgbClr val="FFFFFF"/>
                 </a:solidFill>
-                <a:latin typeface="Microsoft YaHei"/>
+                <a:latin typeface="微软雅黑" panose="020B0503020204020204" charset="-122"/>
               </a:defRPr>
             </a:pPr>
             <a:r>
@@ -8671,7 +8764,7 @@
                 <a:solidFill>
                   <a:srgbClr val="1E293B"/>
                 </a:solidFill>
-                <a:latin typeface="Microsoft YaHei"/>
+                <a:latin typeface="微软雅黑" panose="020B0503020204020204" charset="-122"/>
               </a:defRPr>
             </a:pPr>
             <a:r>
@@ -8754,7 +8847,7 @@
                 <a:solidFill>
                   <a:srgbClr val="FFFFFF"/>
                 </a:solidFill>
-                <a:latin typeface="Microsoft YaHei"/>
+                <a:latin typeface="微软雅黑" panose="020B0503020204020204" charset="-122"/>
               </a:defRPr>
             </a:pPr>
             <a:r>
@@ -8793,7 +8886,7 @@
                 <a:solidFill>
                   <a:srgbClr val="1E293B"/>
                 </a:solidFill>
-                <a:latin typeface="Microsoft YaHei"/>
+                <a:latin typeface="微软雅黑" panose="020B0503020204020204" charset="-122"/>
               </a:defRPr>
             </a:pPr>
             <a:r>
@@ -8876,7 +8969,7 @@
                 <a:solidFill>
                   <a:srgbClr val="FFFFFF"/>
                 </a:solidFill>
-                <a:latin typeface="Microsoft YaHei"/>
+                <a:latin typeface="微软雅黑" panose="020B0503020204020204" charset="-122"/>
               </a:defRPr>
             </a:pPr>
             <a:r>
@@ -8915,7 +9008,7 @@
                 <a:solidFill>
                   <a:srgbClr val="1E293B"/>
                 </a:solidFill>
-                <a:latin typeface="Microsoft YaHei"/>
+                <a:latin typeface="微软雅黑" panose="020B0503020204020204" charset="-122"/>
               </a:defRPr>
             </a:pPr>
             <a:r>
@@ -8998,7 +9091,7 @@
                 <a:solidFill>
                   <a:srgbClr val="FFFFFF"/>
                 </a:solidFill>
-                <a:latin typeface="Microsoft YaHei"/>
+                <a:latin typeface="微软雅黑" panose="020B0503020204020204" charset="-122"/>
               </a:defRPr>
             </a:pPr>
             <a:r>
@@ -9037,7 +9130,7 @@
                 <a:solidFill>
                   <a:srgbClr val="1E293B"/>
                 </a:solidFill>
-                <a:latin typeface="Microsoft YaHei"/>
+                <a:latin typeface="微软雅黑" panose="020B0503020204020204" charset="-122"/>
               </a:defRPr>
             </a:pPr>
             <a:r>
@@ -9120,7 +9213,7 @@
                 <a:solidFill>
                   <a:srgbClr val="FFFFFF"/>
                 </a:solidFill>
-                <a:latin typeface="Microsoft YaHei"/>
+                <a:latin typeface="微软雅黑" panose="020B0503020204020204" charset="-122"/>
               </a:defRPr>
             </a:pPr>
             <a:r>
@@ -9159,7 +9252,7 @@
                 <a:solidFill>
                   <a:srgbClr val="1E293B"/>
                 </a:solidFill>
-                <a:latin typeface="Microsoft YaHei"/>
+                <a:latin typeface="微软雅黑" panose="020B0503020204020204" charset="-122"/>
               </a:defRPr>
             </a:pPr>
             <a:r>
@@ -9242,7 +9335,7 @@
                 <a:solidFill>
                   <a:srgbClr val="FFFFFF"/>
                 </a:solidFill>
-                <a:latin typeface="Microsoft YaHei"/>
+                <a:latin typeface="微软雅黑" panose="020B0503020204020204" charset="-122"/>
               </a:defRPr>
             </a:pPr>
             <a:r>
@@ -9281,7 +9374,7 @@
                 <a:solidFill>
                   <a:srgbClr val="1E293B"/>
                 </a:solidFill>
-                <a:latin typeface="Microsoft YaHei"/>
+                <a:latin typeface="微软雅黑" panose="020B0503020204020204" charset="-122"/>
               </a:defRPr>
             </a:pPr>
             <a:r>
@@ -9320,7 +9413,7 @@
                 <a:solidFill>
                   <a:srgbClr val="5A6474"/>
                 </a:solidFill>
-                <a:latin typeface="Microsoft YaHei"/>
+                <a:latin typeface="微软雅黑" panose="020B0503020204020204" charset="-122"/>
               </a:defRPr>
             </a:pPr>
             <a:r>
@@ -9338,7 +9431,7 @@
 </file>
 
 <file path=ppt/slides/slide17.xml><?xml version="1.0" encoding="utf-8"?>
-<p:sld xmlns:a="http://schemas.openxmlformats.org/drawingml/2006/main" xmlns:p="http://schemas.openxmlformats.org/presentationml/2006/main" xmlns:r="http://schemas.openxmlformats.org/officeDocument/2006/relationships">
+<p:sld xmlns:a="http://schemas.openxmlformats.org/drawingml/2006/main" xmlns:r="http://schemas.openxmlformats.org/officeDocument/2006/relationships" xmlns:p="http://schemas.openxmlformats.org/presentationml/2006/main">
   <p:cSld>
     <p:spTree>
       <p:nvGrpSpPr>
@@ -9421,7 +9514,7 @@
                 <a:solidFill>
                   <a:srgbClr val="1E293B"/>
                 </a:solidFill>
-                <a:latin typeface="Microsoft YaHei"/>
+                <a:latin typeface="微软雅黑" panose="020B0503020204020204" charset="-122"/>
               </a:defRPr>
             </a:pPr>
             <a:r>
@@ -9460,7 +9553,7 @@
                 <a:solidFill>
                   <a:srgbClr val="5A6474"/>
                 </a:solidFill>
-                <a:latin typeface="Microsoft YaHei"/>
+                <a:latin typeface="微软雅黑" panose="020B0503020204020204" charset="-122"/>
               </a:defRPr>
             </a:pPr>
             <a:r>
@@ -9545,7 +9638,7 @@
                 <a:solidFill>
                   <a:srgbClr val="8B5CF6"/>
                 </a:solidFill>
-                <a:latin typeface="Microsoft YaHei"/>
+                <a:latin typeface="微软雅黑" panose="020B0503020204020204" charset="-122"/>
               </a:rPr>
               <a:t>▍组员 1</a:t>
             </a:r>
@@ -9554,10 +9647,16 @@
                 <a:solidFill>
                   <a:srgbClr val="1E293B"/>
                 </a:solidFill>
-                <a:latin typeface="Microsoft YaHei"/>
+                <a:latin typeface="微软雅黑" panose="020B0503020204020204" charset="-122"/>
               </a:rPr>
               <a:t>  ToolRegistry 核心实现、调用统计、工具签名</a:t>
             </a:r>
+            <a:endParaRPr sz="1800">
+              <a:solidFill>
+                <a:srgbClr val="1E293B"/>
+              </a:solidFill>
+              <a:latin typeface="微软雅黑" panose="020B0503020204020204" charset="-122"/>
+            </a:endParaRPr>
           </a:p>
           <a:p>
             <a:pPr>
@@ -9570,7 +9669,7 @@
                 <a:solidFill>
                   <a:srgbClr val="8B5CF6"/>
                 </a:solidFill>
-                <a:latin typeface="Microsoft YaHei"/>
+                <a:latin typeface="微软雅黑" panose="020B0503020204020204" charset="-122"/>
               </a:rPr>
               <a:t>▍组员 2</a:t>
             </a:r>
@@ -9579,10 +9678,16 @@
                 <a:solidFill>
                   <a:srgbClr val="1E293B"/>
                 </a:solidFill>
-                <a:latin typeface="Microsoft YaHei"/>
+                <a:latin typeface="微软雅黑" panose="020B0503020204020204" charset="-122"/>
               </a:rPr>
               <a:t>  SkillLibrary 技能编排、文件整理/回收站/备份</a:t>
             </a:r>
+            <a:endParaRPr sz="1800">
+              <a:solidFill>
+                <a:srgbClr val="1E293B"/>
+              </a:solidFill>
+              <a:latin typeface="微软雅黑" panose="020B0503020204020204" charset="-122"/>
+            </a:endParaRPr>
           </a:p>
           <a:p>
             <a:pPr>
@@ -9595,7 +9700,7 @@
                 <a:solidFill>
                   <a:srgbClr val="8B5CF6"/>
                 </a:solidFill>
-                <a:latin typeface="Microsoft YaHei"/>
+                <a:latin typeface="微软雅黑" panose="020B0503020204020204" charset="-122"/>
               </a:rPr>
               <a:t>▍组员 3</a:t>
             </a:r>
@@ -9604,10 +9709,16 @@
                 <a:solidFill>
                   <a:srgbClr val="1E293B"/>
                 </a:solidFill>
-                <a:latin typeface="Microsoft YaHei"/>
+                <a:latin typeface="微软雅黑" panose="020B0503020204020204" charset="-122"/>
               </a:rPr>
               <a:t>  Mock 三件套、跨组联调、接口文档</a:t>
             </a:r>
+            <a:endParaRPr sz="1800">
+              <a:solidFill>
+                <a:srgbClr val="1E293B"/>
+              </a:solidFill>
+              <a:latin typeface="微软雅黑" panose="020B0503020204020204" charset="-122"/>
+            </a:endParaRPr>
           </a:p>
           <a:p>
             <a:pPr>
@@ -9620,7 +9731,7 @@
                 <a:solidFill>
                   <a:srgbClr val="8B5CF6"/>
                 </a:solidFill>
-                <a:latin typeface="Microsoft YaHei"/>
+                <a:latin typeface="微软雅黑" panose="020B0503020204020204" charset="-122"/>
               </a:rPr>
               <a:t>▍组员 4</a:t>
             </a:r>
@@ -9629,10 +9740,16 @@
                 <a:solidFill>
                   <a:srgbClr val="1E293B"/>
                 </a:solidFill>
-                <a:latin typeface="Microsoft YaHei"/>
+                <a:latin typeface="微软雅黑" panose="020B0503020204020204" charset="-122"/>
               </a:rPr>
               <a:t>  调研报告、设计文档、单元测试、汇报 PPT</a:t>
             </a:r>
+            <a:endParaRPr sz="1800">
+              <a:solidFill>
+                <a:srgbClr val="1E293B"/>
+              </a:solidFill>
+              <a:latin typeface="微软雅黑" panose="020B0503020204020204" charset="-122"/>
+            </a:endParaRPr>
           </a:p>
           <a:p>
             <a:pPr>
@@ -9645,7 +9762,7 @@
                 <a:solidFill>
                   <a:srgbClr val="8B5CF6"/>
                 </a:solidFill>
-                <a:latin typeface="Microsoft YaHei"/>
+                <a:latin typeface="微软雅黑" panose="020B0503020204020204" charset="-122"/>
               </a:rPr>
               <a:t>▍组内协作</a:t>
             </a:r>
@@ -9654,10 +9771,16 @@
                 <a:solidFill>
                   <a:srgbClr val="1E293B"/>
                 </a:solidFill>
-                <a:latin typeface="Microsoft YaHei"/>
+                <a:latin typeface="微软雅黑" panose="020B0503020204020204" charset="-122"/>
               </a:rPr>
               <a:t>  代码评审、ADR 决策记录、真机联调（LLM/邮件/QQ）</a:t>
             </a:r>
+            <a:endParaRPr sz="1800">
+              <a:solidFill>
+                <a:srgbClr val="1E293B"/>
+              </a:solidFill>
+              <a:latin typeface="微软雅黑" panose="020B0503020204020204" charset="-122"/>
+            </a:endParaRPr>
           </a:p>
         </p:txBody>
       </p:sp>
@@ -9691,7 +9814,7 @@
                 <a:solidFill>
                   <a:srgbClr val="5A6474"/>
                 </a:solidFill>
-                <a:latin typeface="Microsoft YaHei"/>
+                <a:latin typeface="微软雅黑" panose="020B0503020204020204" charset="-122"/>
               </a:defRPr>
             </a:pPr>
             <a:r>
@@ -9709,7 +9832,7 @@
 </file>
 
 <file path=ppt/slides/slide18.xml><?xml version="1.0" encoding="utf-8"?>
-<p:sld xmlns:a="http://schemas.openxmlformats.org/drawingml/2006/main" xmlns:p="http://schemas.openxmlformats.org/presentationml/2006/main" xmlns:r="http://schemas.openxmlformats.org/officeDocument/2006/relationships">
+<p:sld xmlns:a="http://schemas.openxmlformats.org/drawingml/2006/main" xmlns:r="http://schemas.openxmlformats.org/officeDocument/2006/relationships" xmlns:p="http://schemas.openxmlformats.org/presentationml/2006/main">
   <p:cSld>
     <p:spTree>
       <p:nvGrpSpPr>
@@ -9792,7 +9915,7 @@
                 <a:solidFill>
                   <a:srgbClr val="1E293B"/>
                 </a:solidFill>
-                <a:latin typeface="Microsoft YaHei"/>
+                <a:latin typeface="微软雅黑" panose="020B0503020204020204" charset="-122"/>
               </a:defRPr>
             </a:pPr>
             <a:r>
@@ -9877,7 +10000,7 @@
                 <a:solidFill>
                   <a:srgbClr val="8B5CF6"/>
                 </a:solidFill>
-                <a:latin typeface="Microsoft YaHei"/>
+                <a:latin typeface="微软雅黑" panose="020B0503020204020204" charset="-122"/>
               </a:rPr>
               <a:t>▍已达成</a:t>
             </a:r>
@@ -9886,10 +10009,16 @@
                 <a:solidFill>
                   <a:srgbClr val="1E293B"/>
                 </a:solidFill>
-                <a:latin typeface="Microsoft YaHei"/>
+                <a:latin typeface="微软雅黑" panose="020B0503020204020204" charset="-122"/>
               </a:rPr>
               <a:t>  59 工具 + 26 技能 + 512 测试全绿 + 6 演示场景全覆盖 + 真机 LLM 联调</a:t>
             </a:r>
+            <a:endParaRPr sz="1800">
+              <a:solidFill>
+                <a:srgbClr val="1E293B"/>
+              </a:solidFill>
+              <a:latin typeface="微软雅黑" panose="020B0503020204020204" charset="-122"/>
+            </a:endParaRPr>
           </a:p>
           <a:p>
             <a:pPr>
@@ -9902,7 +10031,7 @@
                 <a:solidFill>
                   <a:srgbClr val="8B5CF6"/>
                 </a:solidFill>
-                <a:latin typeface="Microsoft YaHei"/>
+                <a:latin typeface="微软雅黑" panose="020B0503020204020204" charset="-122"/>
               </a:rPr>
               <a:t>▍架构沉淀</a:t>
             </a:r>
@@ -9911,10 +10040,16 @@
                 <a:solidFill>
                   <a:srgbClr val="1E293B"/>
                 </a:solidFill>
-                <a:latin typeface="Microsoft YaHei"/>
+                <a:latin typeface="微软雅黑" panose="020B0503020204020204" charset="-122"/>
               </a:rPr>
               <a:t>  工具层作为「决策-能力」适配面，统一契约 tool_result_json 贯穿 5 组</a:t>
             </a:r>
+            <a:endParaRPr sz="1800">
+              <a:solidFill>
+                <a:srgbClr val="1E293B"/>
+              </a:solidFill>
+              <a:latin typeface="微软雅黑" panose="020B0503020204020204" charset="-122"/>
+            </a:endParaRPr>
           </a:p>
           <a:p>
             <a:pPr>
@@ -9927,7 +10062,7 @@
                 <a:solidFill>
                   <a:srgbClr val="8B5CF6"/>
                 </a:solidFill>
-                <a:latin typeface="Microsoft YaHei"/>
+                <a:latin typeface="微软雅黑" panose="020B0503020204020204" charset="-122"/>
               </a:rPr>
               <a:t>▍展望 1</a:t>
             </a:r>
@@ -9936,10 +10071,16 @@
                 <a:solidFill>
                   <a:srgbClr val="1E293B"/>
                 </a:solidFill>
-                <a:latin typeface="Microsoft YaHei"/>
+                <a:latin typeface="微软雅黑" panose="020B0503020204020204" charset="-122"/>
               </a:rPr>
               <a:t>  接入 MCP 服务端，让工具层可被任意 MCP 客户端复用</a:t>
             </a:r>
+            <a:endParaRPr sz="1800">
+              <a:solidFill>
+                <a:srgbClr val="1E293B"/>
+              </a:solidFill>
+              <a:latin typeface="微软雅黑" panose="020B0503020204020204" charset="-122"/>
+            </a:endParaRPr>
           </a:p>
           <a:p>
             <a:pPr>
@@ -9952,7 +10093,7 @@
                 <a:solidFill>
                   <a:srgbClr val="8B5CF6"/>
                 </a:solidFill>
-                <a:latin typeface="Microsoft YaHei"/>
+                <a:latin typeface="微软雅黑" panose="020B0503020204020204" charset="-122"/>
               </a:rPr>
               <a:t>▍展望 2</a:t>
             </a:r>
@@ -9961,10 +10102,16 @@
                 <a:solidFill>
                   <a:srgbClr val="1E293B"/>
                 </a:solidFill>
-                <a:latin typeface="Microsoft YaHei"/>
+                <a:latin typeface="微软雅黑" panose="020B0503020204020204" charset="-122"/>
               </a:rPr>
               <a:t>  RAG 向量检索升级为 embedding 方案，提升轨迹召回精度</a:t>
             </a:r>
+            <a:endParaRPr sz="1800">
+              <a:solidFill>
+                <a:srgbClr val="1E293B"/>
+              </a:solidFill>
+              <a:latin typeface="微软雅黑" panose="020B0503020204020204" charset="-122"/>
+            </a:endParaRPr>
           </a:p>
           <a:p>
             <a:pPr>
@@ -9977,7 +10124,7 @@
                 <a:solidFill>
                   <a:srgbClr val="8B5CF6"/>
                 </a:solidFill>
-                <a:latin typeface="Microsoft YaHei"/>
+                <a:latin typeface="微软雅黑" panose="020B0503020204020204" charset="-122"/>
               </a:rPr>
               <a:t>▍展望 3</a:t>
             </a:r>
@@ -9986,10 +10133,16 @@
                 <a:solidFill>
                   <a:srgbClr val="1E293B"/>
                 </a:solidFill>
-                <a:latin typeface="Microsoft YaHei"/>
+                <a:latin typeface="微软雅黑" panose="020B0503020204020204" charset="-122"/>
               </a:rPr>
               <a:t>  Linux 桌面自动化深度适配（AT-SPI 控件检测 + 工具层协同）</a:t>
             </a:r>
+            <a:endParaRPr sz="1800">
+              <a:solidFill>
+                <a:srgbClr val="1E293B"/>
+              </a:solidFill>
+              <a:latin typeface="微软雅黑" panose="020B0503020204020204" charset="-122"/>
+            </a:endParaRPr>
           </a:p>
         </p:txBody>
       </p:sp>
@@ -10023,7 +10176,7 @@
                 <a:solidFill>
                   <a:srgbClr val="8B5CF6"/>
                 </a:solidFill>
-                <a:latin typeface="Microsoft YaHei"/>
+                <a:latin typeface="微软雅黑" panose="020B0503020204020204" charset="-122"/>
               </a:defRPr>
             </a:pPr>
             <a:r>
@@ -10062,7 +10215,7 @@
                 <a:solidFill>
                   <a:srgbClr val="5A6474"/>
                 </a:solidFill>
-                <a:latin typeface="Microsoft YaHei"/>
+                <a:latin typeface="微软雅黑" panose="020B0503020204020204" charset="-122"/>
               </a:defRPr>
             </a:pPr>
             <a:r>
@@ -10080,7 +10233,7 @@
 </file>
 
 <file path=ppt/slides/slide2.xml><?xml version="1.0" encoding="utf-8"?>
-<p:sld xmlns:a="http://schemas.openxmlformats.org/drawingml/2006/main" xmlns:p="http://schemas.openxmlformats.org/presentationml/2006/main" xmlns:r="http://schemas.openxmlformats.org/officeDocument/2006/relationships">
+<p:sld xmlns:a="http://schemas.openxmlformats.org/drawingml/2006/main" xmlns:r="http://schemas.openxmlformats.org/officeDocument/2006/relationships" xmlns:p="http://schemas.openxmlformats.org/presentationml/2006/main">
   <p:cSld>
     <p:spTree>
       <p:nvGrpSpPr>
@@ -10163,7 +10316,7 @@
                 <a:solidFill>
                   <a:srgbClr val="1E293B"/>
                 </a:solidFill>
-                <a:latin typeface="Microsoft YaHei"/>
+                <a:latin typeface="微软雅黑" panose="020B0503020204020204" charset="-122"/>
               </a:defRPr>
             </a:pPr>
             <a:r>
@@ -10202,7 +10355,7 @@
                 <a:solidFill>
                   <a:srgbClr val="5A6474"/>
                 </a:solidFill>
-                <a:latin typeface="Microsoft YaHei"/>
+                <a:latin typeface="微软雅黑" panose="020B0503020204020204" charset="-122"/>
               </a:defRPr>
             </a:pPr>
             <a:r>
@@ -10285,7 +10438,7 @@
                 <a:solidFill>
                   <a:srgbClr val="8B5CF6"/>
                 </a:solidFill>
-                <a:latin typeface="Microsoft YaHei"/>
+                <a:latin typeface="微软雅黑" panose="020B0503020204020204" charset="-122"/>
               </a:defRPr>
             </a:pPr>
             <a:r>
@@ -10324,7 +10477,7 @@
                 <a:solidFill>
                   <a:srgbClr val="1E293B"/>
                 </a:solidFill>
-                <a:latin typeface="Microsoft YaHei"/>
+                <a:latin typeface="微软雅黑" panose="020B0503020204020204" charset="-122"/>
               </a:defRPr>
             </a:pPr>
             <a:r>
@@ -10363,7 +10516,7 @@
                 <a:solidFill>
                   <a:srgbClr val="8B5CF6"/>
                 </a:solidFill>
-                <a:latin typeface="Microsoft YaHei"/>
+                <a:latin typeface="微软雅黑" panose="020B0503020204020204" charset="-122"/>
               </a:defRPr>
             </a:pPr>
             <a:r>
@@ -10402,7 +10555,7 @@
                 <a:solidFill>
                   <a:srgbClr val="1E293B"/>
                 </a:solidFill>
-                <a:latin typeface="Microsoft YaHei"/>
+                <a:latin typeface="微软雅黑" panose="020B0503020204020204" charset="-122"/>
               </a:defRPr>
             </a:pPr>
             <a:r>
@@ -10441,7 +10594,7 @@
                 <a:solidFill>
                   <a:srgbClr val="8B5CF6"/>
                 </a:solidFill>
-                <a:latin typeface="Microsoft YaHei"/>
+                <a:latin typeface="微软雅黑" panose="020B0503020204020204" charset="-122"/>
               </a:defRPr>
             </a:pPr>
             <a:r>
@@ -10480,7 +10633,7 @@
                 <a:solidFill>
                   <a:srgbClr val="1E293B"/>
                 </a:solidFill>
-                <a:latin typeface="Microsoft YaHei"/>
+                <a:latin typeface="微软雅黑" panose="020B0503020204020204" charset="-122"/>
               </a:defRPr>
             </a:pPr>
             <a:r>
@@ -10519,7 +10672,7 @@
                 <a:solidFill>
                   <a:srgbClr val="8B5CF6"/>
                 </a:solidFill>
-                <a:latin typeface="Microsoft YaHei"/>
+                <a:latin typeface="微软雅黑" panose="020B0503020204020204" charset="-122"/>
               </a:defRPr>
             </a:pPr>
             <a:r>
@@ -10558,7 +10711,7 @@
                 <a:solidFill>
                   <a:srgbClr val="1E293B"/>
                 </a:solidFill>
-                <a:latin typeface="Microsoft YaHei"/>
+                <a:latin typeface="微软雅黑" panose="020B0503020204020204" charset="-122"/>
               </a:defRPr>
             </a:pPr>
             <a:r>
@@ -10597,7 +10750,7 @@
                 <a:solidFill>
                   <a:srgbClr val="8B5CF6"/>
                 </a:solidFill>
-                <a:latin typeface="Microsoft YaHei"/>
+                <a:latin typeface="微软雅黑" panose="020B0503020204020204" charset="-122"/>
               </a:defRPr>
             </a:pPr>
             <a:r>
@@ -10636,7 +10789,7 @@
                 <a:solidFill>
                   <a:srgbClr val="1E293B"/>
                 </a:solidFill>
-                <a:latin typeface="Microsoft YaHei"/>
+                <a:latin typeface="微软雅黑" panose="020B0503020204020204" charset="-122"/>
               </a:defRPr>
             </a:pPr>
             <a:r>
@@ -10675,7 +10828,7 @@
                 <a:solidFill>
                   <a:srgbClr val="8B5CF6"/>
                 </a:solidFill>
-                <a:latin typeface="Microsoft YaHei"/>
+                <a:latin typeface="微软雅黑" panose="020B0503020204020204" charset="-122"/>
               </a:defRPr>
             </a:pPr>
             <a:r>
@@ -10714,7 +10867,7 @@
                 <a:solidFill>
                   <a:srgbClr val="1E293B"/>
                 </a:solidFill>
-                <a:latin typeface="Microsoft YaHei"/>
+                <a:latin typeface="微软雅黑" panose="020B0503020204020204" charset="-122"/>
               </a:defRPr>
             </a:pPr>
             <a:r>
@@ -10753,7 +10906,7 @@
                 <a:solidFill>
                   <a:srgbClr val="8B5CF6"/>
                 </a:solidFill>
-                <a:latin typeface="Microsoft YaHei"/>
+                <a:latin typeface="微软雅黑" panose="020B0503020204020204" charset="-122"/>
               </a:defRPr>
             </a:pPr>
             <a:r>
@@ -10792,7 +10945,7 @@
                 <a:solidFill>
                   <a:srgbClr val="1E293B"/>
                 </a:solidFill>
-                <a:latin typeface="Microsoft YaHei"/>
+                <a:latin typeface="微软雅黑" panose="020B0503020204020204" charset="-122"/>
               </a:defRPr>
             </a:pPr>
             <a:r>
@@ -10831,7 +10984,7 @@
                 <a:solidFill>
                   <a:srgbClr val="8B5CF6"/>
                 </a:solidFill>
-                <a:latin typeface="Microsoft YaHei"/>
+                <a:latin typeface="微软雅黑" panose="020B0503020204020204" charset="-122"/>
               </a:defRPr>
             </a:pPr>
             <a:r>
@@ -10870,7 +11023,7 @@
                 <a:solidFill>
                   <a:srgbClr val="1E293B"/>
                 </a:solidFill>
-                <a:latin typeface="Microsoft YaHei"/>
+                <a:latin typeface="微软雅黑" panose="020B0503020204020204" charset="-122"/>
               </a:defRPr>
             </a:pPr>
             <a:r>
@@ -10909,7 +11062,7 @@
                 <a:solidFill>
                   <a:srgbClr val="8B5CF6"/>
                 </a:solidFill>
-                <a:latin typeface="Microsoft YaHei"/>
+                <a:latin typeface="微软雅黑" panose="020B0503020204020204" charset="-122"/>
               </a:defRPr>
             </a:pPr>
             <a:r>
@@ -10948,7 +11101,7 @@
                 <a:solidFill>
                   <a:srgbClr val="1E293B"/>
                 </a:solidFill>
-                <a:latin typeface="Microsoft YaHei"/>
+                <a:latin typeface="微软雅黑" panose="020B0503020204020204" charset="-122"/>
               </a:defRPr>
             </a:pPr>
             <a:r>
@@ -10987,7 +11140,7 @@
                 <a:solidFill>
                   <a:srgbClr val="8B5CF6"/>
                 </a:solidFill>
-                <a:latin typeface="Microsoft YaHei"/>
+                <a:latin typeface="微软雅黑" panose="020B0503020204020204" charset="-122"/>
               </a:defRPr>
             </a:pPr>
             <a:r>
@@ -11026,7 +11179,7 @@
                 <a:solidFill>
                   <a:srgbClr val="1E293B"/>
                 </a:solidFill>
-                <a:latin typeface="Microsoft YaHei"/>
+                <a:latin typeface="微软雅黑" panose="020B0503020204020204" charset="-122"/>
               </a:defRPr>
             </a:pPr>
             <a:r>
@@ -11065,7 +11218,7 @@
                 <a:solidFill>
                   <a:srgbClr val="8B5CF6"/>
                 </a:solidFill>
-                <a:latin typeface="Microsoft YaHei"/>
+                <a:latin typeface="微软雅黑" panose="020B0503020204020204" charset="-122"/>
               </a:defRPr>
             </a:pPr>
             <a:r>
@@ -11104,7 +11257,7 @@
                 <a:solidFill>
                   <a:srgbClr val="1E293B"/>
                 </a:solidFill>
-                <a:latin typeface="Microsoft YaHei"/>
+                <a:latin typeface="微软雅黑" panose="020B0503020204020204" charset="-122"/>
               </a:defRPr>
             </a:pPr>
             <a:r>
@@ -11122,7 +11275,7 @@
 </file>
 
 <file path=ppt/slides/slide3.xml><?xml version="1.0" encoding="utf-8"?>
-<p:sld xmlns:a="http://schemas.openxmlformats.org/drawingml/2006/main" xmlns:p="http://schemas.openxmlformats.org/presentationml/2006/main" xmlns:r="http://schemas.openxmlformats.org/officeDocument/2006/relationships">
+<p:sld xmlns:a="http://schemas.openxmlformats.org/drawingml/2006/main" xmlns:r="http://schemas.openxmlformats.org/officeDocument/2006/relationships" xmlns:p="http://schemas.openxmlformats.org/presentationml/2006/main">
   <p:cSld>
     <p:spTree>
       <p:nvGrpSpPr>
@@ -11205,7 +11358,7 @@
                 <a:solidFill>
                   <a:srgbClr val="1E293B"/>
                 </a:solidFill>
-                <a:latin typeface="Microsoft YaHei"/>
+                <a:latin typeface="微软雅黑" panose="020B0503020204020204" charset="-122"/>
               </a:defRPr>
             </a:pPr>
             <a:r>
@@ -11244,7 +11397,7 @@
                 <a:solidFill>
                   <a:srgbClr val="5A6474"/>
                 </a:solidFill>
-                <a:latin typeface="Microsoft YaHei"/>
+                <a:latin typeface="微软雅黑" panose="020B0503020204020204" charset="-122"/>
               </a:defRPr>
             </a:pPr>
             <a:r>
@@ -11329,7 +11482,7 @@
                 <a:solidFill>
                   <a:srgbClr val="8B5CF6"/>
                 </a:solidFill>
-                <a:latin typeface="Microsoft YaHei"/>
+                <a:latin typeface="微软雅黑" panose="020B0503020204020204" charset="-122"/>
               </a:rPr>
               <a:t>▍背景</a:t>
             </a:r>
@@ -11338,10 +11491,16 @@
                 <a:solidFill>
                   <a:srgbClr val="1E293B"/>
                 </a:solidFill>
-                <a:latin typeface="Microsoft YaHei"/>
+                <a:latin typeface="微软雅黑" panose="020B0503020204020204" charset="-122"/>
               </a:rPr>
               <a:t>  操作系统课程实践：理解虚拟化、并发、持久性三大原理，并在智能体系统中落地</a:t>
             </a:r>
+            <a:endParaRPr sz="1800">
+              <a:solidFill>
+                <a:srgbClr val="1E293B"/>
+              </a:solidFill>
+              <a:latin typeface="微软雅黑" panose="020B0503020204020204" charset="-122"/>
+            </a:endParaRPr>
           </a:p>
           <a:p>
             <a:pPr>
@@ -11354,7 +11513,7 @@
                 <a:solidFill>
                   <a:srgbClr val="8B5CF6"/>
                 </a:solidFill>
-                <a:latin typeface="Microsoft YaHei"/>
+                <a:latin typeface="微软雅黑" panose="020B0503020204020204" charset="-122"/>
               </a:rPr>
               <a:t>▍目标</a:t>
             </a:r>
@@ -11363,10 +11522,16 @@
                 <a:solidFill>
                   <a:srgbClr val="1E293B"/>
                 </a:solidFill>
-                <a:latin typeface="Microsoft YaHei"/>
+                <a:latin typeface="微软雅黑" panose="020B0503020204020204" charset="-122"/>
               </a:rPr>
               <a:t>  支持自然语言指令 → 意图理解 → 安全检查 → 任务规划 → 执行 → 工具调用 → 审计 的完整闭环</a:t>
             </a:r>
+            <a:endParaRPr sz="1800">
+              <a:solidFill>
+                <a:srgbClr val="1E293B"/>
+              </a:solidFill>
+              <a:latin typeface="微软雅黑" panose="020B0503020204020204" charset="-122"/>
+            </a:endParaRPr>
           </a:p>
           <a:p>
             <a:pPr>
@@ -11379,7 +11544,7 @@
                 <a:solidFill>
                   <a:srgbClr val="8B5CF6"/>
                 </a:solidFill>
-                <a:latin typeface="Microsoft YaHei"/>
+                <a:latin typeface="微软雅黑" panose="020B0503020204020204" charset="-122"/>
               </a:rPr>
               <a:t>▍5 组分工</a:t>
             </a:r>
@@ -11388,10 +11553,16 @@
                 <a:solidFill>
                   <a:srgbClr val="1E293B"/>
                 </a:solidFill>
-                <a:latin typeface="Microsoft YaHei"/>
+                <a:latin typeface="微软雅黑" panose="020B0503020204020204" charset="-122"/>
               </a:rPr>
               <a:t>  AI Shell/HostAgent(1) → 规划/控件检测(2) → AppAgent/Automator(3) → 工具/OS Skills(4) → 协调/安全/RAG(5)</a:t>
             </a:r>
+            <a:endParaRPr sz="1800">
+              <a:solidFill>
+                <a:srgbClr val="1E293B"/>
+              </a:solidFill>
+              <a:latin typeface="微软雅黑" panose="020B0503020204020204" charset="-122"/>
+            </a:endParaRPr>
           </a:p>
           <a:p>
             <a:pPr>
@@ -11404,7 +11575,7 @@
                 <a:solidFill>
                   <a:srgbClr val="8B5CF6"/>
                 </a:solidFill>
-                <a:latin typeface="Microsoft YaHei"/>
+                <a:latin typeface="微软雅黑" panose="020B0503020204020204" charset="-122"/>
               </a:rPr>
               <a:t>▍第 4 组职责</a:t>
             </a:r>
@@ -11413,10 +11584,16 @@
                 <a:solidFill>
                   <a:srgbClr val="1E293B"/>
                 </a:solidFill>
-                <a:latin typeface="Microsoft YaHei"/>
+                <a:latin typeface="微软雅黑" panose="020B0503020204020204" charset="-122"/>
               </a:rPr>
               <a:t>  把文件系统/系统管理能力封装为统一可调用、可统计、可签名的工具与技能</a:t>
             </a:r>
+            <a:endParaRPr sz="1800">
+              <a:solidFill>
+                <a:srgbClr val="1E293B"/>
+              </a:solidFill>
+              <a:latin typeface="微软雅黑" panose="020B0503020204020204" charset="-122"/>
+            </a:endParaRPr>
           </a:p>
           <a:p>
             <a:pPr>
@@ -11429,7 +11606,7 @@
                 <a:solidFill>
                   <a:srgbClr val="8B5CF6"/>
                 </a:solidFill>
-                <a:latin typeface="Microsoft YaHei"/>
+                <a:latin typeface="微软雅黑" panose="020B0503020204020204" charset="-122"/>
               </a:rPr>
               <a:t>▍OS 原理关联</a:t>
             </a:r>
@@ -11438,10 +11615,16 @@
                 <a:solidFill>
                   <a:srgbClr val="1E293B"/>
                 </a:solidFill>
-                <a:latin typeface="Microsoft YaHei"/>
+                <a:latin typeface="微软雅黑" panose="020B0503020204020204" charset="-122"/>
               </a:rPr>
               <a:t>  持久性：文件系统操作；虚拟化：资源抽象；并发：多线程安全调用</a:t>
             </a:r>
+            <a:endParaRPr sz="1800">
+              <a:solidFill>
+                <a:srgbClr val="1E293B"/>
+              </a:solidFill>
+              <a:latin typeface="微软雅黑" panose="020B0503020204020204" charset="-122"/>
+            </a:endParaRPr>
           </a:p>
         </p:txBody>
       </p:sp>
@@ -11475,7 +11658,7 @@
                 <a:solidFill>
                   <a:srgbClr val="5A6474"/>
                 </a:solidFill>
-                <a:latin typeface="Microsoft YaHei"/>
+                <a:latin typeface="微软雅黑" panose="020B0503020204020204" charset="-122"/>
               </a:defRPr>
             </a:pPr>
             <a:r>
@@ -11493,7 +11676,7 @@
 </file>
 
 <file path=ppt/slides/slide4.xml><?xml version="1.0" encoding="utf-8"?>
-<p:sld xmlns:a="http://schemas.openxmlformats.org/drawingml/2006/main" xmlns:p="http://schemas.openxmlformats.org/presentationml/2006/main" xmlns:r="http://schemas.openxmlformats.org/officeDocument/2006/relationships">
+<p:sld xmlns:a="http://schemas.openxmlformats.org/drawingml/2006/main" xmlns:r="http://schemas.openxmlformats.org/officeDocument/2006/relationships" xmlns:p="http://schemas.openxmlformats.org/presentationml/2006/main">
   <p:cSld>
     <p:spTree>
       <p:nvGrpSpPr>
@@ -11576,7 +11759,7 @@
                 <a:solidFill>
                   <a:srgbClr val="1E293B"/>
                 </a:solidFill>
-                <a:latin typeface="Microsoft YaHei"/>
+                <a:latin typeface="微软雅黑" panose="020B0503020204020204" charset="-122"/>
               </a:defRPr>
             </a:pPr>
             <a:r>
@@ -11615,7 +11798,7 @@
                 <a:solidFill>
                   <a:srgbClr val="5A6474"/>
                 </a:solidFill>
-                <a:latin typeface="Microsoft YaHei"/>
+                <a:latin typeface="微软雅黑" panose="020B0503020204020204" charset="-122"/>
               </a:defRPr>
             </a:pPr>
             <a:r>
@@ -11742,7 +11925,7 @@
                 <a:solidFill>
                   <a:srgbClr val="1E293B"/>
                 </a:solidFill>
-                <a:latin typeface="Microsoft YaHei"/>
+                <a:latin typeface="微软雅黑" panose="020B0503020204020204" charset="-122"/>
               </a:defRPr>
             </a:pPr>
             <a:r>
@@ -11781,7 +11964,7 @@
                 <a:solidFill>
                   <a:srgbClr val="1E293B"/>
                 </a:solidFill>
-                <a:latin typeface="Microsoft YaHei"/>
+                <a:latin typeface="微软雅黑" panose="020B0503020204020204" charset="-122"/>
               </a:defRPr>
             </a:pPr>
             <a:r>
@@ -11864,7 +12047,7 @@
                 <a:solidFill>
                   <a:srgbClr val="FFFFFF"/>
                 </a:solidFill>
-                <a:latin typeface="Microsoft YaHei"/>
+                <a:latin typeface="微软雅黑" panose="020B0503020204020204" charset="-122"/>
               </a:defRPr>
             </a:pPr>
             <a:r>
@@ -11903,7 +12086,7 @@
                 <a:solidFill>
                   <a:srgbClr val="FFFFFF"/>
                 </a:solidFill>
-                <a:latin typeface="Microsoft YaHei"/>
+                <a:latin typeface="微软雅黑" panose="020B0503020204020204" charset="-122"/>
               </a:defRPr>
             </a:pPr>
             <a:r>
@@ -11986,7 +12169,7 @@
                 <a:solidFill>
                   <a:srgbClr val="1E293B"/>
                 </a:solidFill>
-                <a:latin typeface="Microsoft YaHei"/>
+                <a:latin typeface="微软雅黑" panose="020B0503020204020204" charset="-122"/>
               </a:defRPr>
             </a:pPr>
             <a:r>
@@ -12025,7 +12208,7 @@
                 <a:solidFill>
                   <a:srgbClr val="1E293B"/>
                 </a:solidFill>
-                <a:latin typeface="Microsoft YaHei"/>
+                <a:latin typeface="微软雅黑" panose="020B0503020204020204" charset="-122"/>
               </a:defRPr>
             </a:pPr>
             <a:r>
@@ -12064,7 +12247,7 @@
                 <a:solidFill>
                   <a:srgbClr val="5A6474"/>
                 </a:solidFill>
-                <a:latin typeface="Microsoft YaHei"/>
+                <a:latin typeface="微软雅黑" panose="020B0503020204020204" charset="-122"/>
               </a:defRPr>
             </a:pPr>
             <a:r>
@@ -12080,7 +12263,7 @@
                 <a:solidFill>
                   <a:srgbClr val="5A6474"/>
                 </a:solidFill>
-                <a:latin typeface="Microsoft YaHei"/>
+                <a:latin typeface="微软雅黑" panose="020B0503020204020204" charset="-122"/>
               </a:defRPr>
             </a:pPr>
             <a:r>
@@ -12119,7 +12302,7 @@
                 <a:solidFill>
                   <a:srgbClr val="5A6474"/>
                 </a:solidFill>
-                <a:latin typeface="Microsoft YaHei"/>
+                <a:latin typeface="微软雅黑" panose="020B0503020204020204" charset="-122"/>
               </a:defRPr>
             </a:pPr>
             <a:r>
@@ -12137,7 +12320,7 @@
 </file>
 
 <file path=ppt/slides/slide5.xml><?xml version="1.0" encoding="utf-8"?>
-<p:sld xmlns:a="http://schemas.openxmlformats.org/drawingml/2006/main" xmlns:p="http://schemas.openxmlformats.org/presentationml/2006/main" xmlns:r="http://schemas.openxmlformats.org/officeDocument/2006/relationships">
+<p:sld xmlns:a="http://schemas.openxmlformats.org/drawingml/2006/main" xmlns:r="http://schemas.openxmlformats.org/officeDocument/2006/relationships" xmlns:p="http://schemas.openxmlformats.org/presentationml/2006/main">
   <p:cSld>
     <p:spTree>
       <p:nvGrpSpPr>
@@ -12220,7 +12403,7 @@
                 <a:solidFill>
                   <a:srgbClr val="1E293B"/>
                 </a:solidFill>
-                <a:latin typeface="Microsoft YaHei"/>
+                <a:latin typeface="微软雅黑" panose="020B0503020204020204" charset="-122"/>
               </a:defRPr>
             </a:pPr>
             <a:r>
@@ -12259,7 +12442,7 @@
                 <a:solidFill>
                   <a:srgbClr val="5A6474"/>
                 </a:solidFill>
-                <a:latin typeface="Microsoft YaHei"/>
+                <a:latin typeface="微软雅黑" panose="020B0503020204020204" charset="-122"/>
               </a:defRPr>
             </a:pPr>
             <a:r>
@@ -12344,7 +12527,7 @@
                 <a:solidFill>
                   <a:srgbClr val="8B5CF6"/>
                 </a:solidFill>
-                <a:latin typeface="Microsoft YaHei"/>
+                <a:latin typeface="微软雅黑" panose="020B0503020204020204" charset="-122"/>
               </a:rPr>
               <a:t>▍MCP 协议</a:t>
             </a:r>
@@ -12353,10 +12536,16 @@
                 <a:solidFill>
                   <a:srgbClr val="1E293B"/>
                 </a:solidFill>
-                <a:latin typeface="Microsoft YaHei"/>
+                <a:latin typeface="微软雅黑" panose="020B0503020204020204" charset="-122"/>
               </a:rPr>
               <a:t>  Server 声明工具(name/description/inputSchema) → 客户端发现 → 结构化调用 → 结果回传</a:t>
             </a:r>
+            <a:endParaRPr sz="1800">
+              <a:solidFill>
+                <a:srgbClr val="1E293B"/>
+              </a:solidFill>
+              <a:latin typeface="微软雅黑" panose="020B0503020204020204" charset="-122"/>
+            </a:endParaRPr>
           </a:p>
           <a:p>
             <a:pPr>
@@ -12369,7 +12558,7 @@
                 <a:solidFill>
                   <a:srgbClr val="8B5CF6"/>
                 </a:solidFill>
-                <a:latin typeface="Microsoft YaHei"/>
+                <a:latin typeface="微软雅黑" panose="020B0503020204020204" charset="-122"/>
               </a:rPr>
               <a:t>▍Schema 驱动</a:t>
             </a:r>
@@ -12378,10 +12567,16 @@
                 <a:solidFill>
                   <a:srgbClr val="1E293B"/>
                 </a:solidFill>
-                <a:latin typeface="Microsoft YaHei"/>
+                <a:latin typeface="微软雅黑" panose="020B0503020204020204" charset="-122"/>
               </a:rPr>
               <a:t>  工具参数自动从函数签名+docstring 生成 JSON Schema，避免与代码漂移</a:t>
             </a:r>
+            <a:endParaRPr sz="1800">
+              <a:solidFill>
+                <a:srgbClr val="1E293B"/>
+              </a:solidFill>
+              <a:latin typeface="微软雅黑" panose="020B0503020204020204" charset="-122"/>
+            </a:endParaRPr>
           </a:p>
           <a:p>
             <a:pPr>
@@ -12394,7 +12589,7 @@
                 <a:solidFill>
                   <a:srgbClr val="8B5CF6"/>
                 </a:solidFill>
-                <a:latin typeface="Microsoft YaHei"/>
+                <a:latin typeface="微软雅黑" panose="020B0503020204020204" charset="-122"/>
               </a:rPr>
               <a:t>▍结果归一</a:t>
             </a:r>
@@ -12403,10 +12598,16 @@
                 <a:solidFill>
                   <a:srgbClr val="1E293B"/>
                 </a:solidFill>
-                <a:latin typeface="Microsoft YaHei"/>
+                <a:latin typeface="微软雅黑" panose="020B0503020204020204" charset="-122"/>
               </a:rPr>
               <a:t>  统一 {success, result, error}，等价 MCP CallToolResult，上层无感知差异</a:t>
             </a:r>
+            <a:endParaRPr sz="1800">
+              <a:solidFill>
+                <a:srgbClr val="1E293B"/>
+              </a:solidFill>
+              <a:latin typeface="微软雅黑" panose="020B0503020204020204" charset="-122"/>
+            </a:endParaRPr>
           </a:p>
           <a:p>
             <a:pPr>
@@ -12419,7 +12620,7 @@
                 <a:solidFill>
                   <a:srgbClr val="8B5CF6"/>
                 </a:solidFill>
-                <a:latin typeface="Microsoft YaHei"/>
+                <a:latin typeface="微软雅黑" panose="020B0503020204020204" charset="-122"/>
               </a:rPr>
               <a:t>▍竞品对标</a:t>
             </a:r>
@@ -12428,10 +12629,16 @@
                 <a:solidFill>
                   <a:srgbClr val="1E293B"/>
                 </a:solidFill>
-                <a:latin typeface="Microsoft YaHei"/>
+                <a:latin typeface="微软雅黑" panose="020B0503020204020204" charset="-122"/>
               </a:rPr>
               <a:t>  UFO：API 优先于坐标点击；ANOLISA：工具统一注册与系统级抽象；Open Interpreter：不可控的教训</a:t>
             </a:r>
+            <a:endParaRPr sz="1800">
+              <a:solidFill>
+                <a:srgbClr val="1E293B"/>
+              </a:solidFill>
+              <a:latin typeface="微软雅黑" panose="020B0503020204020204" charset="-122"/>
+            </a:endParaRPr>
           </a:p>
           <a:p>
             <a:pPr>
@@ -12444,7 +12651,7 @@
                 <a:solidFill>
                   <a:srgbClr val="8B5CF6"/>
                 </a:solidFill>
-                <a:latin typeface="Microsoft YaHei"/>
+                <a:latin typeface="微软雅黑" panose="020B0503020204020204" charset="-122"/>
               </a:rPr>
               <a:t>▍OS 关联</a:t>
             </a:r>
@@ -12453,10 +12660,16 @@
                 <a:solidFill>
                   <a:srgbClr val="1E293B"/>
                 </a:solidFill>
-                <a:latin typeface="Microsoft YaHei"/>
+                <a:latin typeface="微软雅黑" panose="020B0503020204020204" charset="-122"/>
               </a:rPr>
               <a:t>  系统调用暴露硬件能力；工具层暴露 OS 能力 —— 同构思想</a:t>
             </a:r>
+            <a:endParaRPr sz="1800">
+              <a:solidFill>
+                <a:srgbClr val="1E293B"/>
+              </a:solidFill>
+              <a:latin typeface="微软雅黑" panose="020B0503020204020204" charset="-122"/>
+            </a:endParaRPr>
           </a:p>
         </p:txBody>
       </p:sp>
@@ -12490,7 +12703,7 @@
                 <a:solidFill>
                   <a:srgbClr val="5A6474"/>
                 </a:solidFill>
-                <a:latin typeface="Microsoft YaHei"/>
+                <a:latin typeface="微软雅黑" panose="020B0503020204020204" charset="-122"/>
               </a:defRPr>
             </a:pPr>
             <a:r>
@@ -12508,7 +12721,7 @@
 </file>
 
 <file path=ppt/slides/slide6.xml><?xml version="1.0" encoding="utf-8"?>
-<p:sld xmlns:a="http://schemas.openxmlformats.org/drawingml/2006/main" xmlns:p="http://schemas.openxmlformats.org/presentationml/2006/main" xmlns:r="http://schemas.openxmlformats.org/officeDocument/2006/relationships">
+<p:sld xmlns:a="http://schemas.openxmlformats.org/drawingml/2006/main" xmlns:r="http://schemas.openxmlformats.org/officeDocument/2006/relationships" xmlns:p="http://schemas.openxmlformats.org/presentationml/2006/main">
   <p:cSld>
     <p:spTree>
       <p:nvGrpSpPr>
@@ -12591,7 +12804,7 @@
                 <a:solidFill>
                   <a:srgbClr val="1E293B"/>
                 </a:solidFill>
-                <a:latin typeface="Microsoft YaHei"/>
+                <a:latin typeface="微软雅黑" panose="020B0503020204020204" charset="-122"/>
               </a:defRPr>
             </a:pPr>
             <a:r>
@@ -12630,7 +12843,7 @@
                 <a:solidFill>
                   <a:srgbClr val="5A6474"/>
                 </a:solidFill>
-                <a:latin typeface="Microsoft YaHei"/>
+                <a:latin typeface="微软雅黑" panose="020B0503020204020204" charset="-122"/>
               </a:defRPr>
             </a:pPr>
             <a:r>
@@ -12757,7 +12970,7 @@
                 <a:solidFill>
                   <a:srgbClr val="FFFFFF"/>
                 </a:solidFill>
-                <a:latin typeface="Microsoft YaHei"/>
+                <a:latin typeface="微软雅黑" panose="020B0503020204020204" charset="-122"/>
               </a:defRPr>
             </a:pPr>
             <a:r>
@@ -12796,7 +13009,7 @@
                 <a:solidFill>
                   <a:srgbClr val="FFFFFF"/>
                 </a:solidFill>
-                <a:latin typeface="Microsoft YaHei"/>
+                <a:latin typeface="微软雅黑" panose="020B0503020204020204" charset="-122"/>
               </a:defRPr>
             </a:pPr>
             <a:r>
@@ -12812,7 +13025,7 @@
                 <a:solidFill>
                   <a:srgbClr val="FFFFFF"/>
                 </a:solidFill>
-                <a:latin typeface="Microsoft YaHei"/>
+                <a:latin typeface="微软雅黑" panose="020B0503020204020204" charset="-122"/>
               </a:defRPr>
             </a:pPr>
             <a:r>
@@ -12851,7 +13064,7 @@
                 <a:solidFill>
                   <a:srgbClr val="8B5CF6"/>
                 </a:solidFill>
-                <a:latin typeface="Microsoft YaHei"/>
+                <a:latin typeface="微软雅黑" panose="020B0503020204020204" charset="-122"/>
               </a:defRPr>
             </a:pPr>
             <a:r>
@@ -12934,7 +13147,7 @@
                 <a:solidFill>
                   <a:srgbClr val="FFFFFF"/>
                 </a:solidFill>
-                <a:latin typeface="Microsoft YaHei"/>
+                <a:latin typeface="微软雅黑" panose="020B0503020204020204" charset="-122"/>
               </a:defRPr>
             </a:pPr>
             <a:r>
@@ -12973,7 +13186,7 @@
                 <a:solidFill>
                   <a:srgbClr val="FFFFFF"/>
                 </a:solidFill>
-                <a:latin typeface="Microsoft YaHei"/>
+                <a:latin typeface="微软雅黑" panose="020B0503020204020204" charset="-122"/>
               </a:defRPr>
             </a:pPr>
             <a:r>
@@ -12989,7 +13202,7 @@
                 <a:solidFill>
                   <a:srgbClr val="FFFFFF"/>
                 </a:solidFill>
-                <a:latin typeface="Microsoft YaHei"/>
+                <a:latin typeface="微软雅黑" panose="020B0503020204020204" charset="-122"/>
               </a:defRPr>
             </a:pPr>
             <a:r>
@@ -13028,7 +13241,7 @@
                 <a:solidFill>
                   <a:srgbClr val="8B5CF6"/>
                 </a:solidFill>
-                <a:latin typeface="Microsoft YaHei"/>
+                <a:latin typeface="微软雅黑" panose="020B0503020204020204" charset="-122"/>
               </a:defRPr>
             </a:pPr>
             <a:r>
@@ -13111,7 +13324,7 @@
                 <a:solidFill>
                   <a:srgbClr val="FFFFFF"/>
                 </a:solidFill>
-                <a:latin typeface="Microsoft YaHei"/>
+                <a:latin typeface="微软雅黑" panose="020B0503020204020204" charset="-122"/>
               </a:defRPr>
             </a:pPr>
             <a:r>
@@ -13150,7 +13363,7 @@
                 <a:solidFill>
                   <a:srgbClr val="FFFFFF"/>
                 </a:solidFill>
-                <a:latin typeface="Microsoft YaHei"/>
+                <a:latin typeface="微软雅黑" panose="020B0503020204020204" charset="-122"/>
               </a:defRPr>
             </a:pPr>
             <a:r>
@@ -13166,7 +13379,7 @@
                 <a:solidFill>
                   <a:srgbClr val="FFFFFF"/>
                 </a:solidFill>
-                <a:latin typeface="Microsoft YaHei"/>
+                <a:latin typeface="微软雅黑" panose="020B0503020204020204" charset="-122"/>
               </a:defRPr>
             </a:pPr>
             <a:r>
@@ -13205,7 +13418,7 @@
                 <a:solidFill>
                   <a:srgbClr val="8B5CF6"/>
                 </a:solidFill>
-                <a:latin typeface="Microsoft YaHei"/>
+                <a:latin typeface="微软雅黑" panose="020B0503020204020204" charset="-122"/>
               </a:defRPr>
             </a:pPr>
             <a:r>
@@ -13288,7 +13501,7 @@
                 <a:solidFill>
                   <a:srgbClr val="FFFFFF"/>
                 </a:solidFill>
-                <a:latin typeface="Microsoft YaHei"/>
+                <a:latin typeface="微软雅黑" panose="020B0503020204020204" charset="-122"/>
               </a:defRPr>
             </a:pPr>
             <a:r>
@@ -13327,7 +13540,7 @@
                 <a:solidFill>
                   <a:srgbClr val="FFFFFF"/>
                 </a:solidFill>
-                <a:latin typeface="Microsoft YaHei"/>
+                <a:latin typeface="微软雅黑" panose="020B0503020204020204" charset="-122"/>
               </a:defRPr>
             </a:pPr>
             <a:r>
@@ -13343,7 +13556,7 @@
                 <a:solidFill>
                   <a:srgbClr val="FFFFFF"/>
                 </a:solidFill>
-                <a:latin typeface="Microsoft YaHei"/>
+                <a:latin typeface="微软雅黑" panose="020B0503020204020204" charset="-122"/>
               </a:defRPr>
             </a:pPr>
             <a:r>
@@ -13382,7 +13595,7 @@
                 <a:solidFill>
                   <a:srgbClr val="8B5CF6"/>
                 </a:solidFill>
-                <a:latin typeface="Microsoft YaHei"/>
+                <a:latin typeface="微软雅黑" panose="020B0503020204020204" charset="-122"/>
               </a:defRPr>
             </a:pPr>
             <a:r>
@@ -13465,7 +13678,7 @@
                 <a:solidFill>
                   <a:srgbClr val="FFFFFF"/>
                 </a:solidFill>
-                <a:latin typeface="Microsoft YaHei"/>
+                <a:latin typeface="微软雅黑" panose="020B0503020204020204" charset="-122"/>
               </a:defRPr>
             </a:pPr>
             <a:r>
@@ -13504,7 +13717,7 @@
                 <a:solidFill>
                   <a:srgbClr val="FFFFFF"/>
                 </a:solidFill>
-                <a:latin typeface="Microsoft YaHei"/>
+                <a:latin typeface="微软雅黑" panose="020B0503020204020204" charset="-122"/>
               </a:defRPr>
             </a:pPr>
             <a:r>
@@ -13520,7 +13733,7 @@
                 <a:solidFill>
                   <a:srgbClr val="FFFFFF"/>
                 </a:solidFill>
-                <a:latin typeface="Microsoft YaHei"/>
+                <a:latin typeface="微软雅黑" panose="020B0503020204020204" charset="-122"/>
               </a:defRPr>
             </a:pPr>
             <a:r>
@@ -13691,7 +13904,7 @@
                 <a:solidFill>
                   <a:srgbClr val="8B5CF6"/>
                 </a:solidFill>
-                <a:latin typeface="Microsoft YaHei"/>
+                <a:latin typeface="微软雅黑" panose="020B0503020204020204" charset="-122"/>
               </a:defRPr>
             </a:pPr>
             <a:r>
@@ -13730,7 +13943,7 @@
                 <a:solidFill>
                   <a:srgbClr val="1E293B"/>
                 </a:solidFill>
-                <a:latin typeface="Microsoft YaHei"/>
+                <a:latin typeface="微软雅黑" panose="020B0503020204020204" charset="-122"/>
               </a:defRPr>
             </a:pPr>
             <a:r>
@@ -13746,7 +13959,7 @@
                 <a:solidFill>
                   <a:srgbClr val="1E293B"/>
                 </a:solidFill>
-                <a:latin typeface="Microsoft YaHei"/>
+                <a:latin typeface="微软雅黑" panose="020B0503020204020204" charset="-122"/>
               </a:defRPr>
             </a:pPr>
             <a:r>
@@ -13762,7 +13975,7 @@
                 <a:solidFill>
                   <a:srgbClr val="1E293B"/>
                 </a:solidFill>
-                <a:latin typeface="Microsoft YaHei"/>
+                <a:latin typeface="微软雅黑" panose="020B0503020204020204" charset="-122"/>
               </a:defRPr>
             </a:pPr>
             <a:r>
@@ -13778,7 +13991,7 @@
                 <a:solidFill>
                   <a:srgbClr val="1E293B"/>
                 </a:solidFill>
-                <a:latin typeface="Microsoft YaHei"/>
+                <a:latin typeface="微软雅黑" panose="020B0503020204020204" charset="-122"/>
               </a:defRPr>
             </a:pPr>
             <a:r>
@@ -13794,7 +14007,7 @@
                 <a:solidFill>
                   <a:srgbClr val="1E293B"/>
                 </a:solidFill>
-                <a:latin typeface="Microsoft YaHei"/>
+                <a:latin typeface="微软雅黑" panose="020B0503020204020204" charset="-122"/>
               </a:defRPr>
             </a:pPr>
             <a:r>
@@ -13810,7 +14023,7 @@
                 <a:solidFill>
                   <a:srgbClr val="1E293B"/>
                 </a:solidFill>
-                <a:latin typeface="Microsoft YaHei"/>
+                <a:latin typeface="微软雅黑" panose="020B0503020204020204" charset="-122"/>
               </a:defRPr>
             </a:pPr>
           </a:p>
@@ -13823,7 +14036,7 @@
                 <a:solidFill>
                   <a:srgbClr val="1E293B"/>
                 </a:solidFill>
-                <a:latin typeface="Microsoft YaHei"/>
+                <a:latin typeface="微软雅黑" panose="020B0503020204020204" charset="-122"/>
               </a:defRPr>
             </a:pPr>
             <a:r>
@@ -13839,7 +14052,7 @@
                 <a:solidFill>
                   <a:srgbClr val="1E293B"/>
                 </a:solidFill>
-                <a:latin typeface="Microsoft YaHei"/>
+                <a:latin typeface="微软雅黑" panose="020B0503020204020204" charset="-122"/>
               </a:defRPr>
             </a:pPr>
             <a:r>
@@ -13855,7 +14068,7 @@
                 <a:solidFill>
                   <a:srgbClr val="1E293B"/>
                 </a:solidFill>
-                <a:latin typeface="Microsoft YaHei"/>
+                <a:latin typeface="微软雅黑" panose="020B0503020204020204" charset="-122"/>
               </a:defRPr>
             </a:pPr>
             <a:r>
@@ -13982,7 +14195,7 @@
                 <a:solidFill>
                   <a:srgbClr val="8B5CF6"/>
                 </a:solidFill>
-                <a:latin typeface="Microsoft YaHei"/>
+                <a:latin typeface="微软雅黑" panose="020B0503020204020204" charset="-122"/>
               </a:defRPr>
             </a:pPr>
             <a:r>
@@ -14021,7 +14234,7 @@
                 <a:solidFill>
                   <a:srgbClr val="1E293B"/>
                 </a:solidFill>
-                <a:latin typeface="Microsoft YaHei"/>
+                <a:latin typeface="微软雅黑" panose="020B0503020204020204" charset="-122"/>
               </a:defRPr>
             </a:pPr>
             <a:r>
@@ -14037,7 +14250,7 @@
                 <a:solidFill>
                   <a:srgbClr val="1E293B"/>
                 </a:solidFill>
-                <a:latin typeface="Microsoft YaHei"/>
+                <a:latin typeface="微软雅黑" panose="020B0503020204020204" charset="-122"/>
               </a:defRPr>
             </a:pPr>
             <a:r>
@@ -14053,7 +14266,7 @@
                 <a:solidFill>
                   <a:srgbClr val="1E293B"/>
                 </a:solidFill>
-                <a:latin typeface="Microsoft YaHei"/>
+                <a:latin typeface="微软雅黑" panose="020B0503020204020204" charset="-122"/>
               </a:defRPr>
             </a:pPr>
             <a:r>
@@ -14069,7 +14282,7 @@
                 <a:solidFill>
                   <a:srgbClr val="1E293B"/>
                 </a:solidFill>
-                <a:latin typeface="Microsoft YaHei"/>
+                <a:latin typeface="微软雅黑" panose="020B0503020204020204" charset="-122"/>
               </a:defRPr>
             </a:pPr>
             <a:r>
@@ -14085,7 +14298,7 @@
                 <a:solidFill>
                   <a:srgbClr val="1E293B"/>
                 </a:solidFill>
-                <a:latin typeface="Microsoft YaHei"/>
+                <a:latin typeface="微软雅黑" panose="020B0503020204020204" charset="-122"/>
               </a:defRPr>
             </a:pPr>
             <a:r>
@@ -14101,7 +14314,7 @@
                 <a:solidFill>
                   <a:srgbClr val="1E293B"/>
                 </a:solidFill>
-                <a:latin typeface="Microsoft YaHei"/>
+                <a:latin typeface="微软雅黑" panose="020B0503020204020204" charset="-122"/>
               </a:defRPr>
             </a:pPr>
             <a:r>
@@ -14117,7 +14330,7 @@
                 <a:solidFill>
                   <a:srgbClr val="1E293B"/>
                 </a:solidFill>
-                <a:latin typeface="Microsoft YaHei"/>
+                <a:latin typeface="微软雅黑" panose="020B0503020204020204" charset="-122"/>
               </a:defRPr>
             </a:pPr>
             <a:r>
@@ -14156,7 +14369,7 @@
                 <a:solidFill>
                   <a:srgbClr val="5A6474"/>
                 </a:solidFill>
-                <a:latin typeface="Microsoft YaHei"/>
+                <a:latin typeface="微软雅黑" panose="020B0503020204020204" charset="-122"/>
               </a:defRPr>
             </a:pPr>
             <a:r>
@@ -14174,7 +14387,7 @@
 </file>
 
 <file path=ppt/slides/slide7.xml><?xml version="1.0" encoding="utf-8"?>
-<p:sld xmlns:a="http://schemas.openxmlformats.org/drawingml/2006/main" xmlns:p="http://schemas.openxmlformats.org/presentationml/2006/main" xmlns:r="http://schemas.openxmlformats.org/officeDocument/2006/relationships">
+<p:sld xmlns:a="http://schemas.openxmlformats.org/drawingml/2006/main" xmlns:r="http://schemas.openxmlformats.org/officeDocument/2006/relationships" xmlns:p="http://schemas.openxmlformats.org/presentationml/2006/main">
   <p:cSld>
     <p:spTree>
       <p:nvGrpSpPr>
@@ -14257,7 +14470,7 @@
                 <a:solidFill>
                   <a:srgbClr val="1E293B"/>
                 </a:solidFill>
-                <a:latin typeface="Microsoft YaHei"/>
+                <a:latin typeface="微软雅黑" panose="020B0503020204020204" charset="-122"/>
               </a:defRPr>
             </a:pPr>
             <a:r>
@@ -14296,7 +14509,7 @@
                 <a:solidFill>
                   <a:srgbClr val="5A6474"/>
                 </a:solidFill>
-                <a:latin typeface="Microsoft YaHei"/>
+                <a:latin typeface="微软雅黑" panose="020B0503020204020204" charset="-122"/>
               </a:defRPr>
             </a:pPr>
             <a:r>
@@ -14381,7 +14594,7 @@
                 <a:solidFill>
                   <a:srgbClr val="8B5CF6"/>
                 </a:solidFill>
-                <a:latin typeface="Microsoft YaHei"/>
+                <a:latin typeface="微软雅黑" panose="020B0503020204020204" charset="-122"/>
               </a:rPr>
               <a:t>▍统一注册</a:t>
             </a:r>
@@ -14390,10 +14603,16 @@
                 <a:solidFill>
                   <a:srgbClr val="1E293B"/>
                 </a:solidFill>
-                <a:latin typeface="Microsoft YaHei"/>
+                <a:latin typeface="微软雅黑" panose="020B0503020204020204" charset="-122"/>
               </a:rPr>
               <a:t>  register(name, func) 注册工具与别名（move_file≡move_path），注册时自动生成 SHA256 签名</a:t>
             </a:r>
+            <a:endParaRPr sz="1800">
+              <a:solidFill>
+                <a:srgbClr val="1E293B"/>
+              </a:solidFill>
+              <a:latin typeface="微软雅黑" panose="020B0503020204020204" charset="-122"/>
+            </a:endParaRPr>
           </a:p>
           <a:p>
             <a:pPr>
@@ -14406,7 +14625,7 @@
                 <a:solidFill>
                   <a:srgbClr val="8B5CF6"/>
                 </a:solidFill>
-                <a:latin typeface="Microsoft YaHei"/>
+                <a:latin typeface="微软雅黑" panose="020B0503020204020204" charset="-122"/>
               </a:rPr>
               <a:t>▍统一调用</a:t>
             </a:r>
@@ -14415,10 +14634,16 @@
                 <a:solidFill>
                   <a:srgbClr val="1E293B"/>
                 </a:solidFill>
-                <a:latin typeface="Microsoft YaHei"/>
+                <a:latin typeface="微软雅黑" panose="020B0503020204020204" charset="-122"/>
               </a:rPr>
               <a:t>  call(name, params) 单一入口，try/except 归一为 {success:false,error}，异常不逃逸</a:t>
             </a:r>
+            <a:endParaRPr sz="1800">
+              <a:solidFill>
+                <a:srgbClr val="1E293B"/>
+              </a:solidFill>
+              <a:latin typeface="微软雅黑" panose="020B0503020204020204" charset="-122"/>
+            </a:endParaRPr>
           </a:p>
           <a:p>
             <a:pPr>
@@ -14431,7 +14656,7 @@
                 <a:solidFill>
                   <a:srgbClr val="8B5CF6"/>
                 </a:solidFill>
-                <a:latin typeface="Microsoft YaHei"/>
+                <a:latin typeface="微软雅黑" panose="020B0503020204020204" charset="-122"/>
               </a:rPr>
               <a:t>▍Schema 自动生成</a:t>
             </a:r>
@@ -14440,10 +14665,16 @@
                 <a:solidFill>
                   <a:srgbClr val="1E293B"/>
                 </a:solidFill>
-                <a:latin typeface="Microsoft YaHei"/>
+                <a:latin typeface="微软雅黑" panose="020B0503020204020204" charset="-122"/>
               </a:rPr>
               <a:t>  由函数签名+typing+docstring 推断描述与参数（对齐 MCP inputSchema）</a:t>
             </a:r>
+            <a:endParaRPr sz="1800">
+              <a:solidFill>
+                <a:srgbClr val="1E293B"/>
+              </a:solidFill>
+              <a:latin typeface="微软雅黑" panose="020B0503020204020204" charset="-122"/>
+            </a:endParaRPr>
           </a:p>
           <a:p>
             <a:pPr>
@@ -14456,7 +14687,7 @@
                 <a:solidFill>
                   <a:srgbClr val="8B5CF6"/>
                 </a:solidFill>
-                <a:latin typeface="Microsoft YaHei"/>
+                <a:latin typeface="微软雅黑" panose="020B0503020204020204" charset="-122"/>
               </a:rPr>
               <a:t>▍功能域</a:t>
             </a:r>
@@ -14465,10 +14696,16 @@
                 <a:solidFill>
                   <a:srgbClr val="1E293B"/>
                 </a:solidFill>
-                <a:latin typeface="Microsoft YaHei"/>
+                <a:latin typeface="微软雅黑" panose="020B0503020204020204" charset="-122"/>
               </a:rPr>
               <a:t>  文件/文件夹/文本/批量/磁盘/搜索/图片/系统/浏览器/邮件/屏幕/网络 12 大类</a:t>
             </a:r>
+            <a:endParaRPr sz="1800">
+              <a:solidFill>
+                <a:srgbClr val="1E293B"/>
+              </a:solidFill>
+              <a:latin typeface="微软雅黑" panose="020B0503020204020204" charset="-122"/>
+            </a:endParaRPr>
           </a:p>
           <a:p>
             <a:pPr>
@@ -14481,7 +14718,7 @@
                 <a:solidFill>
                   <a:srgbClr val="8B5CF6"/>
                 </a:solidFill>
-                <a:latin typeface="Microsoft YaHei"/>
+                <a:latin typeface="微软雅黑" panose="020B0503020204020204" charset="-122"/>
               </a:rPr>
               <a:t>▍代表性工具</a:t>
             </a:r>
@@ -14490,10 +14727,16 @@
                 <a:solidFill>
                   <a:srgbClr val="1E293B"/>
                 </a:solidFill>
-                <a:latin typeface="Microsoft YaHei"/>
+                <a:latin typeface="微软雅黑" panose="020B0503020204020204" charset="-122"/>
               </a:rPr>
               <a:t>  copy_file、organize_downloads(技能)、edit_file、search_in_files、run_command、send_email、screen_inspect</a:t>
             </a:r>
+            <a:endParaRPr sz="1800">
+              <a:solidFill>
+                <a:srgbClr val="1E293B"/>
+              </a:solidFill>
+              <a:latin typeface="微软雅黑" panose="020B0503020204020204" charset="-122"/>
+            </a:endParaRPr>
           </a:p>
         </p:txBody>
       </p:sp>
@@ -14527,7 +14770,7 @@
                 <a:solidFill>
                   <a:srgbClr val="5A6474"/>
                 </a:solidFill>
-                <a:latin typeface="Microsoft YaHei"/>
+                <a:latin typeface="微软雅黑" panose="020B0503020204020204" charset="-122"/>
               </a:defRPr>
             </a:pPr>
             <a:r>
@@ -14545,7 +14788,7 @@
 </file>
 
 <file path=ppt/slides/slide8.xml><?xml version="1.0" encoding="utf-8"?>
-<p:sld xmlns:a="http://schemas.openxmlformats.org/drawingml/2006/main" xmlns:p="http://schemas.openxmlformats.org/presentationml/2006/main" xmlns:r="http://schemas.openxmlformats.org/officeDocument/2006/relationships">
+<p:sld xmlns:a="http://schemas.openxmlformats.org/drawingml/2006/main" xmlns:r="http://schemas.openxmlformats.org/officeDocument/2006/relationships" xmlns:p="http://schemas.openxmlformats.org/presentationml/2006/main">
   <p:cSld>
     <p:spTree>
       <p:nvGrpSpPr>
@@ -14628,7 +14871,7 @@
                 <a:solidFill>
                   <a:srgbClr val="1E293B"/>
                 </a:solidFill>
-                <a:latin typeface="Microsoft YaHei"/>
+                <a:latin typeface="微软雅黑" panose="020B0503020204020204" charset="-122"/>
               </a:defRPr>
             </a:pPr>
             <a:r>
@@ -14667,7 +14910,7 @@
                 <a:solidFill>
                   <a:srgbClr val="5A6474"/>
                 </a:solidFill>
-                <a:latin typeface="Microsoft YaHei"/>
+                <a:latin typeface="微软雅黑" panose="020B0503020204020204" charset="-122"/>
               </a:defRPr>
             </a:pPr>
             <a:r>
@@ -14838,7 +15081,7 @@
                 <a:solidFill>
                   <a:srgbClr val="8B5CF6"/>
                 </a:solidFill>
-                <a:latin typeface="Microsoft YaHei"/>
+                <a:latin typeface="微软雅黑" panose="020B0503020204020204" charset="-122"/>
               </a:defRPr>
             </a:pPr>
             <a:r>
@@ -14877,7 +15120,7 @@
                 <a:solidFill>
                   <a:srgbClr val="1E293B"/>
                 </a:solidFill>
-                <a:latin typeface="Microsoft YaHei"/>
+                <a:latin typeface="微软雅黑" panose="020B0503020204020204" charset="-122"/>
               </a:defRPr>
             </a:pPr>
             <a:r>
@@ -14893,7 +15136,7 @@
                 <a:solidFill>
                   <a:srgbClr val="1E293B"/>
                 </a:solidFill>
-                <a:latin typeface="Microsoft YaHei"/>
+                <a:latin typeface="微软雅黑" panose="020B0503020204020204" charset="-122"/>
               </a:defRPr>
             </a:pPr>
             <a:r>
@@ -14909,7 +15152,7 @@
                 <a:solidFill>
                   <a:srgbClr val="1E293B"/>
                 </a:solidFill>
-                <a:latin typeface="Microsoft YaHei"/>
+                <a:latin typeface="微软雅黑" panose="020B0503020204020204" charset="-122"/>
               </a:defRPr>
             </a:pPr>
             <a:r>
@@ -14925,7 +15168,7 @@
                 <a:solidFill>
                   <a:srgbClr val="1E293B"/>
                 </a:solidFill>
-                <a:latin typeface="Microsoft YaHei"/>
+                <a:latin typeface="微软雅黑" panose="020B0503020204020204" charset="-122"/>
               </a:defRPr>
             </a:pPr>
             <a:r>
@@ -15052,7 +15295,7 @@
                 <a:solidFill>
                   <a:srgbClr val="8B5CF6"/>
                 </a:solidFill>
-                <a:latin typeface="Microsoft YaHei"/>
+                <a:latin typeface="微软雅黑" panose="020B0503020204020204" charset="-122"/>
               </a:defRPr>
             </a:pPr>
             <a:r>
@@ -15091,7 +15334,7 @@
                 <a:solidFill>
                   <a:srgbClr val="1E293B"/>
                 </a:solidFill>
-                <a:latin typeface="Microsoft YaHei"/>
+                <a:latin typeface="微软雅黑" panose="020B0503020204020204" charset="-122"/>
               </a:defRPr>
             </a:pPr>
             <a:r>
@@ -15107,7 +15350,7 @@
                 <a:solidFill>
                   <a:srgbClr val="1E293B"/>
                 </a:solidFill>
-                <a:latin typeface="Microsoft YaHei"/>
+                <a:latin typeface="微软雅黑" panose="020B0503020204020204" charset="-122"/>
               </a:defRPr>
             </a:pPr>
             <a:r>
@@ -15123,7 +15366,7 @@
                 <a:solidFill>
                   <a:srgbClr val="1E293B"/>
                 </a:solidFill>
-                <a:latin typeface="Microsoft YaHei"/>
+                <a:latin typeface="微软雅黑" panose="020B0503020204020204" charset="-122"/>
               </a:defRPr>
             </a:pPr>
             <a:r>
@@ -15139,7 +15382,7 @@
                 <a:solidFill>
                   <a:srgbClr val="1E293B"/>
                 </a:solidFill>
-                <a:latin typeface="Microsoft YaHei"/>
+                <a:latin typeface="微软雅黑" panose="020B0503020204020204" charset="-122"/>
               </a:defRPr>
             </a:pPr>
             <a:r>
@@ -15266,7 +15509,7 @@
                 <a:solidFill>
                   <a:srgbClr val="8B5CF6"/>
                 </a:solidFill>
-                <a:latin typeface="Microsoft YaHei"/>
+                <a:latin typeface="微软雅黑" panose="020B0503020204020204" charset="-122"/>
               </a:defRPr>
             </a:pPr>
             <a:r>
@@ -15305,7 +15548,7 @@
                 <a:solidFill>
                   <a:srgbClr val="1E293B"/>
                 </a:solidFill>
-                <a:latin typeface="Microsoft YaHei"/>
+                <a:latin typeface="微软雅黑" panose="020B0503020204020204" charset="-122"/>
               </a:defRPr>
             </a:pPr>
             <a:r>
@@ -15321,7 +15564,7 @@
                 <a:solidFill>
                   <a:srgbClr val="1E293B"/>
                 </a:solidFill>
-                <a:latin typeface="Microsoft YaHei"/>
+                <a:latin typeface="微软雅黑" panose="020B0503020204020204" charset="-122"/>
               </a:defRPr>
             </a:pPr>
             <a:r>
@@ -15337,7 +15580,7 @@
                 <a:solidFill>
                   <a:srgbClr val="1E293B"/>
                 </a:solidFill>
-                <a:latin typeface="Microsoft YaHei"/>
+                <a:latin typeface="微软雅黑" panose="020B0503020204020204" charset="-122"/>
               </a:defRPr>
             </a:pPr>
             <a:r>
@@ -15353,7 +15596,7 @@
                 <a:solidFill>
                   <a:srgbClr val="1E293B"/>
                 </a:solidFill>
-                <a:latin typeface="Microsoft YaHei"/>
+                <a:latin typeface="微软雅黑" panose="020B0503020204020204" charset="-122"/>
               </a:defRPr>
             </a:pPr>
             <a:r>
@@ -15480,7 +15723,7 @@
                 <a:solidFill>
                   <a:srgbClr val="8B5CF6"/>
                 </a:solidFill>
-                <a:latin typeface="Microsoft YaHei"/>
+                <a:latin typeface="微软雅黑" panose="020B0503020204020204" charset="-122"/>
               </a:defRPr>
             </a:pPr>
             <a:r>
@@ -15519,7 +15762,7 @@
                 <a:solidFill>
                   <a:srgbClr val="1E293B"/>
                 </a:solidFill>
-                <a:latin typeface="Microsoft YaHei"/>
+                <a:latin typeface="微软雅黑" panose="020B0503020204020204" charset="-122"/>
               </a:defRPr>
             </a:pPr>
             <a:r>
@@ -15535,7 +15778,7 @@
                 <a:solidFill>
                   <a:srgbClr val="1E293B"/>
                 </a:solidFill>
-                <a:latin typeface="Microsoft YaHei"/>
+                <a:latin typeface="微软雅黑" panose="020B0503020204020204" charset="-122"/>
               </a:defRPr>
             </a:pPr>
             <a:r>
@@ -15551,7 +15794,7 @@
                 <a:solidFill>
                   <a:srgbClr val="1E293B"/>
                 </a:solidFill>
-                <a:latin typeface="Microsoft YaHei"/>
+                <a:latin typeface="微软雅黑" panose="020B0503020204020204" charset="-122"/>
               </a:defRPr>
             </a:pPr>
             <a:r>
@@ -15567,7 +15810,7 @@
                 <a:solidFill>
                   <a:srgbClr val="1E293B"/>
                 </a:solidFill>
-                <a:latin typeface="Microsoft YaHei"/>
+                <a:latin typeface="微软雅黑" panose="020B0503020204020204" charset="-122"/>
               </a:defRPr>
             </a:pPr>
             <a:r>
@@ -15606,7 +15849,7 @@
                 <a:solidFill>
                   <a:srgbClr val="5A6474"/>
                 </a:solidFill>
-                <a:latin typeface="Microsoft YaHei"/>
+                <a:latin typeface="微软雅黑" panose="020B0503020204020204" charset="-122"/>
               </a:defRPr>
             </a:pPr>
             <a:r>
@@ -15622,7 +15865,7 @@
                 <a:solidFill>
                   <a:srgbClr val="5A6474"/>
                 </a:solidFill>
-                <a:latin typeface="Microsoft YaHei"/>
+                <a:latin typeface="微软雅黑" panose="020B0503020204020204" charset="-122"/>
               </a:defRPr>
             </a:pPr>
             <a:r>
@@ -15661,7 +15904,7 @@
                 <a:solidFill>
                   <a:srgbClr val="5A6474"/>
                 </a:solidFill>
-                <a:latin typeface="Microsoft YaHei"/>
+                <a:latin typeface="微软雅黑" panose="020B0503020204020204" charset="-122"/>
               </a:defRPr>
             </a:pPr>
             <a:r>
@@ -15679,7 +15922,7 @@
 </file>
 
 <file path=ppt/slides/slide9.xml><?xml version="1.0" encoding="utf-8"?>
-<p:sld xmlns:a="http://schemas.openxmlformats.org/drawingml/2006/main" xmlns:p="http://schemas.openxmlformats.org/presentationml/2006/main" xmlns:r="http://schemas.openxmlformats.org/officeDocument/2006/relationships">
+<p:sld xmlns:a="http://schemas.openxmlformats.org/drawingml/2006/main" xmlns:r="http://schemas.openxmlformats.org/officeDocument/2006/relationships" xmlns:p="http://schemas.openxmlformats.org/presentationml/2006/main">
   <p:cSld>
     <p:spTree>
       <p:nvGrpSpPr>
@@ -15762,7 +16005,7 @@
                 <a:solidFill>
                   <a:srgbClr val="1E293B"/>
                 </a:solidFill>
-                <a:latin typeface="Microsoft YaHei"/>
+                <a:latin typeface="微软雅黑" panose="020B0503020204020204" charset="-122"/>
               </a:defRPr>
             </a:pPr>
             <a:r>
@@ -15801,7 +16044,7 @@
                 <a:solidFill>
                   <a:srgbClr val="5A6474"/>
                 </a:solidFill>
-                <a:latin typeface="Microsoft YaHei"/>
+                <a:latin typeface="微软雅黑" panose="020B0503020204020204" charset="-122"/>
               </a:defRPr>
             </a:pPr>
             <a:r>
@@ -15886,7 +16129,7 @@
                 <a:solidFill>
                   <a:srgbClr val="8B5CF6"/>
                 </a:solidFill>
-                <a:latin typeface="Microsoft YaHei"/>
+                <a:latin typeface="微软雅黑" panose="020B0503020204020204" charset="-122"/>
               </a:rPr>
               <a:t>▍四层安全</a:t>
             </a:r>
@@ -15895,10 +16138,16 @@
                 <a:solidFill>
                   <a:srgbClr val="1E293B"/>
                 </a:solidFill>
-                <a:latin typeface="Microsoft YaHei"/>
+                <a:latin typeface="微软雅黑" panose="020B0503020204020204" charset="-122"/>
               </a:rPr>
               <a:t>  权限检查(危险指令/受保护路径) → 沙箱执行(确认门) → 签名验证(SHA256) → 隐私保护(脱敏)</a:t>
             </a:r>
+            <a:endParaRPr sz="1800">
+              <a:solidFill>
+                <a:srgbClr val="1E293B"/>
+              </a:solidFill>
+              <a:latin typeface="微软雅黑" panose="020B0503020204020204" charset="-122"/>
+            </a:endParaRPr>
           </a:p>
           <a:p>
             <a:pPr>
@@ -15911,7 +16160,7 @@
                 <a:solidFill>
                   <a:srgbClr val="8B5CF6"/>
                 </a:solidFill>
-                <a:latin typeface="Microsoft YaHei"/>
+                <a:latin typeface="微软雅黑" panose="020B0503020204020204" charset="-122"/>
               </a:rPr>
               <a:t>▍审计日志</a:t>
             </a:r>
@@ -15920,10 +16169,16 @@
                 <a:solidFill>
                   <a:srgbClr val="1E293B"/>
                 </a:solidFill>
-                <a:latin typeface="Microsoft YaHei"/>
+                <a:latin typeface="微软雅黑" panose="020B0503020204020204" charset="-122"/>
               </a:rPr>
               <a:t>  每次用户输入/工具调用/确认事件追加记录（JSON Lines，可落盘、线程安全）</a:t>
             </a:r>
+            <a:endParaRPr sz="1800">
+              <a:solidFill>
+                <a:srgbClr val="1E293B"/>
+              </a:solidFill>
+              <a:latin typeface="微软雅黑" panose="020B0503020204020204" charset="-122"/>
+            </a:endParaRPr>
           </a:p>
           <a:p>
             <a:pPr>
@@ -15936,7 +16191,7 @@
                 <a:solidFill>
                   <a:srgbClr val="8B5CF6"/>
                 </a:solidFill>
-                <a:latin typeface="Microsoft YaHei"/>
+                <a:latin typeface="微软雅黑" panose="020B0503020204020204" charset="-122"/>
               </a:rPr>
               <a:t>▍RAG 知识库</a:t>
             </a:r>
@@ -15945,10 +16200,16 @@
                 <a:solidFill>
                   <a:srgbClr val="1E293B"/>
                 </a:solidFill>
-                <a:latin typeface="Microsoft YaHei"/>
+                <a:latin typeface="微软雅黑" panose="020B0503020204020204" charset="-122"/>
               </a:rPr>
               <a:t>  存储「用户输入→动作→结果」三元组，轻量词频向量+余弦相似度检索，零外部依赖</a:t>
             </a:r>
+            <a:endParaRPr sz="1800">
+              <a:solidFill>
+                <a:srgbClr val="1E293B"/>
+              </a:solidFill>
+              <a:latin typeface="微软雅黑" panose="020B0503020204020204" charset="-122"/>
+            </a:endParaRPr>
           </a:p>
           <a:p>
             <a:pPr>
@@ -15961,7 +16222,7 @@
                 <a:solidFill>
                   <a:srgbClr val="8B5CF6"/>
                 </a:solidFill>
-                <a:latin typeface="Microsoft YaHei"/>
+                <a:latin typeface="微软雅黑" panose="020B0503020204020204" charset="-122"/>
               </a:rPr>
               <a:t>▍数据源闭环</a:t>
             </a:r>
@@ -15970,10 +16231,16 @@
                 <a:solidFill>
                   <a:srgbClr val="1E293B"/>
                 </a:solidFill>
-                <a:latin typeface="Microsoft YaHei"/>
+                <a:latin typeface="微软雅黑" panose="020B0503020204020204" charset="-122"/>
               </a:rPr>
               <a:t>  第 4 组 call() 的 elapsed_ms/ts 字段、get_stats()、get_tool_signature 供第 5 组消费</a:t>
             </a:r>
+            <a:endParaRPr sz="1800">
+              <a:solidFill>
+                <a:srgbClr val="1E293B"/>
+              </a:solidFill>
+              <a:latin typeface="微软雅黑" panose="020B0503020204020204" charset="-122"/>
+            </a:endParaRPr>
           </a:p>
           <a:p>
             <a:pPr>
@@ -15986,7 +16253,7 @@
                 <a:solidFill>
                   <a:srgbClr val="8B5CF6"/>
                 </a:solidFill>
-                <a:latin typeface="Microsoft YaHei"/>
+                <a:latin typeface="微软雅黑" panose="020B0503020204020204" charset="-122"/>
               </a:rPr>
               <a:t>▍降级 Mock</a:t>
             </a:r>
@@ -15995,10 +16262,16 @@
                 <a:solidFill>
                   <a:srgbClr val="1E293B"/>
                 </a:solidFill>
-                <a:latin typeface="Microsoft YaHei"/>
+                <a:latin typeface="微软雅黑" panose="020B0503020204020204" charset="-122"/>
               </a:rPr>
               <a:t>  MockCoordinator 基于 57 个同构工具 Mock 跑端到端编排，5 组联调互不阻塞</a:t>
             </a:r>
+            <a:endParaRPr sz="1800">
+              <a:solidFill>
+                <a:srgbClr val="1E293B"/>
+              </a:solidFill>
+              <a:latin typeface="微软雅黑" panose="020B0503020204020204" charset="-122"/>
+            </a:endParaRPr>
           </a:p>
         </p:txBody>
       </p:sp>
@@ -16032,7 +16305,7 @@
                 <a:solidFill>
                   <a:srgbClr val="5A6474"/>
                 </a:solidFill>
-                <a:latin typeface="Microsoft YaHei"/>
+                <a:latin typeface="微软雅黑" panose="020B0503020204020204" charset="-122"/>
               </a:defRPr>
             </a:pPr>
             <a:r>
@@ -16365,6 +16638,10 @@
       </a:style>
     </a:lnDef>
   </a:objectDefaults>
-  <a:extraClrSchemeLst/>
+  <a:extLst>
+    <a:ext uri="{05A4C25C-085E-4340-85A3-A5531E510DB2}">
+      <thm15:themeFamily xmlns:thm15="http://schemas.microsoft.com/office/thememl/2012/main" name="Office Theme" id="{62F939B6-93AF-4DB8-9C6B-D6C7DFDC589F}" vid="{4A3C46E8-61CC-4603-A589-7422A47A8E4A}"/>
+    </a:ext>
+  </a:extLst>
 </a:theme>
 </file>
--- a/docs/第4组汇报PPT.pptx
+++ b/docs/第4组汇报PPT.pptx
@@ -23,6 +23,11 @@
     <p:sldId id="270" r:id="rId18"/>
     <p:sldId id="271" r:id="rId19"/>
     <p:sldId id="273" r:id="rId20"/>
+    <p:sldId id="274" r:id="rId24"/>
+    <p:sldId id="275" r:id="rId25"/>
+    <p:sldId id="276" r:id="rId26"/>
+    <p:sldId id="277" r:id="rId27"/>
+    <p:sldId id="278" r:id="rId28"/>
   </p:sldIdLst>
   <p:sldSz cx="12191365" cy="6858000" type="screen4x3"/>
   <p:notesSz cx="6858000" cy="9144000"/>
@@ -3354,7 +3359,7 @@
               </a:defRPr>
             </a:pPr>
             <a:r>
-              <a:t>ToolRegistry + SkillLibrary ｜ 59 工具 + 26 技能 + 512 测试全绿</a:t>
+              <a:t>ToolRegistry + SkillLibrary ｜ 59 工具 + 26 技能 + 552 测试全绿</a:t>
             </a:r>
           </a:p>
         </p:txBody>
@@ -4356,7 +4361,7 @@
               </a:defRPr>
             </a:pPr>
             <a:r>
-              <a:t>512 项测试全绿</a:t>
+              <a:t>552 项测试全绿</a:t>
             </a:r>
           </a:p>
         </p:txBody>
@@ -4483,7 +4488,7 @@
               </a:defRPr>
             </a:pPr>
             <a:r>
-              <a:t>512</a:t>
+              <a:t>552</a:t>
             </a:r>
           </a:p>
         </p:txBody>
@@ -8550,7 +8555,7 @@
               </a:defRPr>
             </a:pPr>
             <a:r>
-              <a:t>512</a:t>
+              <a:t>552</a:t>
             </a:r>
           </a:p>
         </p:txBody>
@@ -8868,7 +8873,7 @@
                 </a:solidFill>
                 <a:latin typeface="微软雅黑" panose="020B0503020204020204" charset="-122"/>
               </a:rPr>
-              <a:t>  11 条 ADR 决策记录 + 全注释 + 512 测试，代码质量可追溯</a:t>
+              <a:t>  11 条 ADR 决策记录 + 全注释 + 552 测试，代码质量可追溯</a:t>
             </a:r>
             <a:endParaRPr sz="1700">
               <a:solidFill>
@@ -10092,7 +10097,7 @@
                 </a:solidFill>
                 <a:latin typeface="微软雅黑" panose="020B0503020204020204" charset="-122"/>
               </a:rPr>
-              <a:t>  59 工具 + 26 技能 + 512 测试全绿 + 6 演示场景全覆盖 + 真机 LLM 联调</a:t>
+              <a:t>  59 工具 + 26 技能 + 552 测试全绿 + 6 演示场景全覆盖 + 真机 LLM 联调</a:t>
             </a:r>
             <a:endParaRPr sz="2000">
               <a:solidFill>
@@ -10301,6 +10306,271 @@
             </a:pPr>
             <a:r>
               <a:t>18</a:t>
+            </a:r>
+          </a:p>
+        </p:txBody>
+      </p:sp>
+    </p:spTree>
+  </p:cSld>
+  <p:clrMapOvr>
+    <a:masterClrMapping/>
+  </p:clrMapOvr>
+</p:sld>
+</file>
+
+<file path=ppt/slides/slide19.xml><?xml version="1.0" encoding="utf-8"?>
+<p:sld xmlns:a="http://schemas.openxmlformats.org/drawingml/2006/main" xmlns:p="http://schemas.openxmlformats.org/presentationml/2006/main" xmlns:r="http://schemas.openxmlformats.org/officeDocument/2006/relationships">
+  <p:cSld>
+    <p:spTree>
+      <p:nvGrpSpPr>
+        <p:cNvPr id="1" name=""/>
+        <p:cNvGrpSpPr/>
+        <p:nvPr/>
+      </p:nvGrpSpPr>
+      <p:grpSpPr/>
+      <p:sp>
+        <p:nvSpPr>
+          <p:cNvPr id="2" name="Rectangle 1"/>
+          <p:cNvSpPr/>
+          <p:nvPr/>
+        </p:nvSpPr>
+        <p:spPr>
+          <a:xfrm>
+            <a:off x="0" y="6711696"/>
+            <a:ext cx="12191365" cy="146304"/>
+          </a:xfrm>
+          <a:prstGeom prst="rect">
+            <a:avLst/>
+          </a:prstGeom>
+          <a:solidFill>
+            <a:srgbClr val="EEF2F6"/>
+          </a:solidFill>
+          <a:ln>
+            <a:noFill/>
+          </a:ln>
+        </p:spPr>
+        <p:style>
+          <a:lnRef idx="1">
+            <a:schemeClr val="accent1"/>
+          </a:lnRef>
+          <a:fillRef idx="3">
+            <a:schemeClr val="accent1"/>
+          </a:fillRef>
+          <a:effectRef idx="2">
+            <a:schemeClr val="accent1"/>
+          </a:effectRef>
+          <a:fontRef idx="minor">
+            <a:schemeClr val="lt1"/>
+          </a:fontRef>
+        </p:style>
+        <p:txBody>
+          <a:bodyPr rtlCol="0" anchor="ctr"/>
+          <a:lstStyle/>
+          <a:p>
+            <a:pPr algn="ctr"/>
+          </a:p>
+        </p:txBody>
+      </p:sp>
+      <p:sp>
+        <p:nvSpPr>
+          <p:cNvPr id="3" name="TextBox 2"/>
+          <p:cNvSpPr txBox="1"/>
+          <p:nvPr/>
+        </p:nvSpPr>
+        <p:spPr>
+          <a:xfrm>
+            <a:off x="548640" y="320040"/>
+            <a:ext cx="11094085" cy="650000"/>
+          </a:xfrm>
+          <a:prstGeom prst="rect">
+            <a:avLst/>
+          </a:prstGeom>
+          <a:noFill/>
+        </p:spPr>
+        <p:txBody>
+          <a:bodyPr wrap="square">
+            <a:spAutoFit/>
+          </a:bodyPr>
+          <a:lstStyle/>
+          <a:p>
+            <a:r>
+              <a:rPr sz="3000" b="1">
+                <a:solidFill>
+                  <a:srgbClr val="1F3A5F"/>
+                </a:solidFill>
+              </a:rPr>
+              <a:t>miniyu 系统设计总览：配置化 + 分层架构</a:t>
+            </a:r>
+          </a:p>
+        </p:txBody>
+      </p:sp>
+      <p:sp>
+        <p:nvSpPr>
+          <p:cNvPr id="4" name="Rectangle 3"/>
+          <p:cNvSpPr/>
+          <p:nvPr/>
+        </p:nvSpPr>
+        <p:spPr>
+          <a:xfrm>
+            <a:off x="548640" y="990600"/>
+            <a:ext cx="11094085" cy="27432"/>
+          </a:xfrm>
+          <a:prstGeom prst="rect">
+            <a:avLst/>
+          </a:prstGeom>
+          <a:solidFill>
+            <a:srgbClr val="E8743A"/>
+          </a:solidFill>
+          <a:ln>
+            <a:noFill/>
+          </a:ln>
+        </p:spPr>
+        <p:style>
+          <a:lnRef idx="1">
+            <a:schemeClr val="accent1"/>
+          </a:lnRef>
+          <a:fillRef idx="3">
+            <a:schemeClr val="accent1"/>
+          </a:fillRef>
+          <a:effectRef idx="2">
+            <a:schemeClr val="accent1"/>
+          </a:effectRef>
+          <a:fontRef idx="minor">
+            <a:schemeClr val="lt1"/>
+          </a:fontRef>
+        </p:style>
+        <p:txBody>
+          <a:bodyPr rtlCol="0" anchor="ctr"/>
+          <a:lstStyle/>
+          <a:p>
+            <a:pPr algn="ctr"/>
+          </a:p>
+        </p:txBody>
+      </p:sp>
+      <p:sp>
+        <p:nvSpPr>
+          <p:cNvPr id="5" name="TextBox 4"/>
+          <p:cNvSpPr txBox="1"/>
+          <p:nvPr/>
+        </p:nvSpPr>
+        <p:spPr>
+          <a:xfrm>
+            <a:off x="640080" y="1371600"/>
+            <a:ext cx="10911205" cy="5029200"/>
+          </a:xfrm>
+          <a:prstGeom prst="rect">
+            <a:avLst/>
+          </a:prstGeom>
+          <a:noFill/>
+        </p:spPr>
+        <p:txBody>
+          <a:bodyPr wrap="square">
+            <a:spAutoFit/>
+          </a:bodyPr>
+          <a:lstStyle/>
+          <a:p>
+            <a:pPr>
+              <a:spcAft>
+                <a:spcPts val="800"/>
+              </a:spcAft>
+            </a:pPr>
+            <a:r>
+              <a:rPr sz="1600" b="1">
+                <a:solidFill>
+                  <a:srgbClr val="333333"/>
+                </a:solidFill>
+              </a:rPr>
+              <a:t>◆ 配置化设计（不写死，改配置即变更）</a:t>
+            </a:r>
+          </a:p>
+          <a:p>
+            <a:pPr>
+              <a:spcAft>
+                <a:spcPts val="800"/>
+              </a:spcAft>
+            </a:pPr>
+            <a:r>
+              <a:rPr sz="1500">
+                <a:solidFill>
+                  <a:srgbClr val="333333"/>
+                </a:solidFill>
+              </a:rPr>
+              <a:t>  config.yaml：LLM 提供商 / 模型 / 授权档位 / 联网开关 / 协调层 / 邮件,全部可调；模板为 config.yaml.example（不含任何个人密钥）</a:t>
+            </a:r>
+          </a:p>
+          <a:p>
+            <a:pPr>
+              <a:spcAft>
+                <a:spcPts val="800"/>
+              </a:spcAft>
+            </a:pPr>
+            <a:r>
+              <a:rPr sz="1500">
+                <a:solidFill>
+                  <a:srgbClr val="333333"/>
+                </a:solidFill>
+              </a:rPr>
+              <a:t>  优先级：环境变量 &gt; config.yaml &gt; 内置默认值</a:t>
+            </a:r>
+          </a:p>
+          <a:p>
+            <a:pPr>
+              <a:spcAft>
+                <a:spcPts val="800"/>
+              </a:spcAft>
+            </a:pPr>
+            <a:r>
+              <a:rPr sz="1600" b="1">
+                <a:solidFill>
+                  <a:srgbClr val="333333"/>
+                </a:solidFill>
+              </a:rPr>
+              <a:t>◆ 分层架构</a:t>
+            </a:r>
+          </a:p>
+          <a:p>
+            <a:pPr>
+              <a:spcAft>
+                <a:spcPts val="800"/>
+              </a:spcAft>
+            </a:pPr>
+            <a:r>
+              <a:rPr sz="1500">
+                <a:solidFill>
+                  <a:srgbClr val="333333"/>
+                </a:solidFill>
+              </a:rPr>
+              <a:t>  第1组 AI Shell/HostAgent（意图）→ 第5组 协调+安全 → 第2组 规划 → 第3组 执行 → 第4组 工具/技能</a:t>
+            </a:r>
+          </a:p>
+          <a:p>
+            <a:pPr>
+              <a:spcAft>
+                <a:spcPts val="800"/>
+              </a:spcAft>
+            </a:pPr>
+            <a:r>
+              <a:rPr sz="1500">
+                <a:solidFill>
+                  <a:srgbClr val="333333"/>
+                </a:solidFill>
+              </a:rPr>
+              <a:t>  数据流 1→5→2→3→4，第4组统一输出 tool_result_json</a:t>
+            </a:r>
+          </a:p>
+          <a:p>
+            <a:pPr>
+              <a:spcAft>
+                <a:spcPts val="800"/>
+              </a:spcAft>
+            </a:pPr>
+            <a:r>
+              <a:rPr sz="1600" b="1">
+                <a:solidFill>
+                  <a:srgbClr val="333333"/>
+                </a:solidFill>
+              </a:rPr>
+              <a:t>◆ OS 原理落地：持久性(文件系统/目录管理) 由第4组工具层直接承载</a:t>
             </a:r>
           </a:p>
         </p:txBody>
@@ -10936,6 +11206,1111 @@
 </p:sld>
 </file>
 
+<file path=ppt/slides/slide20.xml><?xml version="1.0" encoding="utf-8"?>
+<p:sld xmlns:a="http://schemas.openxmlformats.org/drawingml/2006/main" xmlns:p="http://schemas.openxmlformats.org/presentationml/2006/main" xmlns:r="http://schemas.openxmlformats.org/officeDocument/2006/relationships">
+  <p:cSld>
+    <p:spTree>
+      <p:nvGrpSpPr>
+        <p:cNvPr id="1" name=""/>
+        <p:cNvGrpSpPr/>
+        <p:nvPr/>
+      </p:nvGrpSpPr>
+      <p:grpSpPr/>
+      <p:sp>
+        <p:nvSpPr>
+          <p:cNvPr id="2" name="Rectangle 1"/>
+          <p:cNvSpPr/>
+          <p:nvPr/>
+        </p:nvSpPr>
+        <p:spPr>
+          <a:xfrm>
+            <a:off x="0" y="6711696"/>
+            <a:ext cx="12191365" cy="146304"/>
+          </a:xfrm>
+          <a:prstGeom prst="rect">
+            <a:avLst/>
+          </a:prstGeom>
+          <a:solidFill>
+            <a:srgbClr val="EEF2F6"/>
+          </a:solidFill>
+          <a:ln>
+            <a:noFill/>
+          </a:ln>
+        </p:spPr>
+        <p:style>
+          <a:lnRef idx="1">
+            <a:schemeClr val="accent1"/>
+          </a:lnRef>
+          <a:fillRef idx="3">
+            <a:schemeClr val="accent1"/>
+          </a:fillRef>
+          <a:effectRef idx="2">
+            <a:schemeClr val="accent1"/>
+          </a:effectRef>
+          <a:fontRef idx="minor">
+            <a:schemeClr val="lt1"/>
+          </a:fontRef>
+        </p:style>
+        <p:txBody>
+          <a:bodyPr rtlCol="0" anchor="ctr"/>
+          <a:lstStyle/>
+          <a:p>
+            <a:pPr algn="ctr"/>
+          </a:p>
+        </p:txBody>
+      </p:sp>
+      <p:sp>
+        <p:nvSpPr>
+          <p:cNvPr id="3" name="TextBox 2"/>
+          <p:cNvSpPr txBox="1"/>
+          <p:nvPr/>
+        </p:nvSpPr>
+        <p:spPr>
+          <a:xfrm>
+            <a:off x="548640" y="320040"/>
+            <a:ext cx="11094085" cy="650000"/>
+          </a:xfrm>
+          <a:prstGeom prst="rect">
+            <a:avLst/>
+          </a:prstGeom>
+          <a:noFill/>
+        </p:spPr>
+        <p:txBody>
+          <a:bodyPr wrap="square">
+            <a:spAutoFit/>
+          </a:bodyPr>
+          <a:lstStyle/>
+          <a:p>
+            <a:r>
+              <a:rPr sz="3000" b="1">
+                <a:solidFill>
+                  <a:srgbClr val="1F3A5F"/>
+                </a:solidFill>
+              </a:rPr>
+              <a:t>LLM 三层自动回退链（主 → 本地 → 确定性脑）</a:t>
+            </a:r>
+          </a:p>
+        </p:txBody>
+      </p:sp>
+      <p:sp>
+        <p:nvSpPr>
+          <p:cNvPr id="4" name="Rectangle 3"/>
+          <p:cNvSpPr/>
+          <p:nvPr/>
+        </p:nvSpPr>
+        <p:spPr>
+          <a:xfrm>
+            <a:off x="548640" y="990600"/>
+            <a:ext cx="11094085" cy="27432"/>
+          </a:xfrm>
+          <a:prstGeom prst="rect">
+            <a:avLst/>
+          </a:prstGeom>
+          <a:solidFill>
+            <a:srgbClr val="E8743A"/>
+          </a:solidFill>
+          <a:ln>
+            <a:noFill/>
+          </a:ln>
+        </p:spPr>
+        <p:style>
+          <a:lnRef idx="1">
+            <a:schemeClr val="accent1"/>
+          </a:lnRef>
+          <a:fillRef idx="3">
+            <a:schemeClr val="accent1"/>
+          </a:fillRef>
+          <a:effectRef idx="2">
+            <a:schemeClr val="accent1"/>
+          </a:effectRef>
+          <a:fontRef idx="minor">
+            <a:schemeClr val="lt1"/>
+          </a:fontRef>
+        </p:style>
+        <p:txBody>
+          <a:bodyPr rtlCol="0" anchor="ctr"/>
+          <a:lstStyle/>
+          <a:p>
+            <a:pPr algn="ctr"/>
+          </a:p>
+        </p:txBody>
+      </p:sp>
+      <p:sp>
+        <p:nvSpPr>
+          <p:cNvPr id="5" name="TextBox 4"/>
+          <p:cNvSpPr txBox="1"/>
+          <p:nvPr/>
+        </p:nvSpPr>
+        <p:spPr>
+          <a:xfrm>
+            <a:off x="640080" y="1371600"/>
+            <a:ext cx="10911205" cy="5029200"/>
+          </a:xfrm>
+          <a:prstGeom prst="rect">
+            <a:avLst/>
+          </a:prstGeom>
+          <a:noFill/>
+        </p:spPr>
+        <p:txBody>
+          <a:bodyPr wrap="square">
+            <a:spAutoFit/>
+          </a:bodyPr>
+          <a:lstStyle/>
+          <a:p>
+            <a:pPr>
+              <a:spcAft>
+                <a:spcPts val="800"/>
+              </a:spcAft>
+            </a:pPr>
+            <a:r>
+              <a:rPr sz="1600" b="1">
+                <a:solidFill>
+                  <a:srgbClr val="333333"/>
+                </a:solidFill>
+              </a:rPr>
+              <a:t>◆ 第 1 层（主）</a:t>
+            </a:r>
+          </a:p>
+          <a:p>
+            <a:pPr>
+              <a:spcAft>
+                <a:spcPts val="800"/>
+              </a:spcAft>
+            </a:pPr>
+            <a:r>
+              <a:rPr sz="1500">
+                <a:solidFill>
+                  <a:srgbClr val="333333"/>
+                </a:solidFill>
+              </a:rPr>
+              <a:t>  任意 OpenAI 兼容 API：阿里百炼 qwen / DeepSeek / 豆包…  function-calling 驱动 59 工具 + 26 技能</a:t>
+            </a:r>
+          </a:p>
+          <a:p>
+            <a:pPr>
+              <a:spcAft>
+                <a:spcPts val="800"/>
+              </a:spcAft>
+            </a:pPr>
+            <a:r>
+              <a:rPr sz="1600" b="1">
+                <a:solidFill>
+                  <a:srgbClr val="333333"/>
+                </a:solidFill>
+              </a:rPr>
+              <a:t>◆ 第 2 层（降级）</a:t>
+            </a:r>
+          </a:p>
+          <a:p>
+            <a:pPr>
+              <a:spcAft>
+                <a:spcPts val="800"/>
+              </a:spcAft>
+            </a:pPr>
+            <a:r>
+              <a:rPr sz="1500">
+                <a:solidFill>
+                  <a:srgbClr val="333333"/>
+                </a:solidFill>
+              </a:rPr>
+              <a:t>  主 API 超时/鉴权失败/断网时自动切本地 Ollama（localhost），恢复后每 5 分钟自动重试主 API</a:t>
+            </a:r>
+          </a:p>
+          <a:p>
+            <a:pPr>
+              <a:spcAft>
+                <a:spcPts val="800"/>
+              </a:spcAft>
+            </a:pPr>
+            <a:r>
+              <a:rPr sz="1500">
+                <a:solidFill>
+                  <a:srgbClr val="333333"/>
+                </a:solidFill>
+              </a:rPr>
+              <a:t>  本地小模型走 tool_free 纯对话模式（不带几十个工具 schema，省 CPU 解析数十秒）</a:t>
+            </a:r>
+          </a:p>
+          <a:p>
+            <a:pPr>
+              <a:spcAft>
+                <a:spcPts val="800"/>
+              </a:spcAft>
+            </a:pPr>
+            <a:r>
+              <a:rPr sz="1600" b="1">
+                <a:solidFill>
+                  <a:srgbClr val="333333"/>
+                </a:solidFill>
+              </a:rPr>
+              <a:t>◆ 第 3 层（兜底）</a:t>
+            </a:r>
+          </a:p>
+          <a:p>
+            <a:pPr>
+              <a:spcAft>
+                <a:spcPts val="800"/>
+              </a:spcAft>
+            </a:pPr>
+            <a:r>
+              <a:rPr sz="1500">
+                <a:solidFill>
+                  <a:srgbClr val="333333"/>
+                </a:solidFill>
+              </a:rPr>
+              <a:t>  确定性脑 DeterministicBrain：纯规则、零依赖、无需网络/API key，离线也能完整演示全流程</a:t>
+            </a:r>
+          </a:p>
+          <a:p>
+            <a:pPr>
+              <a:spcAft>
+                <a:spcPts val="800"/>
+              </a:spcAft>
+            </a:pPr>
+            <a:r>
+              <a:rPr sz="1500">
+                <a:solidFill>
+                  <a:srgbClr val="333333"/>
+                </a:solidFill>
+              </a:rPr>
+              <a:t>  模型支持运行时热切换 + Web 下拉 + force_local_mode()</a:t>
+            </a:r>
+          </a:p>
+        </p:txBody>
+      </p:sp>
+    </p:spTree>
+  </p:cSld>
+  <p:clrMapOvr>
+    <a:masterClrMapping/>
+  </p:clrMapOvr>
+</p:sld>
+</file>
+
+<file path=ppt/slides/slide21.xml><?xml version="1.0" encoding="utf-8"?>
+<p:sld xmlns:a="http://schemas.openxmlformats.org/drawingml/2006/main" xmlns:p="http://schemas.openxmlformats.org/presentationml/2006/main" xmlns:r="http://schemas.openxmlformats.org/officeDocument/2006/relationships">
+  <p:cSld>
+    <p:spTree>
+      <p:nvGrpSpPr>
+        <p:cNvPr id="1" name=""/>
+        <p:cNvGrpSpPr/>
+        <p:nvPr/>
+      </p:nvGrpSpPr>
+      <p:grpSpPr/>
+      <p:sp>
+        <p:nvSpPr>
+          <p:cNvPr id="2" name="Rectangle 1"/>
+          <p:cNvSpPr/>
+          <p:nvPr/>
+        </p:nvSpPr>
+        <p:spPr>
+          <a:xfrm>
+            <a:off x="0" y="6711696"/>
+            <a:ext cx="12191365" cy="146304"/>
+          </a:xfrm>
+          <a:prstGeom prst="rect">
+            <a:avLst/>
+          </a:prstGeom>
+          <a:solidFill>
+            <a:srgbClr val="EEF2F6"/>
+          </a:solidFill>
+          <a:ln>
+            <a:noFill/>
+          </a:ln>
+        </p:spPr>
+        <p:style>
+          <a:lnRef idx="1">
+            <a:schemeClr val="accent1"/>
+          </a:lnRef>
+          <a:fillRef idx="3">
+            <a:schemeClr val="accent1"/>
+          </a:fillRef>
+          <a:effectRef idx="2">
+            <a:schemeClr val="accent1"/>
+          </a:effectRef>
+          <a:fontRef idx="minor">
+            <a:schemeClr val="lt1"/>
+          </a:fontRef>
+        </p:style>
+        <p:txBody>
+          <a:bodyPr rtlCol="0" anchor="ctr"/>
+          <a:lstStyle/>
+          <a:p>
+            <a:pPr algn="ctr"/>
+          </a:p>
+        </p:txBody>
+      </p:sp>
+      <p:sp>
+        <p:nvSpPr>
+          <p:cNvPr id="3" name="TextBox 2"/>
+          <p:cNvSpPr txBox="1"/>
+          <p:nvPr/>
+        </p:nvSpPr>
+        <p:spPr>
+          <a:xfrm>
+            <a:off x="548640" y="320040"/>
+            <a:ext cx="11094085" cy="650000"/>
+          </a:xfrm>
+          <a:prstGeom prst="rect">
+            <a:avLst/>
+          </a:prstGeom>
+          <a:noFill/>
+        </p:spPr>
+        <p:txBody>
+          <a:bodyPr wrap="square">
+            <a:spAutoFit/>
+          </a:bodyPr>
+          <a:lstStyle/>
+          <a:p>
+            <a:r>
+              <a:rPr sz="3000" b="1">
+                <a:solidFill>
+                  <a:srgbClr val="1F3A5F"/>
+                </a:solidFill>
+              </a:rPr>
+              <a:t>Web 交互设计：流式 + 折叠面板 + 主题</a:t>
+            </a:r>
+          </a:p>
+        </p:txBody>
+      </p:sp>
+      <p:sp>
+        <p:nvSpPr>
+          <p:cNvPr id="4" name="Rectangle 3"/>
+          <p:cNvSpPr/>
+          <p:nvPr/>
+        </p:nvSpPr>
+        <p:spPr>
+          <a:xfrm>
+            <a:off x="548640" y="990600"/>
+            <a:ext cx="11094085" cy="27432"/>
+          </a:xfrm>
+          <a:prstGeom prst="rect">
+            <a:avLst/>
+          </a:prstGeom>
+          <a:solidFill>
+            <a:srgbClr val="E8743A"/>
+          </a:solidFill>
+          <a:ln>
+            <a:noFill/>
+          </a:ln>
+        </p:spPr>
+        <p:style>
+          <a:lnRef idx="1">
+            <a:schemeClr val="accent1"/>
+          </a:lnRef>
+          <a:fillRef idx="3">
+            <a:schemeClr val="accent1"/>
+          </a:fillRef>
+          <a:effectRef idx="2">
+            <a:schemeClr val="accent1"/>
+          </a:effectRef>
+          <a:fontRef idx="minor">
+            <a:schemeClr val="lt1"/>
+          </a:fontRef>
+        </p:style>
+        <p:txBody>
+          <a:bodyPr rtlCol="0" anchor="ctr"/>
+          <a:lstStyle/>
+          <a:p>
+            <a:pPr algn="ctr"/>
+          </a:p>
+        </p:txBody>
+      </p:sp>
+      <p:sp>
+        <p:nvSpPr>
+          <p:cNvPr id="5" name="TextBox 4"/>
+          <p:cNvSpPr txBox="1"/>
+          <p:nvPr/>
+        </p:nvSpPr>
+        <p:spPr>
+          <a:xfrm>
+            <a:off x="640080" y="1371600"/>
+            <a:ext cx="10911205" cy="5029200"/>
+          </a:xfrm>
+          <a:prstGeom prst="rect">
+            <a:avLst/>
+          </a:prstGeom>
+          <a:noFill/>
+        </p:spPr>
+        <p:txBody>
+          <a:bodyPr wrap="square">
+            <a:spAutoFit/>
+          </a:bodyPr>
+          <a:lstStyle/>
+          <a:p>
+            <a:pPr>
+              <a:spcAft>
+                <a:spcPts val="800"/>
+              </a:spcAft>
+            </a:pPr>
+            <a:r>
+              <a:rPr sz="1600" b="1">
+                <a:solidFill>
+                  <a:srgbClr val="333333"/>
+                </a:solidFill>
+              </a:rPr>
+              <a:t>◆ SSE 实时流式</a:t>
+            </a:r>
+          </a:p>
+          <a:p>
+            <a:pPr>
+              <a:spcAft>
+                <a:spcPts val="800"/>
+              </a:spcAft>
+            </a:pPr>
+            <a:r>
+              <a:rPr sz="1500">
+                <a:solidFill>
+                  <a:srgbClr val="333333"/>
+                </a:solidFill>
+              </a:rPr>
+              <a:t>  /chat 立即返 task_id → 后台 run_stream 逐 chunk 入队 → /task/&lt;id&gt;/events 推送</a:t>
+            </a:r>
+          </a:p>
+          <a:p>
+            <a:pPr>
+              <a:spcAft>
+                <a:spcPts val="800"/>
+              </a:spcAft>
+            </a:pPr>
+            <a:r>
+              <a:rPr sz="1500">
+                <a:solidFill>
+                  <a:srgbClr val="333333"/>
+                </a:solidFill>
+              </a:rPr>
+              <a:t>  reasoning/token/tool_call/confirm/done + 15s 心跳</a:t>
+            </a:r>
+          </a:p>
+          <a:p>
+            <a:pPr>
+              <a:spcAft>
+                <a:spcPts val="800"/>
+              </a:spcAft>
+            </a:pPr>
+            <a:r>
+              <a:rPr sz="1600" b="1">
+                <a:solidFill>
+                  <a:srgbClr val="333333"/>
+                </a:solidFill>
+              </a:rPr>
+              <a:t>◆ DeepSeek 式折叠</a:t>
+            </a:r>
+          </a:p>
+          <a:p>
+            <a:pPr>
+              <a:spcAft>
+                <a:spcPts val="800"/>
+              </a:spcAft>
+            </a:pPr>
+            <a:r>
+              <a:rPr sz="1500">
+                <a:solidFill>
+                  <a:srgbClr val="333333"/>
+                </a:solidFill>
+              </a:rPr>
+              <a:t>  思考完成折叠「已深度思考(用时 Xs)」；工具调用折叠「工具调用(N 个)」，限高 260px 内部滚动</a:t>
+            </a:r>
+          </a:p>
+          <a:p>
+            <a:pPr>
+              <a:spcAft>
+                <a:spcPts val="800"/>
+              </a:spcAft>
+            </a:pPr>
+            <a:r>
+              <a:rPr sz="1500">
+                <a:solidFill>
+                  <a:srgbClr val="333333"/>
+                </a:solidFill>
+              </a:rPr>
+              <a:t>  红色「⏹ 停止」按钮可打断死循环/超长输出（两层 stop_check + 幂等断电点）</a:t>
+            </a:r>
+          </a:p>
+          <a:p>
+            <a:pPr>
+              <a:spcAft>
+                <a:spcPts val="800"/>
+              </a:spcAft>
+            </a:pPr>
+            <a:r>
+              <a:rPr sz="1600" b="1">
+                <a:solidFill>
+                  <a:srgbClr val="333333"/>
+                </a:solidFill>
+              </a:rPr>
+              <a:t>◆ 主题 + 语音</a:t>
+            </a:r>
+          </a:p>
+          <a:p>
+            <a:pPr>
+              <a:spcAft>
+                <a:spcPts val="800"/>
+              </a:spcAft>
+            </a:pPr>
+            <a:r>
+              <a:rPr sz="1500">
+                <a:solidFill>
+                  <a:srgbClr val="333333"/>
+                </a:solidFill>
+              </a:rPr>
+              <a:t>  深/浅色 CSS 变量切换 + localStorage 记忆 + 首帧防闪烁；语音用 Web Speech API（Chrome/Edge），连续监听不漏字</a:t>
+            </a:r>
+          </a:p>
+        </p:txBody>
+      </p:sp>
+    </p:spTree>
+  </p:cSld>
+  <p:clrMapOvr>
+    <a:masterClrMapping/>
+  </p:clrMapOvr>
+</p:sld>
+</file>
+
+<file path=ppt/slides/slide22.xml><?xml version="1.0" encoding="utf-8"?>
+<p:sld xmlns:a="http://schemas.openxmlformats.org/drawingml/2006/main" xmlns:p="http://schemas.openxmlformats.org/presentationml/2006/main" xmlns:r="http://schemas.openxmlformats.org/officeDocument/2006/relationships">
+  <p:cSld>
+    <p:spTree>
+      <p:nvGrpSpPr>
+        <p:cNvPr id="1" name=""/>
+        <p:cNvGrpSpPr/>
+        <p:nvPr/>
+      </p:nvGrpSpPr>
+      <p:grpSpPr/>
+      <p:sp>
+        <p:nvSpPr>
+          <p:cNvPr id="2" name="Rectangle 1"/>
+          <p:cNvSpPr/>
+          <p:nvPr/>
+        </p:nvSpPr>
+        <p:spPr>
+          <a:xfrm>
+            <a:off x="0" y="6711696"/>
+            <a:ext cx="12191365" cy="146304"/>
+          </a:xfrm>
+          <a:prstGeom prst="rect">
+            <a:avLst/>
+          </a:prstGeom>
+          <a:solidFill>
+            <a:srgbClr val="EEF2F6"/>
+          </a:solidFill>
+          <a:ln>
+            <a:noFill/>
+          </a:ln>
+        </p:spPr>
+        <p:style>
+          <a:lnRef idx="1">
+            <a:schemeClr val="accent1"/>
+          </a:lnRef>
+          <a:fillRef idx="3">
+            <a:schemeClr val="accent1"/>
+          </a:fillRef>
+          <a:effectRef idx="2">
+            <a:schemeClr val="accent1"/>
+          </a:effectRef>
+          <a:fontRef idx="minor">
+            <a:schemeClr val="lt1"/>
+          </a:fontRef>
+        </p:style>
+        <p:txBody>
+          <a:bodyPr rtlCol="0" anchor="ctr"/>
+          <a:lstStyle/>
+          <a:p>
+            <a:pPr algn="ctr"/>
+          </a:p>
+        </p:txBody>
+      </p:sp>
+      <p:sp>
+        <p:nvSpPr>
+          <p:cNvPr id="3" name="TextBox 2"/>
+          <p:cNvSpPr txBox="1"/>
+          <p:nvPr/>
+        </p:nvSpPr>
+        <p:spPr>
+          <a:xfrm>
+            <a:off x="548640" y="320040"/>
+            <a:ext cx="11094085" cy="650000"/>
+          </a:xfrm>
+          <a:prstGeom prst="rect">
+            <a:avLst/>
+          </a:prstGeom>
+          <a:noFill/>
+        </p:spPr>
+        <p:txBody>
+          <a:bodyPr wrap="square">
+            <a:spAutoFit/>
+          </a:bodyPr>
+          <a:lstStyle/>
+          <a:p>
+            <a:r>
+              <a:rPr sz="3000" b="1">
+                <a:solidFill>
+                  <a:srgbClr val="1F3A5F"/>
+                </a:solidFill>
+              </a:rPr>
+              <a:t>授权档位 + 四层安全（base/advanced/full + 沙箱）</a:t>
+            </a:r>
+          </a:p>
+        </p:txBody>
+      </p:sp>
+      <p:sp>
+        <p:nvSpPr>
+          <p:cNvPr id="4" name="Rectangle 3"/>
+          <p:cNvSpPr/>
+          <p:nvPr/>
+        </p:nvSpPr>
+        <p:spPr>
+          <a:xfrm>
+            <a:off x="548640" y="990600"/>
+            <a:ext cx="11094085" cy="27432"/>
+          </a:xfrm>
+          <a:prstGeom prst="rect">
+            <a:avLst/>
+          </a:prstGeom>
+          <a:solidFill>
+            <a:srgbClr val="E8743A"/>
+          </a:solidFill>
+          <a:ln>
+            <a:noFill/>
+          </a:ln>
+        </p:spPr>
+        <p:style>
+          <a:lnRef idx="1">
+            <a:schemeClr val="accent1"/>
+          </a:lnRef>
+          <a:fillRef idx="3">
+            <a:schemeClr val="accent1"/>
+          </a:fillRef>
+          <a:effectRef idx="2">
+            <a:schemeClr val="accent1"/>
+          </a:effectRef>
+          <a:fontRef idx="minor">
+            <a:schemeClr val="lt1"/>
+          </a:fontRef>
+        </p:style>
+        <p:txBody>
+          <a:bodyPr rtlCol="0" anchor="ctr"/>
+          <a:lstStyle/>
+          <a:p>
+            <a:pPr algn="ctr"/>
+          </a:p>
+        </p:txBody>
+      </p:sp>
+      <p:sp>
+        <p:nvSpPr>
+          <p:cNvPr id="5" name="TextBox 4"/>
+          <p:cNvSpPr txBox="1"/>
+          <p:nvPr/>
+        </p:nvSpPr>
+        <p:spPr>
+          <a:xfrm>
+            <a:off x="640080" y="1371600"/>
+            <a:ext cx="10911205" cy="5029200"/>
+          </a:xfrm>
+          <a:prstGeom prst="rect">
+            <a:avLst/>
+          </a:prstGeom>
+          <a:noFill/>
+        </p:spPr>
+        <p:txBody>
+          <a:bodyPr wrap="square">
+            <a:spAutoFit/>
+          </a:bodyPr>
+          <a:lstStyle/>
+          <a:p>
+            <a:pPr>
+              <a:spcAft>
+                <a:spcPts val="800"/>
+              </a:spcAft>
+            </a:pPr>
+            <a:r>
+              <a:rPr sz="1600" b="1">
+                <a:solidFill>
+                  <a:srgbClr val="333333"/>
+                </a:solidFill>
+              </a:rPr>
+              <a:t>◆ 统一安全模型</a:t>
+            </a:r>
+          </a:p>
+          <a:p>
+            <a:pPr>
+              <a:spcAft>
+                <a:spcPts val="800"/>
+              </a:spcAft>
+            </a:pPr>
+            <a:r>
+              <a:rPr sz="1500">
+                <a:solidFill>
+                  <a:srgbClr val="333333"/>
+                </a:solidFill>
+              </a:rPr>
+              <a:t>  网络安全总开关 web_search（开/关一切联网能力）+ 三档授权 agent.authorization</a:t>
+            </a:r>
+          </a:p>
+          <a:p>
+            <a:pPr>
+              <a:spcAft>
+                <a:spcPts val="800"/>
+              </a:spcAft>
+            </a:pPr>
+            <a:r>
+              <a:rPr sz="1600" b="1">
+                <a:solidFill>
+                  <a:srgbClr val="333333"/>
+                </a:solidFill>
+              </a:rPr>
+              <a:t>◆ 三档授权</a:t>
+            </a:r>
+          </a:p>
+          <a:p>
+            <a:pPr>
+              <a:spcAft>
+                <a:spcPts val="800"/>
+              </a:spcAft>
+            </a:pPr>
+            <a:r>
+              <a:rPr sz="1500">
+                <a:solidFill>
+                  <a:srgbClr val="333333"/>
+                </a:solidFill>
+              </a:rPr>
+              <a:t>  base 基础授权：全部高危操作需确认；advanced 高级授权：仅永久删除文件需确认；full 全自动：从不确认(含删除)</a:t>
+            </a:r>
+          </a:p>
+          <a:p>
+            <a:pPr>
+              <a:spcAft>
+                <a:spcPts val="800"/>
+              </a:spcAft>
+            </a:pPr>
+            <a:r>
+              <a:rPr sz="1500">
+                <a:solidFill>
+                  <a:srgbClr val="333333"/>
+                </a:solidFill>
+              </a:rPr>
+              <a:t>  Web 顶栏下拉可运行时切换</a:t>
+            </a:r>
+          </a:p>
+          <a:p>
+            <a:pPr>
+              <a:spcAft>
+                <a:spcPts val="800"/>
+              </a:spcAft>
+            </a:pPr>
+            <a:r>
+              <a:rPr sz="1600" b="1">
+                <a:solidFill>
+                  <a:srgbClr val="333333"/>
+                </a:solidFill>
+              </a:rPr>
+              <a:t>◆ 危险指令硬拦截（SafetySandbox 接入执行链）</a:t>
+            </a:r>
+          </a:p>
+          <a:p>
+            <a:pPr>
+              <a:spcAft>
+                <a:spcPts val="800"/>
+              </a:spcAft>
+            </a:pPr>
+            <a:r>
+              <a:rPr sz="1500">
+                <a:solidFill>
+                  <a:srgbClr val="333333"/>
+                </a:solidFill>
+              </a:rPr>
+              <a:t>  rm/format/shutdown/dd/mkfs/fdisk/Stop-Computer 等 → 绕过确认门直接拒绝</a:t>
+            </a:r>
+          </a:p>
+          <a:p>
+            <a:pPr>
+              <a:spcAft>
+                <a:spcPts val="800"/>
+              </a:spcAft>
+            </a:pPr>
+            <a:r>
+              <a:rPr sz="1500">
+                <a:solidFill>
+                  <a:srgbClr val="333333"/>
+                </a:solidFill>
+              </a:rPr>
+              <a:t>  实测：shutdown 不再弹确认窗即被拦截；正常操作不受影响（552 测试全绿）</a:t>
+            </a:r>
+          </a:p>
+        </p:txBody>
+      </p:sp>
+    </p:spTree>
+  </p:cSld>
+  <p:clrMapOvr>
+    <a:masterClrMapping/>
+  </p:clrMapOvr>
+</p:sld>
+</file>
+
+<file path=ppt/slides/slide23.xml><?xml version="1.0" encoding="utf-8"?>
+<p:sld xmlns:a="http://schemas.openxmlformats.org/drawingml/2006/main" xmlns:p="http://schemas.openxmlformats.org/presentationml/2006/main" xmlns:r="http://schemas.openxmlformats.org/officeDocument/2006/relationships">
+  <p:cSld>
+    <p:spTree>
+      <p:nvGrpSpPr>
+        <p:cNvPr id="1" name=""/>
+        <p:cNvGrpSpPr/>
+        <p:nvPr/>
+      </p:nvGrpSpPr>
+      <p:grpSpPr/>
+      <p:sp>
+        <p:nvSpPr>
+          <p:cNvPr id="2" name="Rectangle 1"/>
+          <p:cNvSpPr/>
+          <p:nvPr/>
+        </p:nvSpPr>
+        <p:spPr>
+          <a:xfrm>
+            <a:off x="0" y="6711696"/>
+            <a:ext cx="12191365" cy="146304"/>
+          </a:xfrm>
+          <a:prstGeom prst="rect">
+            <a:avLst/>
+          </a:prstGeom>
+          <a:solidFill>
+            <a:srgbClr val="EEF2F6"/>
+          </a:solidFill>
+          <a:ln>
+            <a:noFill/>
+          </a:ln>
+        </p:spPr>
+        <p:style>
+          <a:lnRef idx="1">
+            <a:schemeClr val="accent1"/>
+          </a:lnRef>
+          <a:fillRef idx="3">
+            <a:schemeClr val="accent1"/>
+          </a:fillRef>
+          <a:effectRef idx="2">
+            <a:schemeClr val="accent1"/>
+          </a:effectRef>
+          <a:fontRef idx="minor">
+            <a:schemeClr val="lt1"/>
+          </a:fontRef>
+        </p:style>
+        <p:txBody>
+          <a:bodyPr rtlCol="0" anchor="ctr"/>
+          <a:lstStyle/>
+          <a:p>
+            <a:pPr algn="ctr"/>
+          </a:p>
+        </p:txBody>
+      </p:sp>
+      <p:sp>
+        <p:nvSpPr>
+          <p:cNvPr id="3" name="TextBox 2"/>
+          <p:cNvSpPr txBox="1"/>
+          <p:nvPr/>
+        </p:nvSpPr>
+        <p:spPr>
+          <a:xfrm>
+            <a:off x="548640" y="320040"/>
+            <a:ext cx="11094085" cy="650000"/>
+          </a:xfrm>
+          <a:prstGeom prst="rect">
+            <a:avLst/>
+          </a:prstGeom>
+          <a:noFill/>
+        </p:spPr>
+        <p:txBody>
+          <a:bodyPr wrap="square">
+            <a:spAutoFit/>
+          </a:bodyPr>
+          <a:lstStyle/>
+          <a:p>
+            <a:r>
+              <a:rPr sz="3000" b="1">
+                <a:solidFill>
+                  <a:srgbClr val="1F3A5F"/>
+                </a:solidFill>
+              </a:rPr>
+              <a:t>可移植性与密钥安全（Windows/Linux 双平台）</a:t>
+            </a:r>
+          </a:p>
+        </p:txBody>
+      </p:sp>
+      <p:sp>
+        <p:nvSpPr>
+          <p:cNvPr id="4" name="Rectangle 3"/>
+          <p:cNvSpPr/>
+          <p:nvPr/>
+        </p:nvSpPr>
+        <p:spPr>
+          <a:xfrm>
+            <a:off x="548640" y="990600"/>
+            <a:ext cx="11094085" cy="27432"/>
+          </a:xfrm>
+          <a:prstGeom prst="rect">
+            <a:avLst/>
+          </a:prstGeom>
+          <a:solidFill>
+            <a:srgbClr val="E8743A"/>
+          </a:solidFill>
+          <a:ln>
+            <a:noFill/>
+          </a:ln>
+        </p:spPr>
+        <p:style>
+          <a:lnRef idx="1">
+            <a:schemeClr val="accent1"/>
+          </a:lnRef>
+          <a:fillRef idx="3">
+            <a:schemeClr val="accent1"/>
+          </a:fillRef>
+          <a:effectRef idx="2">
+            <a:schemeClr val="accent1"/>
+          </a:effectRef>
+          <a:fontRef idx="minor">
+            <a:schemeClr val="lt1"/>
+          </a:fontRef>
+        </p:style>
+        <p:txBody>
+          <a:bodyPr rtlCol="0" anchor="ctr"/>
+          <a:lstStyle/>
+          <a:p>
+            <a:pPr algn="ctr"/>
+          </a:p>
+        </p:txBody>
+      </p:sp>
+      <p:sp>
+        <p:nvSpPr>
+          <p:cNvPr id="5" name="TextBox 4"/>
+          <p:cNvSpPr txBox="1"/>
+          <p:nvPr/>
+        </p:nvSpPr>
+        <p:spPr>
+          <a:xfrm>
+            <a:off x="640080" y="1371600"/>
+            <a:ext cx="10911205" cy="5029200"/>
+          </a:xfrm>
+          <a:prstGeom prst="rect">
+            <a:avLst/>
+          </a:prstGeom>
+          <a:noFill/>
+        </p:spPr>
+        <p:txBody>
+          <a:bodyPr wrap="square">
+            <a:spAutoFit/>
+          </a:bodyPr>
+          <a:lstStyle/>
+          <a:p>
+            <a:pPr>
+              <a:spcAft>
+                <a:spcPts val="800"/>
+              </a:spcAft>
+            </a:pPr>
+            <a:r>
+              <a:rPr sz="1600" b="1">
+                <a:solidFill>
+                  <a:srgbClr val="333333"/>
+                </a:solidFill>
+              </a:rPr>
+              <a:t>◆ 双平台同一套代码</a:t>
+            </a:r>
+          </a:p>
+          <a:p>
+            <a:pPr>
+              <a:spcAft>
+                <a:spcPts val="800"/>
+              </a:spcAft>
+            </a:pPr>
+            <a:r>
+              <a:rPr sz="1500">
+                <a:solidFill>
+                  <a:srgbClr val="333333"/>
+                </a:solidFill>
+              </a:rPr>
+              <a:t>  相对路径 + pathlib + platform.system() 自动适配；app_controller 分 Windows/Linux；browser_controller 走跨平台 CDP</a:t>
+            </a:r>
+          </a:p>
+          <a:p>
+            <a:pPr>
+              <a:spcAft>
+                <a:spcPts val="800"/>
+              </a:spcAft>
+            </a:pPr>
+            <a:r>
+              <a:rPr sz="1600" b="1">
+                <a:solidFill>
+                  <a:srgbClr val="333333"/>
+                </a:solidFill>
+              </a:rPr>
+              <a:t>◆ 密钥不入库</a:t>
+            </a:r>
+          </a:p>
+          <a:p>
+            <a:pPr>
+              <a:spcAft>
+                <a:spcPts val="800"/>
+              </a:spcAft>
+            </a:pPr>
+            <a:r>
+              <a:rPr sz="1500">
+                <a:solidFill>
+                  <a:srgbClr val="333333"/>
+                </a:solidFill>
+              </a:rPr>
+              <a:t>  config.yaml（含真实 key/授权码）git skip-worktree 保护不入库；分发只带 config.yaml.example 空模板</a:t>
+            </a:r>
+          </a:p>
+          <a:p>
+            <a:pPr>
+              <a:spcAft>
+                <a:spcPts val="800"/>
+              </a:spcAft>
+            </a:pPr>
+            <a:r>
+              <a:rPr sz="1500">
+                <a:solidFill>
+                  <a:srgbClr val="333333"/>
+                </a:solidFill>
+              </a:rPr>
+              <a:t>  Ubuntu 一键：setup_linux.sh 装依赖 + 生成配置 + 检测 Xorg/Wayland</a:t>
+            </a:r>
+          </a:p>
+          <a:p>
+            <a:pPr>
+              <a:spcAft>
+                <a:spcPts val="800"/>
+              </a:spcAft>
+            </a:pPr>
+            <a:r>
+              <a:rPr sz="1600" b="1">
+                <a:solidFill>
+                  <a:srgbClr val="333333"/>
+                </a:solidFill>
+              </a:rPr>
+              <a:t>◆ 资源效率</a:t>
+            </a:r>
+          </a:p>
+          <a:p>
+            <a:pPr>
+              <a:spcAft>
+                <a:spcPts val="800"/>
+              </a:spcAft>
+            </a:pPr>
+            <a:r>
+              <a:rPr sz="1500">
+                <a:solidFill>
+                  <a:srgbClr val="333333"/>
+                </a:solidFill>
+              </a:rPr>
+              <a:t>  工具结果超长截断(默认4000字符) + HTTP 连接池(省 TCP/TLS 握手) + 历史会话侧栏(最近访问排序)</a:t>
+            </a:r>
+          </a:p>
+        </p:txBody>
+      </p:sp>
+    </p:spTree>
+  </p:cSld>
+  <p:clrMapOvr>
+    <a:masterClrMapping/>
+  </p:clrMapOvr>
+</p:sld>
+</file>
+
 <file path=ppt/slides/slide3.xml><?xml version="1.0" encoding="utf-8"?>
 <p:sld xmlns:a="http://schemas.openxmlformats.org/drawingml/2006/main" xmlns:r="http://schemas.openxmlformats.org/officeDocument/2006/relationships" xmlns:p="http://schemas.openxmlformats.org/presentationml/2006/main">
   <p:cSld>
@@ -15165,6 +16540,7 @@
               </a:defRPr>
             </a:pPr>
             <a:r>
+              <a:rPr/>
               <a:t>模块设计：ToolRegistry（59 个系统工具）</a:t>
             </a:r>
           </a:p>

--- a/docs/第4组汇报PPT.pptx
+++ b/docs/第4组汇报PPT.pptx
@@ -22,12 +22,14 @@
     <p:sldId id="269" r:id="rId17"/>
     <p:sldId id="270" r:id="rId18"/>
     <p:sldId id="271" r:id="rId19"/>
-    <p:sldId id="273" r:id="rId20"/>
-    <p:sldId id="274" r:id="rId24"/>
-    <p:sldId id="275" r:id="rId25"/>
-    <p:sldId id="276" r:id="rId26"/>
-    <p:sldId id="277" r:id="rId27"/>
-    <p:sldId id="278" r:id="rId28"/>
+    <p:sldId id="279" r:id="rId20"/>
+    <p:sldId id="281" r:id="rId21"/>
+    <p:sldId id="274" r:id="rId22"/>
+    <p:sldId id="275" r:id="rId23"/>
+    <p:sldId id="276" r:id="rId24"/>
+    <p:sldId id="277" r:id="rId25"/>
+    <p:sldId id="278" r:id="rId26"/>
+    <p:sldId id="273" r:id="rId27"/>
   </p:sldIdLst>
   <p:sldSz cx="12191365" cy="6858000" type="screen4x3"/>
   <p:notesSz cx="6858000" cy="9144000"/>
@@ -129,7 +131,7 @@
   <p:extLst>
     <p:ext uri="{EFAFB233-063F-42B5-8137-9DF3F51BA10A}">
       <p15:sldGuideLst xmlns:p15="http://schemas.microsoft.com/office/powerpoint/2012/main">
-        <p15:guide id="1" orient="horz" pos="2160" userDrawn="1">
+        <p15:guide id="1" orient="horz" pos="2120" userDrawn="1">
           <p15:clr>
             <a:srgbClr val="A4A3A4"/>
           </p15:clr>
@@ -3359,7 +3361,7 @@
               </a:defRPr>
             </a:pPr>
             <a:r>
-              <a:t>ToolRegistry + SkillLibrary ｜ 59 工具 + 26 技能 + 552 测试全绿</a:t>
+              <a:t>ToolRegistry + SkillLibrary ｜ 59 工具 + 26 技能 + 558 测试全绿</a:t>
             </a:r>
           </a:p>
         </p:txBody>
@@ -3495,7 +3497,7 @@
         <p:spPr>
           <a:xfrm>
             <a:off x="548640" y="320040"/>
-            <a:ext cx="9144000" cy="640080"/>
+            <a:ext cx="9144000" cy="553085"/>
           </a:xfrm>
           <a:prstGeom prst="rect">
             <a:avLst/>
@@ -3520,7 +3522,25 @@
               </a:defRPr>
             </a:pPr>
             <a:r>
-              <a:t>安全、审计与 RAG 协同（第 5 组）</a:t>
+              <a:rPr lang="en-US"/>
+              <a:t>07 </a:t>
+            </a:r>
+            <a:r>
+              <a:t>安全、审计与 RAG 协同（</a:t>
+            </a:r>
+            <a:r>
+              <a:rPr lang="zh-CN"/>
+              <a:t>完成</a:t>
+            </a:r>
+            <a:r>
+              <a:t>第 5 组</a:t>
+            </a:r>
+            <a:r>
+              <a:rPr lang="zh-CN"/>
+              <a:t>任务</a:t>
+            </a:r>
+            <a:r>
+              <a:t>）</a:t>
             </a:r>
           </a:p>
         </p:txBody>
@@ -3896,7 +3916,7 @@
         <p:spPr>
           <a:xfrm>
             <a:off x="548640" y="320040"/>
-            <a:ext cx="9144000" cy="640080"/>
+            <a:ext cx="9144000" cy="553085"/>
           </a:xfrm>
           <a:prstGeom prst="rect">
             <a:avLst/>
@@ -3920,6 +3940,10 @@
                 <a:latin typeface="微软雅黑" panose="020B0503020204020204" charset="-122"/>
               </a:defRPr>
             </a:pPr>
+            <a:r>
+              <a:rPr lang="en-US"/>
+              <a:t>08 </a:t>
+            </a:r>
             <a:r>
               <a:t>Mock 与跨组联调</a:t>
             </a:r>
@@ -4052,7 +4076,7 @@
                 </a:solidFill>
                 <a:latin typeface="微软雅黑" panose="020B0503020204020204" charset="-122"/>
               </a:rPr>
-              <a:t>  57 个工具与正式版同名/同参/同返回，内存实现不改磁盘，安全可复现</a:t>
+              <a:t>  59 个工具与正式版同名/同参/同返回，内存实现不改磁盘，安全可复现</a:t>
             </a:r>
             <a:endParaRPr sz="1800">
               <a:solidFill>
@@ -4297,7 +4321,7 @@
         <p:spPr>
           <a:xfrm>
             <a:off x="548640" y="320040"/>
-            <a:ext cx="9144000" cy="640080"/>
+            <a:ext cx="9144000" cy="553085"/>
           </a:xfrm>
           <a:prstGeom prst="rect">
             <a:avLst/>
@@ -4322,6 +4346,10 @@
               </a:defRPr>
             </a:pPr>
             <a:r>
+              <a:rPr lang="en-US"/>
+              <a:t>09 </a:t>
+            </a:r>
+            <a:r>
               <a:t>单元测试与质量保障</a:t>
             </a:r>
           </a:p>
@@ -4361,7 +4389,7 @@
               </a:defRPr>
             </a:pPr>
             <a:r>
-              <a:t>552 项测试全绿</a:t>
+              <a:t>558 项测试全绿</a:t>
             </a:r>
           </a:p>
         </p:txBody>
@@ -4488,7 +4516,7 @@
               </a:defRPr>
             </a:pPr>
             <a:r>
-              <a:t>552</a:t>
+              <a:t>558</a:t>
             </a:r>
           </a:p>
         </p:txBody>
@@ -4536,7 +4564,11 @@
         <p:nvSpPr>
           <p:cNvPr id="9" name="Rectangle 8"/>
           <p:cNvSpPr/>
-          <p:nvPr/>
+          <p:nvPr>
+            <p:custDataLst>
+              <p:tags r:id="rId1"/>
+            </p:custDataLst>
+          </p:nvPr>
         </p:nvSpPr>
         <p:spPr>
           <a:xfrm>
@@ -4580,7 +4612,11 @@
         <p:nvSpPr>
           <p:cNvPr id="10" name="TextBox 9"/>
           <p:cNvSpPr txBox="1"/>
-          <p:nvPr/>
+          <p:nvPr>
+            <p:custDataLst>
+              <p:tags r:id="rId2"/>
+            </p:custDataLst>
+          </p:nvPr>
         </p:nvSpPr>
         <p:spPr>
           <a:xfrm>
@@ -4610,7 +4646,7 @@
               </a:defRPr>
             </a:pPr>
             <a:r>
-              <a:t>17</a:t>
+              <a:t>23</a:t>
             </a:r>
           </a:p>
         </p:txBody>
@@ -4619,7 +4655,11 @@
         <p:nvSpPr>
           <p:cNvPr id="11" name="TextBox 10"/>
           <p:cNvSpPr txBox="1"/>
-          <p:nvPr/>
+          <p:nvPr>
+            <p:custDataLst>
+              <p:tags r:id="rId3"/>
+            </p:custDataLst>
+          </p:nvPr>
         </p:nvSpPr>
         <p:spPr>
           <a:xfrm>
@@ -4658,7 +4698,11 @@
         <p:nvSpPr>
           <p:cNvPr id="12" name="Rectangle 11"/>
           <p:cNvSpPr/>
-          <p:nvPr/>
+          <p:nvPr>
+            <p:custDataLst>
+              <p:tags r:id="rId4"/>
+            </p:custDataLst>
+          </p:nvPr>
         </p:nvSpPr>
         <p:spPr>
           <a:xfrm>
@@ -4702,7 +4746,11 @@
         <p:nvSpPr>
           <p:cNvPr id="13" name="TextBox 12"/>
           <p:cNvSpPr txBox="1"/>
-          <p:nvPr/>
+          <p:nvPr>
+            <p:custDataLst>
+              <p:tags r:id="rId5"/>
+            </p:custDataLst>
+          </p:nvPr>
         </p:nvSpPr>
         <p:spPr>
           <a:xfrm>
@@ -4741,7 +4789,11 @@
         <p:nvSpPr>
           <p:cNvPr id="14" name="TextBox 13"/>
           <p:cNvSpPr txBox="1"/>
-          <p:nvPr/>
+          <p:nvPr>
+            <p:custDataLst>
+              <p:tags r:id="rId6"/>
+            </p:custDataLst>
+          </p:nvPr>
         </p:nvSpPr>
         <p:spPr>
           <a:xfrm>
@@ -4780,7 +4832,11 @@
         <p:nvSpPr>
           <p:cNvPr id="15" name="Rectangle 14"/>
           <p:cNvSpPr/>
-          <p:nvPr/>
+          <p:nvPr>
+            <p:custDataLst>
+              <p:tags r:id="rId7"/>
+            </p:custDataLst>
+          </p:nvPr>
         </p:nvSpPr>
         <p:spPr>
           <a:xfrm>
@@ -4824,7 +4880,11 @@
         <p:nvSpPr>
           <p:cNvPr id="16" name="TextBox 15"/>
           <p:cNvSpPr txBox="1"/>
-          <p:nvPr/>
+          <p:nvPr>
+            <p:custDataLst>
+              <p:tags r:id="rId8"/>
+            </p:custDataLst>
+          </p:nvPr>
         </p:nvSpPr>
         <p:spPr>
           <a:xfrm>
@@ -4863,7 +4923,11 @@
         <p:nvSpPr>
           <p:cNvPr id="17" name="TextBox 16"/>
           <p:cNvSpPr txBox="1"/>
-          <p:nvPr/>
+          <p:nvPr>
+            <p:custDataLst>
+              <p:tags r:id="rId9"/>
+            </p:custDataLst>
+          </p:nvPr>
         </p:nvSpPr>
         <p:spPr>
           <a:xfrm>
@@ -4902,7 +4966,11 @@
         <p:nvSpPr>
           <p:cNvPr id="18" name="Rectangle 17"/>
           <p:cNvSpPr/>
-          <p:nvPr/>
+          <p:nvPr>
+            <p:custDataLst>
+              <p:tags r:id="rId10"/>
+            </p:custDataLst>
+          </p:nvPr>
         </p:nvSpPr>
         <p:spPr>
           <a:xfrm>
@@ -4946,7 +5014,11 @@
         <p:nvSpPr>
           <p:cNvPr id="19" name="TextBox 18"/>
           <p:cNvSpPr txBox="1"/>
-          <p:nvPr/>
+          <p:nvPr>
+            <p:custDataLst>
+              <p:tags r:id="rId11"/>
+            </p:custDataLst>
+          </p:nvPr>
         </p:nvSpPr>
         <p:spPr>
           <a:xfrm>
@@ -4976,7 +5048,7 @@
               </a:defRPr>
             </a:pPr>
             <a:r>
-              <a:t>57</a:t>
+              <a:t>59</a:t>
             </a:r>
           </a:p>
         </p:txBody>
@@ -4985,7 +5057,11 @@
         <p:nvSpPr>
           <p:cNvPr id="20" name="TextBox 19"/>
           <p:cNvSpPr txBox="1"/>
-          <p:nvPr/>
+          <p:nvPr>
+            <p:custDataLst>
+              <p:tags r:id="rId12"/>
+            </p:custDataLst>
+          </p:nvPr>
         </p:nvSpPr>
         <p:spPr>
           <a:xfrm>
@@ -5264,7 +5340,7 @@
         <p:spPr>
           <a:xfrm>
             <a:off x="548640" y="320040"/>
-            <a:ext cx="9144000" cy="640080"/>
+            <a:ext cx="9144000" cy="553085"/>
           </a:xfrm>
           <a:prstGeom prst="rect">
             <a:avLst/>
@@ -5288,6 +5364,10 @@
                 <a:latin typeface="微软雅黑" panose="020B0503020204020204" charset="-122"/>
               </a:defRPr>
             </a:pPr>
+            <a:r>
+              <a:rPr lang="en-US"/>
+              <a:t>10 </a:t>
+            </a:r>
             <a:r>
               <a:t>端到端演示：整理下载目录（场景 6）</a:t>
             </a:r>
@@ -6300,45 +6380,6 @@
             </a:pPr>
             <a:r>
               <a:t>审计 + RAG 存储</a:t>
-            </a:r>
-          </a:p>
-        </p:txBody>
-      </p:sp>
-      <p:sp>
-        <p:nvSpPr>
-          <p:cNvPr id="29" name="TextBox 28"/>
-          <p:cNvSpPr txBox="1"/>
-          <p:nvPr/>
-        </p:nvSpPr>
-        <p:spPr>
-          <a:xfrm>
-            <a:off x="12115800" y="1920240"/>
-            <a:ext cx="365760" cy="365760"/>
-          </a:xfrm>
-          <a:prstGeom prst="rect">
-            <a:avLst/>
-          </a:prstGeom>
-          <a:noFill/>
-        </p:spPr>
-        <p:txBody>
-          <a:bodyPr wrap="square" anchor="t">
-            <a:spAutoFit/>
-          </a:bodyPr>
-          <a:lstStyle/>
-          <a:p>
-            <a:pPr algn="ctr">
-              <a:spcAft>
-                <a:spcPts val="400"/>
-              </a:spcAft>
-              <a:defRPr sz="1800" b="0">
-                <a:solidFill>
-                  <a:srgbClr val="8B5CF6"/>
-                </a:solidFill>
-                <a:latin typeface="微软雅黑" panose="020B0503020204020204" charset="-122"/>
-              </a:defRPr>
-            </a:pPr>
-            <a:r>
-              <a:t>→</a:t>
             </a:r>
           </a:p>
         </p:txBody>
@@ -8555,7 +8596,7 @@
               </a:defRPr>
             </a:pPr>
             <a:r>
-              <a:t>552</a:t>
+              <a:t>558</a:t>
             </a:r>
           </a:p>
         </p:txBody>
@@ -8873,7 +8914,7 @@
                 </a:solidFill>
                 <a:latin typeface="微软雅黑" panose="020B0503020204020204" charset="-122"/>
               </a:rPr>
-              <a:t>  11 条 ADR 决策记录 + 全注释 + 552 测试，代码质量可追溯</a:t>
+              <a:t>  11 条 ADR 决策记录 + 全注释 + 558 测试，代码质量可追溯</a:t>
             </a:r>
             <a:endParaRPr sz="1700">
               <a:solidFill>
@@ -9973,46 +10014,7 @@
       </p:sp>
       <p:sp>
         <p:nvSpPr>
-          <p:cNvPr id="3" name="TextBox 2"/>
-          <p:cNvSpPr txBox="1"/>
-          <p:nvPr/>
-        </p:nvSpPr>
-        <p:spPr>
-          <a:xfrm>
-            <a:off x="548640" y="320040"/>
-            <a:ext cx="9144000" cy="640080"/>
-          </a:xfrm>
-          <a:prstGeom prst="rect">
-            <a:avLst/>
-          </a:prstGeom>
-          <a:noFill/>
-        </p:spPr>
-        <p:txBody>
-          <a:bodyPr wrap="square" anchor="t">
-            <a:spAutoFit/>
-          </a:bodyPr>
-          <a:lstStyle/>
-          <a:p>
-            <a:pPr algn="l">
-              <a:spcAft>
-                <a:spcPts val="400"/>
-              </a:spcAft>
-              <a:defRPr sz="3000" b="1">
-                <a:solidFill>
-                  <a:srgbClr val="1E293B"/>
-                </a:solidFill>
-                <a:latin typeface="微软雅黑" panose="020B0503020204020204" charset="-122"/>
-              </a:defRPr>
-            </a:pPr>
-            <a:r>
-              <a:t>总结与展望</a:t>
-            </a:r>
-          </a:p>
-        </p:txBody>
-      </p:sp>
-      <p:sp>
-        <p:nvSpPr>
-          <p:cNvPr id="4" name="Rectangle 3"/>
+          <p:cNvPr id="5" name="Rectangle 4"/>
           <p:cNvSpPr/>
           <p:nvPr/>
         </p:nvSpPr>
@@ -10056,192 +10058,14 @@
       </p:sp>
       <p:sp>
         <p:nvSpPr>
-          <p:cNvPr id="5" name="TextBox 4"/>
+          <p:cNvPr id="7" name="TextBox 6"/>
           <p:cNvSpPr txBox="1"/>
           <p:nvPr/>
         </p:nvSpPr>
         <p:spPr>
           <a:xfrm>
-            <a:off x="640080" y="1668145"/>
-            <a:ext cx="10881360" cy="2040255"/>
-          </a:xfrm>
-          <a:prstGeom prst="rect">
-            <a:avLst/>
-          </a:prstGeom>
-          <a:noFill/>
-        </p:spPr>
-        <p:txBody>
-          <a:bodyPr wrap="square">
-            <a:spAutoFit/>
-          </a:bodyPr>
-          <a:lstStyle/>
-          <a:p>
-            <a:pPr>
-              <a:spcAft>
-                <a:spcPts val="800"/>
-              </a:spcAft>
-            </a:pPr>
-            <a:r>
-              <a:rPr sz="2000" b="1">
-                <a:solidFill>
-                  <a:srgbClr val="8B5CF6"/>
-                </a:solidFill>
-                <a:latin typeface="微软雅黑" panose="020B0503020204020204" charset="-122"/>
-              </a:rPr>
-              <a:t>▍已达成</a:t>
-            </a:r>
-            <a:r>
-              <a:rPr sz="2000">
-                <a:solidFill>
-                  <a:srgbClr val="1E293B"/>
-                </a:solidFill>
-                <a:latin typeface="微软雅黑" panose="020B0503020204020204" charset="-122"/>
-              </a:rPr>
-              <a:t>  59 工具 + 26 技能 + 552 测试全绿 + 6 演示场景全覆盖 + 真机 LLM 联调</a:t>
-            </a:r>
-            <a:endParaRPr sz="2000">
-              <a:solidFill>
-                <a:srgbClr val="1E293B"/>
-              </a:solidFill>
-              <a:latin typeface="微软雅黑" panose="020B0503020204020204" charset="-122"/>
-            </a:endParaRPr>
-          </a:p>
-          <a:p>
-            <a:pPr>
-              <a:spcAft>
-                <a:spcPts val="800"/>
-              </a:spcAft>
-            </a:pPr>
-            <a:r>
-              <a:rPr sz="2000" b="1">
-                <a:solidFill>
-                  <a:srgbClr val="8B5CF6"/>
-                </a:solidFill>
-                <a:latin typeface="微软雅黑" panose="020B0503020204020204" charset="-122"/>
-              </a:rPr>
-              <a:t>▍架构沉淀</a:t>
-            </a:r>
-            <a:r>
-              <a:rPr sz="2000">
-                <a:solidFill>
-                  <a:srgbClr val="1E293B"/>
-                </a:solidFill>
-                <a:latin typeface="微软雅黑" panose="020B0503020204020204" charset="-122"/>
-              </a:rPr>
-              <a:t>  工具层作为「决策-能力」适配面，统一契约 tool_result_json 贯穿 5 组</a:t>
-            </a:r>
-            <a:endParaRPr sz="2000">
-              <a:solidFill>
-                <a:srgbClr val="1E293B"/>
-              </a:solidFill>
-              <a:latin typeface="微软雅黑" panose="020B0503020204020204" charset="-122"/>
-            </a:endParaRPr>
-          </a:p>
-          <a:p>
-            <a:pPr>
-              <a:spcAft>
-                <a:spcPts val="800"/>
-              </a:spcAft>
-            </a:pPr>
-            <a:r>
-              <a:rPr sz="2000" b="1">
-                <a:solidFill>
-                  <a:srgbClr val="8B5CF6"/>
-                </a:solidFill>
-                <a:latin typeface="微软雅黑" panose="020B0503020204020204" charset="-122"/>
-              </a:rPr>
-              <a:t>▍展望 1</a:t>
-            </a:r>
-            <a:r>
-              <a:rPr sz="2000">
-                <a:solidFill>
-                  <a:srgbClr val="1E293B"/>
-                </a:solidFill>
-                <a:latin typeface="微软雅黑" panose="020B0503020204020204" charset="-122"/>
-              </a:rPr>
-              <a:t>  接入 MCP 服务端，让工具层可被任意 MCP 客户端复用</a:t>
-            </a:r>
-            <a:endParaRPr sz="2000">
-              <a:solidFill>
-                <a:srgbClr val="1E293B"/>
-              </a:solidFill>
-              <a:latin typeface="微软雅黑" panose="020B0503020204020204" charset="-122"/>
-            </a:endParaRPr>
-          </a:p>
-          <a:p>
-            <a:pPr>
-              <a:spcAft>
-                <a:spcPts val="800"/>
-              </a:spcAft>
-            </a:pPr>
-            <a:r>
-              <a:rPr sz="2000" b="1">
-                <a:solidFill>
-                  <a:srgbClr val="8B5CF6"/>
-                </a:solidFill>
-                <a:latin typeface="微软雅黑" panose="020B0503020204020204" charset="-122"/>
-              </a:rPr>
-              <a:t>▍展望 2</a:t>
-            </a:r>
-            <a:r>
-              <a:rPr sz="2000">
-                <a:solidFill>
-                  <a:srgbClr val="1E293B"/>
-                </a:solidFill>
-                <a:latin typeface="微软雅黑" panose="020B0503020204020204" charset="-122"/>
-              </a:rPr>
-              <a:t>  RAG 向量检索升级为 embedding 方案，提升轨迹召回精度</a:t>
-            </a:r>
-            <a:endParaRPr sz="2000">
-              <a:solidFill>
-                <a:srgbClr val="1E293B"/>
-              </a:solidFill>
-              <a:latin typeface="微软雅黑" panose="020B0503020204020204" charset="-122"/>
-            </a:endParaRPr>
-          </a:p>
-          <a:p>
-            <a:pPr>
-              <a:spcAft>
-                <a:spcPts val="800"/>
-              </a:spcAft>
-            </a:pPr>
-            <a:r>
-              <a:rPr sz="2000" b="1">
-                <a:solidFill>
-                  <a:srgbClr val="8B5CF6"/>
-                </a:solidFill>
-                <a:latin typeface="微软雅黑" panose="020B0503020204020204" charset="-122"/>
-              </a:rPr>
-              <a:t>▍展望 3</a:t>
-            </a:r>
-            <a:r>
-              <a:rPr sz="2000">
-                <a:solidFill>
-                  <a:srgbClr val="1E293B"/>
-                </a:solidFill>
-                <a:latin typeface="微软雅黑" panose="020B0503020204020204" charset="-122"/>
-              </a:rPr>
-              <a:t>  Linux 桌面自动化深度适配（AT-SPI 控件检测 + 工具层协同）</a:t>
-            </a:r>
-            <a:endParaRPr sz="2000">
-              <a:solidFill>
-                <a:srgbClr val="1E293B"/>
-              </a:solidFill>
-              <a:latin typeface="微软雅黑" panose="020B0503020204020204" charset="-122"/>
-            </a:endParaRPr>
-          </a:p>
-        </p:txBody>
-      </p:sp>
-      <p:sp>
-        <p:nvSpPr>
-          <p:cNvPr id="6" name="TextBox 5"/>
-          <p:cNvSpPr txBox="1"/>
-          <p:nvPr/>
-        </p:nvSpPr>
-        <p:spPr>
-          <a:xfrm>
-            <a:off x="640080" y="5303520"/>
-            <a:ext cx="10881360" cy="914400"/>
+            <a:off x="11247120" y="6446520"/>
+            <a:ext cx="822960" cy="274320"/>
           </a:xfrm>
           <a:prstGeom prst="rect">
             <a:avLst/>
@@ -10254,33 +10078,33 @@
           </a:bodyPr>
           <a:lstStyle/>
           <a:p>
-            <a:pPr algn="ctr">
-              <a:spcAft>
-                <a:spcPts val="400"/>
-              </a:spcAft>
-              <a:defRPr sz="2400" b="1">
-                <a:solidFill>
-                  <a:srgbClr val="8B5CF6"/>
-                </a:solidFill>
-                <a:latin typeface="微软雅黑" panose="020B0503020204020204" charset="-122"/>
-              </a:defRPr>
-            </a:pPr>
-            <a:r>
-              <a:t>谢谢观看 · 请各位老师同学指正</a:t>
-            </a:r>
-          </a:p>
-        </p:txBody>
-      </p:sp>
-      <p:sp>
-        <p:nvSpPr>
-          <p:cNvPr id="7" name="TextBox 6"/>
+            <a:pPr algn="r">
+              <a:spcAft>
+                <a:spcPts val="400"/>
+              </a:spcAft>
+              <a:defRPr sz="1100" b="0">
+                <a:solidFill>
+                  <a:srgbClr val="5A6474"/>
+                </a:solidFill>
+                <a:latin typeface="微软雅黑" panose="020B0503020204020204" charset="-122"/>
+              </a:defRPr>
+            </a:pPr>
+            <a:r>
+              <a:t>14</a:t>
+            </a:r>
+          </a:p>
+        </p:txBody>
+      </p:sp>
+      <p:sp>
+        <p:nvSpPr>
+          <p:cNvPr id="8" name="文本框 7"/>
           <p:cNvSpPr txBox="1"/>
           <p:nvPr/>
         </p:nvSpPr>
         <p:spPr>
           <a:xfrm>
-            <a:off x="11247120" y="6446520"/>
-            <a:ext cx="822960" cy="274320"/>
+            <a:off x="166370" y="627380"/>
+            <a:ext cx="6096000" cy="983615"/>
           </a:xfrm>
           <a:prstGeom prst="rect">
             <a:avLst/>
@@ -10288,25 +10112,100 @@
           <a:noFill/>
         </p:spPr>
         <p:txBody>
-          <a:bodyPr wrap="square" anchor="t">
+          <a:bodyPr wrap="square" rtlCol="0" anchor="t">
             <a:spAutoFit/>
           </a:bodyPr>
-          <a:lstStyle/>
-          <a:p>
-            <a:pPr algn="r">
-              <a:spcAft>
-                <a:spcPts val="400"/>
-              </a:spcAft>
-              <a:defRPr sz="1100" b="0">
-                <a:solidFill>
-                  <a:srgbClr val="5A6474"/>
-                </a:solidFill>
-                <a:latin typeface="微软雅黑" panose="020B0503020204020204" charset="-122"/>
-              </a:defRPr>
-            </a:pPr>
-            <a:r>
-              <a:t>18</a:t>
-            </a:r>
+          <a:p>
+            <a:r>
+              <a:rPr lang="en-US" altLang="zh-CN" sz="4000"/>
+              <a:t>11 </a:t>
+            </a:r>
+            <a:r>
+              <a:rPr lang="zh-CN" altLang="en-US" sz="4000"/>
+              <a:t>完整</a:t>
+            </a:r>
+            <a:r>
+              <a:rPr lang="en-US" altLang="zh-CN" sz="4000"/>
+              <a:t>AI</a:t>
+            </a:r>
+            <a:r>
+              <a:rPr lang="zh-CN" altLang="en-US" sz="4000"/>
+              <a:t>助手设计：</a:t>
+            </a:r>
+            <a:endParaRPr lang="zh-CN" altLang="en-US"/>
+          </a:p>
+          <a:p>
+            <a:endParaRPr lang="zh-CN" altLang="en-US"/>
+          </a:p>
+        </p:txBody>
+      </p:sp>
+      <p:sp>
+        <p:nvSpPr>
+          <p:cNvPr id="9" name="文本框 8"/>
+          <p:cNvSpPr txBox="1"/>
+          <p:nvPr/>
+        </p:nvSpPr>
+        <p:spPr>
+          <a:xfrm>
+            <a:off x="3977640" y="2141855"/>
+            <a:ext cx="6096000" cy="1568450"/>
+          </a:xfrm>
+          <a:prstGeom prst="rect">
+            <a:avLst/>
+          </a:prstGeom>
+          <a:noFill/>
+        </p:spPr>
+        <p:txBody>
+          <a:bodyPr wrap="square" rtlCol="0" anchor="t">
+            <a:spAutoFit/>
+          </a:bodyPr>
+          <a:p>
+            <a:r>
+              <a:rPr lang="en-US" altLang="zh-CN" sz="9600">
+                <a:sym typeface="+mn-ea"/>
+              </a:rPr>
+              <a:t>Miniyu</a:t>
+            </a:r>
+            <a:endParaRPr lang="en-US" altLang="zh-CN" sz="9600">
+              <a:sym typeface="+mn-ea"/>
+            </a:endParaRPr>
+          </a:p>
+        </p:txBody>
+      </p:sp>
+      <p:sp>
+        <p:nvSpPr>
+          <p:cNvPr id="11" name="文本框 10"/>
+          <p:cNvSpPr txBox="1"/>
+          <p:nvPr/>
+        </p:nvSpPr>
+        <p:spPr>
+          <a:xfrm>
+            <a:off x="3211830" y="4067810"/>
+            <a:ext cx="6096000" cy="460375"/>
+          </a:xfrm>
+          <a:prstGeom prst="rect">
+            <a:avLst/>
+          </a:prstGeom>
+          <a:noFill/>
+        </p:spPr>
+        <p:txBody>
+          <a:bodyPr wrap="square" rtlCol="0" anchor="t">
+            <a:spAutoFit/>
+          </a:bodyPr>
+          <a:p>
+            <a:r>
+              <a:rPr lang="zh-CN" altLang="en-US" sz="2400" b="1"/>
+              <a:t>一个常驻在你电脑本地的桌面 </a:t>
+            </a:r>
+            <a:r>
+              <a:rPr lang="en-US" altLang="zh-CN" sz="2400" b="1"/>
+              <a:t>AI </a:t>
+            </a:r>
+            <a:r>
+              <a:rPr lang="zh-CN" altLang="en-US" sz="2400" b="1"/>
+              <a:t>助手</a:t>
+            </a:r>
+            <a:endParaRPr lang="zh-CN" altLang="en-US" sz="2400" b="1"/>
           </a:p>
         </p:txBody>
       </p:sp>
@@ -10319,7 +10218,7 @@
 </file>
 
 <file path=ppt/slides/slide19.xml><?xml version="1.0" encoding="utf-8"?>
-<p:sld xmlns:a="http://schemas.openxmlformats.org/drawingml/2006/main" xmlns:p="http://schemas.openxmlformats.org/presentationml/2006/main" xmlns:r="http://schemas.openxmlformats.org/officeDocument/2006/relationships">
+<p:sld xmlns:a="http://schemas.openxmlformats.org/drawingml/2006/main" xmlns:r="http://schemas.openxmlformats.org/officeDocument/2006/relationships" xmlns:p="http://schemas.openxmlformats.org/presentationml/2006/main">
   <p:cSld>
     <p:spTree>
       <p:nvGrpSpPr>
@@ -10380,7 +10279,7 @@
         <p:spPr>
           <a:xfrm>
             <a:off x="548640" y="320040"/>
-            <a:ext cx="11094085" cy="650000"/>
+            <a:ext cx="11094085" cy="553085"/>
           </a:xfrm>
           <a:prstGeom prst="rect">
             <a:avLst/>
@@ -10399,8 +10298,45 @@
                   <a:srgbClr val="1F3A5F"/>
                 </a:solidFill>
               </a:rPr>
-              <a:t>miniyu 系统设计总览：配置化 + 分层架构</a:t>
-            </a:r>
+              <a:t>miniyu </a:t>
+            </a:r>
+            <a:r>
+              <a:rPr lang="zh-CN" sz="3000" b="1">
+                <a:solidFill>
+                  <a:srgbClr val="1F3A5F"/>
+                </a:solidFill>
+              </a:rPr>
+              <a:t>功能</a:t>
+            </a:r>
+            <a:r>
+              <a:rPr sz="3000" b="1">
+                <a:solidFill>
+                  <a:srgbClr val="1F3A5F"/>
+                </a:solidFill>
+              </a:rPr>
+              <a:t>：</a:t>
+            </a:r>
+            <a:r>
+              <a:rPr lang="zh-CN" sz="3000" b="1">
+                <a:solidFill>
+                  <a:srgbClr val="1F3A5F"/>
+                </a:solidFill>
+              </a:rPr>
+              <a:t>主要任务和</a:t>
+            </a:r>
+            <a:r>
+              <a:rPr lang="zh-CN" sz="3000" b="1">
+                <a:solidFill>
+                  <a:srgbClr val="1F3A5F"/>
+                </a:solidFill>
+              </a:rPr>
+              <a:t>操作</a:t>
+            </a:r>
+            <a:endParaRPr lang="zh-CN" sz="3000" b="1">
+              <a:solidFill>
+                <a:srgbClr val="1F3A5F"/>
+              </a:solidFill>
+            </a:endParaRPr>
           </a:p>
         </p:txBody>
       </p:sp>
@@ -10449,14 +10385,459 @@
       </p:sp>
       <p:sp>
         <p:nvSpPr>
-          <p:cNvPr id="5" name="TextBox 4"/>
+          <p:cNvPr id="6" name="文本框 5"/>
           <p:cNvSpPr txBox="1"/>
           <p:nvPr/>
         </p:nvSpPr>
         <p:spPr>
           <a:xfrm>
-            <a:off x="640080" y="1371600"/>
-            <a:ext cx="10911205" cy="5029200"/>
+            <a:off x="548323" y="1442402"/>
+            <a:ext cx="5080000" cy="4276725"/>
+          </a:xfrm>
+          <a:prstGeom prst="rect">
+            <a:avLst/>
+          </a:prstGeom>
+        </p:spPr>
+        <p:txBody>
+          <a:bodyPr>
+            <a:spAutoFit/>
+          </a:bodyPr>
+          <a:p>
+            <a:pPr marL="0" indent="0">
+              <a:spcBef>
+                <a:spcPct val="0"/>
+              </a:spcBef>
+              <a:spcAft>
+                <a:spcPct val="0"/>
+              </a:spcAft>
+              <a:buNone/>
+            </a:pPr>
+            <a:r>
+              <a:rPr lang="en-US" altLang="zh-CN" sz="1600" b="1" i="0">
+                <a:solidFill>
+                  <a:schemeClr val="tx1"/>
+                </a:solidFill>
+                <a:latin typeface="微软雅黑" panose="020B0503020204020204" charset="-122"/>
+                <a:ea typeface="微软雅黑" panose="020B0503020204020204" charset="-122"/>
+              </a:rPr>
+              <a:t>1.</a:t>
+            </a:r>
+            <a:r>
+              <a:rPr lang="zh-CN" altLang="en-US" sz="1600" b="1" i="0">
+                <a:solidFill>
+                  <a:srgbClr val="EAEAEA"/>
+                </a:solidFill>
+                <a:latin typeface="-apple-system"/>
+                <a:ea typeface="-apple-system"/>
+              </a:rPr>
+              <a:t>📂 </a:t>
+            </a:r>
+            <a:r>
+              <a:rPr lang="zh-CN" altLang="en-US" sz="1600" b="1" i="0">
+                <a:solidFill>
+                  <a:schemeClr val="tx1"/>
+                </a:solidFill>
+                <a:latin typeface="微软雅黑" panose="020B0503020204020204" charset="-122"/>
+                <a:ea typeface="微软雅黑" panose="020B0503020204020204" charset="-122"/>
+                <a:cs typeface="微软雅黑" panose="020B0503020204020204" charset="-122"/>
+              </a:rPr>
+              <a:t>文件与文件夹管理</a:t>
+            </a:r>
+            <a:endParaRPr lang="zh-CN" altLang="en-US" sz="1600" b="1" i="0">
+              <a:solidFill>
+                <a:schemeClr val="tx1"/>
+              </a:solidFill>
+              <a:latin typeface="微软雅黑" panose="020B0503020204020204" charset="-122"/>
+              <a:ea typeface="微软雅黑" panose="020B0503020204020204" charset="-122"/>
+              <a:cs typeface="微软雅黑" panose="020B0503020204020204" charset="-122"/>
+            </a:endParaRPr>
+          </a:p>
+          <a:p>
+            <a:pPr marL="0" lvl="1" indent="0">
+              <a:spcBef>
+                <a:spcPct val="0"/>
+              </a:spcBef>
+              <a:spcAft>
+                <a:spcPct val="0"/>
+              </a:spcAft>
+              <a:buFont typeface="Arial" panose="020B0604020202020204"/>
+              <a:buChar char="◦"/>
+            </a:pPr>
+            <a:r>
+              <a:rPr lang="zh-CN" altLang="en-US" sz="1600" b="0" i="0">
+                <a:solidFill>
+                  <a:schemeClr val="tx1"/>
+                </a:solidFill>
+                <a:latin typeface="微软雅黑" panose="020B0503020204020204" charset="-122"/>
+                <a:ea typeface="微软雅黑" panose="020B0503020204020204" charset="-122"/>
+                <a:cs typeface="微软雅黑" panose="020B0503020204020204" charset="-122"/>
+              </a:rPr>
+              <a:t>不管是简单的复制、移动、删除、重命名，还是批量处理多个文件。</a:t>
+            </a:r>
+            <a:endParaRPr lang="zh-CN" altLang="en-US" sz="1600" b="0" i="0">
+              <a:solidFill>
+                <a:schemeClr val="tx1"/>
+              </a:solidFill>
+              <a:latin typeface="微软雅黑" panose="020B0503020204020204" charset="-122"/>
+              <a:ea typeface="微软雅黑" panose="020B0503020204020204" charset="-122"/>
+              <a:cs typeface="微软雅黑" panose="020B0503020204020204" charset="-122"/>
+            </a:endParaRPr>
+          </a:p>
+          <a:p>
+            <a:pPr marL="0" lvl="1" indent="0">
+              <a:spcBef>
+                <a:spcPct val="0"/>
+              </a:spcBef>
+              <a:spcAft>
+                <a:spcPct val="0"/>
+              </a:spcAft>
+              <a:buFont typeface="Arial" panose="020B0604020202020204"/>
+              <a:buChar char="◦"/>
+            </a:pPr>
+            <a:r>
+              <a:rPr lang="zh-CN" altLang="en-US" sz="1600" b="0" i="0">
+                <a:solidFill>
+                  <a:schemeClr val="tx1"/>
+                </a:solidFill>
+                <a:latin typeface="微软雅黑" panose="020B0503020204020204" charset="-122"/>
+                <a:ea typeface="微软雅黑" panose="020B0503020204020204" charset="-122"/>
+                <a:cs typeface="微软雅黑" panose="020B0503020204020204" charset="-122"/>
+              </a:rPr>
+              <a:t>查找特定的文件：比如找超过 </a:t>
+            </a:r>
+            <a:r>
+              <a:rPr lang="en-US" altLang="zh-CN" sz="1600" b="0" i="0">
+                <a:solidFill>
+                  <a:schemeClr val="tx1"/>
+                </a:solidFill>
+                <a:latin typeface="微软雅黑" panose="020B0503020204020204" charset="-122"/>
+                <a:ea typeface="微软雅黑" panose="020B0503020204020204" charset="-122"/>
+                <a:cs typeface="微软雅黑" panose="020B0503020204020204" charset="-122"/>
+              </a:rPr>
+              <a:t>100MB </a:t>
+            </a:r>
+            <a:r>
+              <a:rPr lang="zh-CN" altLang="en-US" sz="1600" b="0" i="0">
+                <a:solidFill>
+                  <a:schemeClr val="tx1"/>
+                </a:solidFill>
+                <a:latin typeface="微软雅黑" panose="020B0503020204020204" charset="-122"/>
+                <a:ea typeface="微软雅黑" panose="020B0503020204020204" charset="-122"/>
+                <a:cs typeface="微软雅黑" panose="020B0503020204020204" charset="-122"/>
+              </a:rPr>
+              <a:t>的大文件、很久没修改的旧文件，或者按文件名关键词搜索。</a:t>
+            </a:r>
+            <a:endParaRPr lang="zh-CN" altLang="en-US" sz="1600" b="0" i="0">
+              <a:solidFill>
+                <a:schemeClr val="tx1"/>
+              </a:solidFill>
+              <a:latin typeface="微软雅黑" panose="020B0503020204020204" charset="-122"/>
+              <a:ea typeface="微软雅黑" panose="020B0503020204020204" charset="-122"/>
+              <a:cs typeface="微软雅黑" panose="020B0503020204020204" charset="-122"/>
+            </a:endParaRPr>
+          </a:p>
+          <a:p>
+            <a:pPr marL="0" lvl="1" indent="0">
+              <a:spcBef>
+                <a:spcPct val="0"/>
+              </a:spcBef>
+              <a:spcAft>
+                <a:spcPct val="0"/>
+              </a:spcAft>
+              <a:buFont typeface="Arial" panose="020B0604020202020204"/>
+              <a:buChar char="◦"/>
+            </a:pPr>
+            <a:r>
+              <a:rPr lang="zh-CN" altLang="en-US" sz="1600" b="0" i="0">
+                <a:solidFill>
+                  <a:schemeClr val="tx1"/>
+                </a:solidFill>
+                <a:latin typeface="微软雅黑" panose="020B0503020204020204" charset="-122"/>
+                <a:ea typeface="微软雅黑" panose="020B0503020204020204" charset="-122"/>
+                <a:cs typeface="微软雅黑" panose="020B0503020204020204" charset="-122"/>
+              </a:rPr>
+              <a:t>压缩和解压 </a:t>
+            </a:r>
+            <a:r>
+              <a:rPr lang="en-US" altLang="zh-CN" sz="1600" b="0" i="0">
+                <a:solidFill>
+                  <a:schemeClr val="tx1"/>
+                </a:solidFill>
+                <a:latin typeface="微软雅黑" panose="020B0503020204020204" charset="-122"/>
+                <a:ea typeface="微软雅黑" panose="020B0503020204020204" charset="-122"/>
+                <a:cs typeface="微软雅黑" panose="020B0503020204020204" charset="-122"/>
+              </a:rPr>
+              <a:t>ZIP </a:t>
+            </a:r>
+            <a:r>
+              <a:rPr lang="zh-CN" altLang="en-US" sz="1600" b="0" i="0">
+                <a:solidFill>
+                  <a:schemeClr val="tx1"/>
+                </a:solidFill>
+                <a:latin typeface="微软雅黑" panose="020B0503020204020204" charset="-122"/>
+                <a:ea typeface="微软雅黑" panose="020B0503020204020204" charset="-122"/>
+                <a:cs typeface="微软雅黑" panose="020B0503020204020204" charset="-122"/>
+              </a:rPr>
+              <a:t>包。</a:t>
+            </a:r>
+            <a:endParaRPr lang="zh-CN" altLang="en-US" sz="1600" b="0" i="0">
+              <a:solidFill>
+                <a:schemeClr val="tx1"/>
+              </a:solidFill>
+              <a:latin typeface="微软雅黑" panose="020B0503020204020204" charset="-122"/>
+              <a:ea typeface="微软雅黑" panose="020B0503020204020204" charset="-122"/>
+              <a:cs typeface="微软雅黑" panose="020B0503020204020204" charset="-122"/>
+            </a:endParaRPr>
+          </a:p>
+          <a:p>
+            <a:pPr marL="0" lvl="1" indent="0">
+              <a:spcBef>
+                <a:spcPct val="0"/>
+              </a:spcBef>
+              <a:spcAft>
+                <a:spcPct val="0"/>
+              </a:spcAft>
+              <a:buFont typeface="Arial" panose="020B0604020202020204"/>
+              <a:buChar char="◦"/>
+            </a:pPr>
+            <a:endParaRPr lang="zh-CN" altLang="en-US" sz="1600" b="0" i="0">
+              <a:solidFill>
+                <a:schemeClr val="tx1"/>
+              </a:solidFill>
+              <a:latin typeface="微软雅黑" panose="020B0503020204020204" charset="-122"/>
+              <a:ea typeface="微软雅黑" panose="020B0503020204020204" charset="-122"/>
+              <a:cs typeface="微软雅黑" panose="020B0503020204020204" charset="-122"/>
+            </a:endParaRPr>
+          </a:p>
+          <a:p>
+            <a:pPr marL="0" lvl="1" indent="0">
+              <a:spcBef>
+                <a:spcPct val="0"/>
+              </a:spcBef>
+              <a:spcAft>
+                <a:spcPct val="0"/>
+              </a:spcAft>
+              <a:buFont typeface="Arial" panose="020B0604020202020204"/>
+              <a:buChar char="◦"/>
+            </a:pPr>
+            <a:endParaRPr lang="zh-CN" altLang="en-US" sz="1600" b="0" i="0">
+              <a:solidFill>
+                <a:schemeClr val="tx1"/>
+              </a:solidFill>
+              <a:latin typeface="微软雅黑" panose="020B0503020204020204" charset="-122"/>
+              <a:ea typeface="微软雅黑" panose="020B0503020204020204" charset="-122"/>
+              <a:cs typeface="微软雅黑" panose="020B0503020204020204" charset="-122"/>
+            </a:endParaRPr>
+          </a:p>
+          <a:p>
+            <a:pPr marL="0" lvl="1" indent="0">
+              <a:spcBef>
+                <a:spcPct val="0"/>
+              </a:spcBef>
+              <a:spcAft>
+                <a:spcPct val="0"/>
+              </a:spcAft>
+              <a:buFont typeface="Arial" panose="020B0604020202020204"/>
+              <a:buChar char="◦"/>
+            </a:pPr>
+            <a:endParaRPr lang="zh-CN" altLang="en-US" sz="1600" b="0" i="0">
+              <a:solidFill>
+                <a:schemeClr val="tx1"/>
+              </a:solidFill>
+              <a:latin typeface="微软雅黑" panose="020B0503020204020204" charset="-122"/>
+              <a:ea typeface="微软雅黑" panose="020B0503020204020204" charset="-122"/>
+              <a:cs typeface="微软雅黑" panose="020B0503020204020204" charset="-122"/>
+            </a:endParaRPr>
+          </a:p>
+          <a:p>
+            <a:pPr marL="0" lvl="1" indent="0">
+              <a:spcBef>
+                <a:spcPct val="0"/>
+              </a:spcBef>
+              <a:spcAft>
+                <a:spcPct val="0"/>
+              </a:spcAft>
+              <a:buFont typeface="Arial" panose="020B0604020202020204"/>
+              <a:buChar char="◦"/>
+            </a:pPr>
+            <a:endParaRPr lang="zh-CN" altLang="en-US" sz="1600" b="0" i="0">
+              <a:solidFill>
+                <a:schemeClr val="tx1"/>
+              </a:solidFill>
+              <a:latin typeface="微软雅黑" panose="020B0503020204020204" charset="-122"/>
+              <a:ea typeface="微软雅黑" panose="020B0503020204020204" charset="-122"/>
+              <a:cs typeface="微软雅黑" panose="020B0503020204020204" charset="-122"/>
+            </a:endParaRPr>
+          </a:p>
+          <a:p>
+            <a:pPr marL="0" lvl="1" indent="0">
+              <a:spcBef>
+                <a:spcPct val="0"/>
+              </a:spcBef>
+              <a:spcAft>
+                <a:spcPct val="0"/>
+              </a:spcAft>
+              <a:buFont typeface="Arial" panose="020B0604020202020204"/>
+              <a:buNone/>
+            </a:pPr>
+            <a:r>
+              <a:rPr lang="en-US" altLang="zh-CN" sz="1600" b="1" i="0">
+                <a:solidFill>
+                  <a:schemeClr val="tx1"/>
+                </a:solidFill>
+                <a:latin typeface="微软雅黑" panose="020B0503020204020204" charset="-122"/>
+                <a:ea typeface="微软雅黑" panose="020B0503020204020204" charset="-122"/>
+                <a:cs typeface="微软雅黑" panose="020B0503020204020204" charset="-122"/>
+              </a:rPr>
+              <a:t>3.</a:t>
+            </a:r>
+            <a:r>
+              <a:rPr lang="zh-CN" altLang="en-US" sz="1600" b="1" i="0">
+                <a:solidFill>
+                  <a:schemeClr val="tx1"/>
+                </a:solidFill>
+                <a:latin typeface="微软雅黑" panose="020B0503020204020204" charset="-122"/>
+                <a:ea typeface="微软雅黑" panose="020B0503020204020204" charset="-122"/>
+                <a:cs typeface="微软雅黑" panose="020B0503020204020204" charset="-122"/>
+              </a:rPr>
+              <a:t>🌐 应用交互与自动化</a:t>
+            </a:r>
+            <a:endParaRPr lang="zh-CN" altLang="en-US" sz="1600" b="1" i="0">
+              <a:solidFill>
+                <a:schemeClr val="tx1"/>
+              </a:solidFill>
+              <a:latin typeface="微软雅黑" panose="020B0503020204020204" charset="-122"/>
+              <a:ea typeface="微软雅黑" panose="020B0503020204020204" charset="-122"/>
+              <a:cs typeface="微软雅黑" panose="020B0503020204020204" charset="-122"/>
+            </a:endParaRPr>
+          </a:p>
+          <a:p>
+            <a:pPr marL="0" lvl="1" indent="0">
+              <a:spcBef>
+                <a:spcPct val="0"/>
+              </a:spcBef>
+              <a:spcAft>
+                <a:spcPct val="0"/>
+              </a:spcAft>
+              <a:buFont typeface="Arial" panose="020B0604020202020204"/>
+              <a:buChar char="◦"/>
+            </a:pPr>
+            <a:r>
+              <a:rPr lang="zh-CN" altLang="en-US" sz="1600" b="0" i="0">
+                <a:solidFill>
+                  <a:schemeClr val="tx1"/>
+                </a:solidFill>
+                <a:latin typeface="微软雅黑" panose="020B0503020204020204" charset="-122"/>
+                <a:ea typeface="微软雅黑" panose="020B0503020204020204" charset="-122"/>
+                <a:cs typeface="微软雅黑" panose="020B0503020204020204" charset="-122"/>
+              </a:rPr>
+              <a:t>浏览器控制：我可以帮你启动浏览器、打开网页、点击按钮、输入文字，或者直接把网页里的文章提取成文字给你看。</a:t>
+            </a:r>
+            <a:endParaRPr lang="zh-CN" altLang="en-US" sz="1600" b="0" i="0">
+              <a:solidFill>
+                <a:schemeClr val="tx1"/>
+              </a:solidFill>
+              <a:latin typeface="微软雅黑" panose="020B0503020204020204" charset="-122"/>
+              <a:ea typeface="微软雅黑" panose="020B0503020204020204" charset="-122"/>
+              <a:cs typeface="微软雅黑" panose="020B0503020204020204" charset="-122"/>
+            </a:endParaRPr>
+          </a:p>
+          <a:p>
+            <a:pPr marL="0" lvl="1" indent="0">
+              <a:spcBef>
+                <a:spcPct val="0"/>
+              </a:spcBef>
+              <a:spcAft>
+                <a:spcPct val="0"/>
+              </a:spcAft>
+              <a:buFont typeface="Arial" panose="020B0604020202020204"/>
+              <a:buChar char="◦"/>
+            </a:pPr>
+            <a:r>
+              <a:rPr lang="en-US" altLang="zh-CN" sz="1600" b="0" i="0">
+                <a:solidFill>
+                  <a:schemeClr val="tx1"/>
+                </a:solidFill>
+                <a:latin typeface="微软雅黑" panose="020B0503020204020204" charset="-122"/>
+                <a:ea typeface="微软雅黑" panose="020B0503020204020204" charset="-122"/>
+                <a:cs typeface="微软雅黑" panose="020B0503020204020204" charset="-122"/>
+              </a:rPr>
+              <a:t>QQ/IM </a:t>
+            </a:r>
+            <a:r>
+              <a:rPr lang="zh-CN" altLang="en-US" sz="1600" b="0" i="0">
+                <a:solidFill>
+                  <a:schemeClr val="tx1"/>
+                </a:solidFill>
+                <a:latin typeface="微软雅黑" panose="020B0503020204020204" charset="-122"/>
+                <a:ea typeface="微软雅黑" panose="020B0503020204020204" charset="-122"/>
+                <a:cs typeface="微软雅黑" panose="020B0503020204020204" charset="-122"/>
+              </a:rPr>
+              <a:t>助手：如果你在用 </a:t>
+            </a:r>
+            <a:r>
+              <a:rPr lang="en-US" altLang="zh-CN" sz="1600" b="0" i="0">
+                <a:solidFill>
+                  <a:schemeClr val="tx1"/>
+                </a:solidFill>
+                <a:latin typeface="微软雅黑" panose="020B0503020204020204" charset="-122"/>
+                <a:ea typeface="微软雅黑" panose="020B0503020204020204" charset="-122"/>
+                <a:cs typeface="微软雅黑" panose="020B0503020204020204" charset="-122"/>
+              </a:rPr>
+              <a:t>QQ</a:t>
+            </a:r>
+            <a:r>
+              <a:rPr lang="zh-CN" altLang="en-US" sz="1600" b="0" i="0">
+                <a:solidFill>
+                  <a:schemeClr val="tx1"/>
+                </a:solidFill>
+                <a:latin typeface="微软雅黑" panose="020B0503020204020204" charset="-122"/>
+                <a:ea typeface="微软雅黑" panose="020B0503020204020204" charset="-122"/>
+                <a:cs typeface="微软雅黑" panose="020B0503020204020204" charset="-122"/>
+              </a:rPr>
+              <a:t>，我可以帮你读取某个群或好友的最近聊天内容，或者帮你发送消息。</a:t>
+            </a:r>
+            <a:endParaRPr lang="zh-CN" altLang="en-US" sz="1600" b="0" i="0">
+              <a:solidFill>
+                <a:schemeClr val="tx1"/>
+              </a:solidFill>
+              <a:latin typeface="微软雅黑" panose="020B0503020204020204" charset="-122"/>
+              <a:ea typeface="微软雅黑" panose="020B0503020204020204" charset="-122"/>
+              <a:cs typeface="微软雅黑" panose="020B0503020204020204" charset="-122"/>
+            </a:endParaRPr>
+          </a:p>
+          <a:p>
+            <a:pPr marL="0" lvl="1" indent="0">
+              <a:spcBef>
+                <a:spcPct val="0"/>
+              </a:spcBef>
+              <a:spcAft>
+                <a:spcPct val="0"/>
+              </a:spcAft>
+              <a:buFont typeface="Arial" panose="020B0604020202020204"/>
+              <a:buNone/>
+            </a:pPr>
+            <a:endParaRPr lang="zh-CN" altLang="en-US" sz="1600" b="0" i="0">
+              <a:solidFill>
+                <a:schemeClr val="tx1"/>
+              </a:solidFill>
+              <a:latin typeface="微软雅黑" panose="020B0503020204020204" charset="-122"/>
+              <a:ea typeface="微软雅黑" panose="020B0503020204020204" charset="-122"/>
+              <a:cs typeface="微软雅黑" panose="020B0503020204020204" charset="-122"/>
+            </a:endParaRPr>
+          </a:p>
+        </p:txBody>
+      </p:sp>
+      <p:sp>
+        <p:nvSpPr>
+          <p:cNvPr id="7" name="文本框 6"/>
+          <p:cNvSpPr txBox="1"/>
+          <p:nvPr/>
+        </p:nvSpPr>
+        <p:spPr>
+          <a:xfrm>
+            <a:off x="6095365" y="1442085"/>
+            <a:ext cx="5547360" cy="3784600"/>
           </a:xfrm>
           <a:prstGeom prst="rect">
             <a:avLst/>
@@ -10464,114 +10845,371 @@
           <a:noFill/>
         </p:spPr>
         <p:txBody>
-          <a:bodyPr wrap="square">
+          <a:bodyPr wrap="square" rtlCol="0" anchor="t">
             <a:spAutoFit/>
           </a:bodyPr>
-          <a:lstStyle/>
-          <a:p>
-            <a:pPr>
-              <a:spcAft>
-                <a:spcPts val="800"/>
-              </a:spcAft>
-            </a:pPr>
-            <a:r>
-              <a:rPr sz="1600" b="1">
-                <a:solidFill>
-                  <a:srgbClr val="333333"/>
-                </a:solidFill>
-              </a:rPr>
-              <a:t>◆ 配置化设计（不写死，改配置即变更）</a:t>
-            </a:r>
-          </a:p>
-          <a:p>
-            <a:pPr>
-              <a:spcAft>
-                <a:spcPts val="800"/>
-              </a:spcAft>
-            </a:pPr>
-            <a:r>
-              <a:rPr sz="1500">
-                <a:solidFill>
-                  <a:srgbClr val="333333"/>
-                </a:solidFill>
-              </a:rPr>
-              <a:t>  config.yaml：LLM 提供商 / 模型 / 授权档位 / 联网开关 / 协调层 / 邮件,全部可调；模板为 config.yaml.example（不含任何个人密钥）</a:t>
-            </a:r>
-          </a:p>
-          <a:p>
-            <a:pPr>
-              <a:spcAft>
-                <a:spcPts val="800"/>
-              </a:spcAft>
-            </a:pPr>
-            <a:r>
-              <a:rPr sz="1500">
-                <a:solidFill>
-                  <a:srgbClr val="333333"/>
-                </a:solidFill>
-              </a:rPr>
-              <a:t>  优先级：环境变量 &gt; config.yaml &gt; 内置默认值</a:t>
-            </a:r>
-          </a:p>
-          <a:p>
-            <a:pPr>
-              <a:spcAft>
-                <a:spcPts val="800"/>
-              </a:spcAft>
-            </a:pPr>
-            <a:r>
-              <a:rPr sz="1600" b="1">
-                <a:solidFill>
-                  <a:srgbClr val="333333"/>
-                </a:solidFill>
-              </a:rPr>
-              <a:t>◆ 分层架构</a:t>
-            </a:r>
-          </a:p>
-          <a:p>
-            <a:pPr>
-              <a:spcAft>
-                <a:spcPts val="800"/>
-              </a:spcAft>
-            </a:pPr>
-            <a:r>
-              <a:rPr sz="1500">
-                <a:solidFill>
-                  <a:srgbClr val="333333"/>
-                </a:solidFill>
-              </a:rPr>
-              <a:t>  第1组 AI Shell/HostAgent（意图）→ 第5组 协调+安全 → 第2组 规划 → 第3组 执行 → 第4组 工具/技能</a:t>
-            </a:r>
-          </a:p>
-          <a:p>
-            <a:pPr>
-              <a:spcAft>
-                <a:spcPts val="800"/>
-              </a:spcAft>
-            </a:pPr>
-            <a:r>
-              <a:rPr sz="1500">
-                <a:solidFill>
-                  <a:srgbClr val="333333"/>
-                </a:solidFill>
-              </a:rPr>
-              <a:t>  数据流 1→5→2→3→4，第4组统一输出 tool_result_json</a:t>
-            </a:r>
-          </a:p>
-          <a:p>
-            <a:pPr>
-              <a:spcAft>
-                <a:spcPts val="800"/>
-              </a:spcAft>
-            </a:pPr>
-            <a:r>
-              <a:rPr sz="1600" b="1">
-                <a:solidFill>
-                  <a:srgbClr val="333333"/>
-                </a:solidFill>
-              </a:rPr>
-              <a:t>◆ OS 原理落地：持久性(文件系统/目录管理) 由第4组工具层直接承载</a:t>
-            </a:r>
+          <a:p>
+            <a:pPr marL="0" lvl="1" indent="0">
+              <a:spcBef>
+                <a:spcPct val="0"/>
+              </a:spcBef>
+              <a:spcAft>
+                <a:spcPct val="0"/>
+              </a:spcAft>
+              <a:buFont typeface="Arial" panose="020B0604020202020204"/>
+              <a:buNone/>
+            </a:pPr>
+            <a:r>
+              <a:rPr lang="en-US" altLang="zh-CN" sz="1600" b="1">
+                <a:latin typeface="微软雅黑" panose="020B0503020204020204" charset="-122"/>
+                <a:ea typeface="微软雅黑" panose="020B0503020204020204" charset="-122"/>
+                <a:cs typeface="微软雅黑" panose="020B0503020204020204" charset="-122"/>
+                <a:sym typeface="+mn-ea"/>
+              </a:rPr>
+              <a:t>2.</a:t>
+            </a:r>
+            <a:r>
+              <a:rPr lang="zh-CN" altLang="en-US" sz="1600" b="1">
+                <a:latin typeface="微软雅黑" panose="020B0503020204020204" charset="-122"/>
+                <a:ea typeface="微软雅黑" panose="020B0503020204020204" charset="-122"/>
+                <a:cs typeface="微软雅黑" panose="020B0503020204020204" charset="-122"/>
+                <a:sym typeface="+mn-ea"/>
+              </a:rPr>
+              <a:t>💻 系统与进程控制</a:t>
+            </a:r>
+            <a:endParaRPr lang="zh-CN" altLang="en-US" sz="1600" b="1" i="0">
+              <a:solidFill>
+                <a:schemeClr val="tx1"/>
+              </a:solidFill>
+              <a:latin typeface="微软雅黑" panose="020B0503020204020204" charset="-122"/>
+              <a:ea typeface="微软雅黑" panose="020B0503020204020204" charset="-122"/>
+              <a:cs typeface="微软雅黑" panose="020B0503020204020204" charset="-122"/>
+            </a:endParaRPr>
+          </a:p>
+          <a:p>
+            <a:pPr marL="0" lvl="1" indent="0">
+              <a:spcBef>
+                <a:spcPct val="0"/>
+              </a:spcBef>
+              <a:spcAft>
+                <a:spcPct val="0"/>
+              </a:spcAft>
+              <a:buFont typeface="Arial" panose="020B0604020202020204"/>
+              <a:buChar char="◦"/>
+            </a:pPr>
+            <a:r>
+              <a:rPr lang="zh-CN" altLang="en-US" sz="1600">
+                <a:latin typeface="微软雅黑" panose="020B0503020204020204" charset="-122"/>
+                <a:ea typeface="微软雅黑" panose="020B0503020204020204" charset="-122"/>
+                <a:cs typeface="微软雅黑" panose="020B0503020204020204" charset="-122"/>
+                <a:sym typeface="+mn-ea"/>
+              </a:rPr>
+              <a:t>执行命令行指令（</a:t>
+            </a:r>
+            <a:r>
+              <a:rPr lang="en-US" altLang="zh-CN" sz="1600">
+                <a:latin typeface="微软雅黑" panose="020B0503020204020204" charset="-122"/>
+                <a:ea typeface="微软雅黑" panose="020B0503020204020204" charset="-122"/>
+                <a:cs typeface="微软雅黑" panose="020B0503020204020204" charset="-122"/>
+                <a:sym typeface="+mn-ea"/>
+              </a:rPr>
+              <a:t>Run Command</a:t>
+            </a:r>
+            <a:r>
+              <a:rPr lang="zh-CN" altLang="en-US" sz="1600">
+                <a:latin typeface="微软雅黑" panose="020B0503020204020204" charset="-122"/>
+                <a:ea typeface="微软雅黑" panose="020B0503020204020204" charset="-122"/>
+                <a:cs typeface="微软雅黑" panose="020B0503020204020204" charset="-122"/>
+                <a:sym typeface="+mn-ea"/>
+              </a:rPr>
+              <a:t>）。</a:t>
+            </a:r>
+            <a:endParaRPr lang="zh-CN" altLang="en-US" sz="1600" b="0" i="0">
+              <a:solidFill>
+                <a:schemeClr val="tx1"/>
+              </a:solidFill>
+              <a:latin typeface="微软雅黑" panose="020B0503020204020204" charset="-122"/>
+              <a:ea typeface="微软雅黑" panose="020B0503020204020204" charset="-122"/>
+              <a:cs typeface="微软雅黑" panose="020B0503020204020204" charset="-122"/>
+            </a:endParaRPr>
+          </a:p>
+          <a:p>
+            <a:pPr marL="0" lvl="1" indent="0">
+              <a:spcBef>
+                <a:spcPct val="0"/>
+              </a:spcBef>
+              <a:spcAft>
+                <a:spcPct val="0"/>
+              </a:spcAft>
+              <a:buFont typeface="Arial" panose="020B0604020202020204"/>
+              <a:buChar char="◦"/>
+            </a:pPr>
+            <a:r>
+              <a:rPr lang="zh-CN" altLang="en-US" sz="1600">
+                <a:latin typeface="微软雅黑" panose="020B0503020204020204" charset="-122"/>
+                <a:ea typeface="微软雅黑" panose="020B0503020204020204" charset="-122"/>
+                <a:cs typeface="微软雅黑" panose="020B0503020204020204" charset="-122"/>
+                <a:sym typeface="+mn-ea"/>
+              </a:rPr>
+              <a:t>查看当前正在运行的进程列表，甚至帮你杀掉卡死的程序。</a:t>
+            </a:r>
+            <a:endParaRPr lang="zh-CN" altLang="en-US" sz="1600" b="0" i="0">
+              <a:solidFill>
+                <a:schemeClr val="tx1"/>
+              </a:solidFill>
+              <a:latin typeface="微软雅黑" panose="020B0503020204020204" charset="-122"/>
+              <a:ea typeface="微软雅黑" panose="020B0503020204020204" charset="-122"/>
+              <a:cs typeface="微软雅黑" panose="020B0503020204020204" charset="-122"/>
+            </a:endParaRPr>
+          </a:p>
+          <a:p>
+            <a:pPr marL="0" lvl="1" indent="0">
+              <a:spcBef>
+                <a:spcPct val="0"/>
+              </a:spcBef>
+              <a:spcAft>
+                <a:spcPct val="0"/>
+              </a:spcAft>
+              <a:buFont typeface="Arial" panose="020B0604020202020204"/>
+              <a:buChar char="◦"/>
+            </a:pPr>
+            <a:r>
+              <a:rPr lang="zh-CN" altLang="en-US" sz="1600">
+                <a:latin typeface="微软雅黑" panose="020B0503020204020204" charset="-122"/>
+                <a:ea typeface="微软雅黑" panose="020B0503020204020204" charset="-122"/>
+                <a:cs typeface="微软雅黑" panose="020B0503020204020204" charset="-122"/>
+                <a:sym typeface="+mn-ea"/>
+              </a:rPr>
+              <a:t>管理环境变量。</a:t>
+            </a:r>
+            <a:endParaRPr lang="zh-CN" altLang="en-US" sz="1600">
+              <a:latin typeface="微软雅黑" panose="020B0503020204020204" charset="-122"/>
+              <a:ea typeface="微软雅黑" panose="020B0503020204020204" charset="-122"/>
+              <a:cs typeface="微软雅黑" panose="020B0503020204020204" charset="-122"/>
+              <a:sym typeface="+mn-ea"/>
+            </a:endParaRPr>
+          </a:p>
+          <a:p>
+            <a:pPr marL="0" lvl="1" indent="0">
+              <a:spcBef>
+                <a:spcPct val="0"/>
+              </a:spcBef>
+              <a:spcAft>
+                <a:spcPct val="0"/>
+              </a:spcAft>
+              <a:buFont typeface="Arial" panose="020B0604020202020204"/>
+              <a:buChar char="◦"/>
+            </a:pPr>
+            <a:endParaRPr lang="zh-CN" altLang="en-US" sz="1600">
+              <a:latin typeface="微软雅黑" panose="020B0503020204020204" charset="-122"/>
+              <a:ea typeface="微软雅黑" panose="020B0503020204020204" charset="-122"/>
+              <a:cs typeface="微软雅黑" panose="020B0503020204020204" charset="-122"/>
+              <a:sym typeface="+mn-ea"/>
+            </a:endParaRPr>
+          </a:p>
+          <a:p>
+            <a:pPr marL="0" lvl="1" indent="0">
+              <a:spcBef>
+                <a:spcPct val="0"/>
+              </a:spcBef>
+              <a:spcAft>
+                <a:spcPct val="0"/>
+              </a:spcAft>
+              <a:buFont typeface="Arial" panose="020B0604020202020204"/>
+              <a:buChar char="◦"/>
+            </a:pPr>
+            <a:endParaRPr lang="zh-CN" altLang="en-US" sz="1600">
+              <a:latin typeface="微软雅黑" panose="020B0503020204020204" charset="-122"/>
+              <a:ea typeface="微软雅黑" panose="020B0503020204020204" charset="-122"/>
+              <a:cs typeface="微软雅黑" panose="020B0503020204020204" charset="-122"/>
+              <a:sym typeface="+mn-ea"/>
+            </a:endParaRPr>
+          </a:p>
+          <a:p>
+            <a:pPr marL="0" lvl="1" indent="0">
+              <a:spcBef>
+                <a:spcPct val="0"/>
+              </a:spcBef>
+              <a:spcAft>
+                <a:spcPct val="0"/>
+              </a:spcAft>
+              <a:buFont typeface="Arial" panose="020B0604020202020204"/>
+              <a:buChar char="◦"/>
+            </a:pPr>
+            <a:endParaRPr lang="zh-CN" altLang="en-US" sz="1600">
+              <a:latin typeface="微软雅黑" panose="020B0503020204020204" charset="-122"/>
+              <a:ea typeface="微软雅黑" panose="020B0503020204020204" charset="-122"/>
+              <a:cs typeface="微软雅黑" panose="020B0503020204020204" charset="-122"/>
+              <a:sym typeface="+mn-ea"/>
+            </a:endParaRPr>
+          </a:p>
+          <a:p>
+            <a:pPr marL="0" lvl="1" indent="0">
+              <a:spcBef>
+                <a:spcPct val="0"/>
+              </a:spcBef>
+              <a:spcAft>
+                <a:spcPct val="0"/>
+              </a:spcAft>
+              <a:buFont typeface="Arial" panose="020B0604020202020204"/>
+              <a:buChar char="◦"/>
+            </a:pPr>
+            <a:endParaRPr lang="zh-CN" altLang="en-US" sz="1600">
+              <a:latin typeface="微软雅黑" panose="020B0503020204020204" charset="-122"/>
+              <a:ea typeface="微软雅黑" panose="020B0503020204020204" charset="-122"/>
+              <a:cs typeface="微软雅黑" panose="020B0503020204020204" charset="-122"/>
+              <a:sym typeface="+mn-ea"/>
+            </a:endParaRPr>
+          </a:p>
+          <a:p>
+            <a:pPr marL="0" lvl="1" indent="0">
+              <a:spcBef>
+                <a:spcPct val="0"/>
+              </a:spcBef>
+              <a:spcAft>
+                <a:spcPct val="0"/>
+              </a:spcAft>
+              <a:buFont typeface="Arial" panose="020B0604020202020204"/>
+              <a:buChar char="◦"/>
+            </a:pPr>
+            <a:endParaRPr lang="zh-CN" altLang="en-US" sz="1600">
+              <a:latin typeface="微软雅黑" panose="020B0503020204020204" charset="-122"/>
+              <a:ea typeface="微软雅黑" panose="020B0503020204020204" charset="-122"/>
+              <a:cs typeface="微软雅黑" panose="020B0503020204020204" charset="-122"/>
+              <a:sym typeface="+mn-ea"/>
+            </a:endParaRPr>
+          </a:p>
+          <a:p>
+            <a:pPr marL="0" lvl="1" indent="0">
+              <a:spcBef>
+                <a:spcPct val="0"/>
+              </a:spcBef>
+              <a:spcAft>
+                <a:spcPct val="0"/>
+              </a:spcAft>
+              <a:buFont typeface="Arial" panose="020B0604020202020204"/>
+              <a:buChar char="◦"/>
+            </a:pPr>
+            <a:endParaRPr lang="zh-CN" altLang="en-US" sz="1600">
+              <a:latin typeface="微软雅黑" panose="020B0503020204020204" charset="-122"/>
+              <a:ea typeface="微软雅黑" panose="020B0503020204020204" charset="-122"/>
+              <a:cs typeface="微软雅黑" panose="020B0503020204020204" charset="-122"/>
+              <a:sym typeface="+mn-ea"/>
+            </a:endParaRPr>
+          </a:p>
+          <a:p>
+            <a:pPr marL="0" lvl="1" indent="0">
+              <a:spcBef>
+                <a:spcPct val="0"/>
+              </a:spcBef>
+              <a:spcAft>
+                <a:spcPct val="0"/>
+              </a:spcAft>
+              <a:buFont typeface="Arial" panose="020B0604020202020204"/>
+              <a:buNone/>
+            </a:pPr>
+            <a:r>
+              <a:rPr lang="en-US" altLang="zh-CN" sz="1600" b="1">
+                <a:latin typeface="微软雅黑" panose="020B0503020204020204" charset="-122"/>
+                <a:ea typeface="微软雅黑" panose="020B0503020204020204" charset="-122"/>
+                <a:cs typeface="微软雅黑" panose="020B0503020204020204" charset="-122"/>
+                <a:sym typeface="+mn-ea"/>
+              </a:rPr>
+              <a:t>4.</a:t>
+            </a:r>
+            <a:r>
+              <a:rPr lang="zh-CN" altLang="en-US" sz="1600" b="1">
+                <a:latin typeface="微软雅黑" panose="020B0503020204020204" charset="-122"/>
+                <a:ea typeface="微软雅黑" panose="020B0503020204020204" charset="-122"/>
+                <a:cs typeface="微软雅黑" panose="020B0503020204020204" charset="-122"/>
+                <a:sym typeface="+mn-ea"/>
+              </a:rPr>
+              <a:t>👀 阅读与理解</a:t>
+            </a:r>
+            <a:endParaRPr lang="zh-CN" altLang="en-US" sz="1600" b="1" i="0">
+              <a:solidFill>
+                <a:schemeClr val="tx1"/>
+              </a:solidFill>
+              <a:latin typeface="微软雅黑" panose="020B0503020204020204" charset="-122"/>
+              <a:ea typeface="微软雅黑" panose="020B0503020204020204" charset="-122"/>
+              <a:cs typeface="微软雅黑" panose="020B0503020204020204" charset="-122"/>
+            </a:endParaRPr>
+          </a:p>
+          <a:p>
+            <a:pPr marL="0" lvl="1" indent="0">
+              <a:spcBef>
+                <a:spcPct val="0"/>
+              </a:spcBef>
+              <a:spcAft>
+                <a:spcPct val="0"/>
+              </a:spcAft>
+              <a:buFont typeface="Arial" panose="020B0604020202020204"/>
+              <a:buChar char="◦"/>
+            </a:pPr>
+            <a:r>
+              <a:rPr lang="zh-CN" altLang="en-US" sz="1600">
+                <a:latin typeface="微软雅黑" panose="020B0503020204020204" charset="-122"/>
+                <a:ea typeface="微软雅黑" panose="020B0503020204020204" charset="-122"/>
+                <a:cs typeface="微软雅黑" panose="020B0503020204020204" charset="-122"/>
+                <a:sym typeface="+mn-ea"/>
+              </a:rPr>
+              <a:t>读取本地的文本文件（代码、日志、文档等）。</a:t>
+            </a:r>
+            <a:endParaRPr lang="zh-CN" altLang="en-US" sz="1600" b="0" i="0">
+              <a:solidFill>
+                <a:schemeClr val="tx1"/>
+              </a:solidFill>
+              <a:latin typeface="微软雅黑" panose="020B0503020204020204" charset="-122"/>
+              <a:ea typeface="微软雅黑" panose="020B0503020204020204" charset="-122"/>
+              <a:cs typeface="微软雅黑" panose="020B0503020204020204" charset="-122"/>
+            </a:endParaRPr>
+          </a:p>
+          <a:p>
+            <a:pPr marL="0" lvl="1" indent="0">
+              <a:spcBef>
+                <a:spcPct val="0"/>
+              </a:spcBef>
+              <a:spcAft>
+                <a:spcPct val="0"/>
+              </a:spcAft>
+              <a:buFont typeface="Arial" panose="020B0604020202020204"/>
+              <a:buChar char="◦"/>
+            </a:pPr>
+            <a:r>
+              <a:rPr lang="zh-CN" altLang="en-US" sz="1600">
+                <a:latin typeface="微软雅黑" panose="020B0503020204020204" charset="-122"/>
+                <a:ea typeface="微软雅黑" panose="020B0503020204020204" charset="-122"/>
+                <a:cs typeface="微软雅黑" panose="020B0503020204020204" charset="-122"/>
+                <a:sym typeface="+mn-ea"/>
+              </a:rPr>
+              <a:t>看图说话：你可以发给我一张图片，我会告诉你里面是什么内容。</a:t>
+            </a:r>
+            <a:endParaRPr lang="zh-CN" altLang="en-US" sz="1600" b="0" i="0">
+              <a:solidFill>
+                <a:schemeClr val="tx1"/>
+              </a:solidFill>
+              <a:latin typeface="微软雅黑" panose="020B0503020204020204" charset="-122"/>
+              <a:ea typeface="微软雅黑" panose="020B0503020204020204" charset="-122"/>
+              <a:cs typeface="微软雅黑" panose="020B0503020204020204" charset="-122"/>
+            </a:endParaRPr>
+          </a:p>
+          <a:p>
+            <a:pPr marL="0" lvl="1" indent="0">
+              <a:spcBef>
+                <a:spcPct val="0"/>
+              </a:spcBef>
+              <a:spcAft>
+                <a:spcPct val="0"/>
+              </a:spcAft>
+              <a:buFont typeface="Arial" panose="020B0604020202020204"/>
+              <a:buChar char="◦"/>
+            </a:pPr>
+            <a:endParaRPr lang="zh-CN" altLang="en-US" sz="1600">
+              <a:latin typeface="微软雅黑" panose="020B0503020204020204" charset="-122"/>
+              <a:ea typeface="微软雅黑" panose="020B0503020204020204" charset="-122"/>
+              <a:cs typeface="微软雅黑" panose="020B0503020204020204" charset="-122"/>
+              <a:sym typeface="+mn-ea"/>
+            </a:endParaRPr>
           </a:p>
         </p:txBody>
       </p:sp>
@@ -11207,7 +11845,7 @@
 </file>
 
 <file path=ppt/slides/slide20.xml><?xml version="1.0" encoding="utf-8"?>
-<p:sld xmlns:a="http://schemas.openxmlformats.org/drawingml/2006/main" xmlns:p="http://schemas.openxmlformats.org/presentationml/2006/main" xmlns:r="http://schemas.openxmlformats.org/officeDocument/2006/relationships">
+<p:sld xmlns:a="http://schemas.openxmlformats.org/drawingml/2006/main" xmlns:r="http://schemas.openxmlformats.org/officeDocument/2006/relationships" xmlns:p="http://schemas.openxmlformats.org/presentationml/2006/main">
   <p:cSld>
     <p:spTree>
       <p:nvGrpSpPr>
@@ -11287,8 +11925,13 @@
                   <a:srgbClr val="1F3A5F"/>
                 </a:solidFill>
               </a:rPr>
-              <a:t>LLM 三层自动回退链（主 → 本地 → 确定性脑）</a:t>
-            </a:r>
+              <a:t>miniyu 系统设计总览：配置化 + 分层架构</a:t>
+            </a:r>
+            <a:endParaRPr sz="3000" b="1">
+              <a:solidFill>
+                <a:srgbClr val="1F3A5F"/>
+              </a:solidFill>
+            </a:endParaRPr>
           </a:p>
         </p:txBody>
       </p:sp>
@@ -11344,7 +11987,7 @@
         <p:spPr>
           <a:xfrm>
             <a:off x="640080" y="1371600"/>
-            <a:ext cx="10911205" cy="5029200"/>
+            <a:ext cx="10911205" cy="4030980"/>
           </a:xfrm>
           <a:prstGeom prst="rect">
             <a:avLst/>
@@ -11363,13 +12006,18 @@
               </a:spcAft>
             </a:pPr>
             <a:r>
-              <a:rPr sz="1600" b="1">
+              <a:rPr sz="2400" b="1">
                 <a:solidFill>
                   <a:srgbClr val="333333"/>
                 </a:solidFill>
               </a:rPr>
-              <a:t>◆ 第 1 层（主）</a:t>
-            </a:r>
+              <a:t>◆ 配置化设计（不写死，改配置即变更）</a:t>
+            </a:r>
+            <a:endParaRPr sz="2400" b="1">
+              <a:solidFill>
+                <a:srgbClr val="333333"/>
+              </a:solidFill>
+            </a:endParaRPr>
           </a:p>
           <a:p>
             <a:pPr>
@@ -11378,13 +12026,18 @@
               </a:spcAft>
             </a:pPr>
             <a:r>
-              <a:rPr sz="1500">
+              <a:rPr sz="2400">
                 <a:solidFill>
                   <a:srgbClr val="333333"/>
                 </a:solidFill>
               </a:rPr>
-              <a:t>  任意 OpenAI 兼容 API：阿里百炼 qwen / DeepSeek / 豆包…  function-calling 驱动 59 工具 + 26 技能</a:t>
-            </a:r>
+              <a:t>  config.yaml：LLM 提供商 / 模型 / 授权档位 / 联网开关 / 协调层 / 邮件,全部可调；模板为 config.yaml.example（不含任何个人密钥）</a:t>
+            </a:r>
+            <a:endParaRPr sz="2400">
+              <a:solidFill>
+                <a:srgbClr val="333333"/>
+              </a:solidFill>
+            </a:endParaRPr>
           </a:p>
           <a:p>
             <a:pPr>
@@ -11393,13 +12046,18 @@
               </a:spcAft>
             </a:pPr>
             <a:r>
-              <a:rPr sz="1600" b="1">
+              <a:rPr sz="2400">
                 <a:solidFill>
                   <a:srgbClr val="333333"/>
                 </a:solidFill>
               </a:rPr>
-              <a:t>◆ 第 2 层（降级）</a:t>
-            </a:r>
+              <a:t>  优先级：环境变量 &gt; config.yaml &gt; 内置默认值</a:t>
+            </a:r>
+            <a:endParaRPr sz="2400">
+              <a:solidFill>
+                <a:srgbClr val="333333"/>
+              </a:solidFill>
+            </a:endParaRPr>
           </a:p>
           <a:p>
             <a:pPr>
@@ -11408,13 +12066,18 @@
               </a:spcAft>
             </a:pPr>
             <a:r>
-              <a:rPr sz="1500">
+              <a:rPr sz="2400" b="1">
                 <a:solidFill>
                   <a:srgbClr val="333333"/>
                 </a:solidFill>
               </a:rPr>
-              <a:t>  主 API 超时/鉴权失败/断网时自动切本地 Ollama（localhost），恢复后每 5 分钟自动重试主 API</a:t>
-            </a:r>
+              <a:t>◆ 分层架构</a:t>
+            </a:r>
+            <a:endParaRPr sz="2400" b="1">
+              <a:solidFill>
+                <a:srgbClr val="333333"/>
+              </a:solidFill>
+            </a:endParaRPr>
           </a:p>
           <a:p>
             <a:pPr>
@@ -11423,13 +12086,18 @@
               </a:spcAft>
             </a:pPr>
             <a:r>
-              <a:rPr sz="1500">
+              <a:rPr sz="2400">
                 <a:solidFill>
                   <a:srgbClr val="333333"/>
                 </a:solidFill>
               </a:rPr>
-              <a:t>  本地小模型走 tool_free 纯对话模式（不带几十个工具 schema，省 CPU 解析数十秒）</a:t>
-            </a:r>
+              <a:t>  第1组 AI Shell/HostAgent（意图）→ 第5组 协调+安全 → 第2组 规划 → 第3组 执行 → 第4组 工具/技能</a:t>
+            </a:r>
+            <a:endParaRPr sz="2400">
+              <a:solidFill>
+                <a:srgbClr val="333333"/>
+              </a:solidFill>
+            </a:endParaRPr>
           </a:p>
           <a:p>
             <a:pPr>
@@ -11438,13 +12106,18 @@
               </a:spcAft>
             </a:pPr>
             <a:r>
-              <a:rPr sz="1600" b="1">
+              <a:rPr sz="2400">
                 <a:solidFill>
                   <a:srgbClr val="333333"/>
                 </a:solidFill>
               </a:rPr>
-              <a:t>◆ 第 3 层（兜底）</a:t>
-            </a:r>
+              <a:t>  数据流 1→5→2→3→4，第4组统一输出 tool_result_json</a:t>
+            </a:r>
+            <a:endParaRPr sz="2400">
+              <a:solidFill>
+                <a:srgbClr val="333333"/>
+              </a:solidFill>
+            </a:endParaRPr>
           </a:p>
           <a:p>
             <a:pPr>
@@ -11453,28 +12126,18 @@
               </a:spcAft>
             </a:pPr>
             <a:r>
-              <a:rPr sz="1500">
+              <a:rPr sz="2400" b="1">
                 <a:solidFill>
                   <a:srgbClr val="333333"/>
                 </a:solidFill>
               </a:rPr>
-              <a:t>  确定性脑 DeterministicBrain：纯规则、零依赖、无需网络/API key，离线也能完整演示全流程</a:t>
-            </a:r>
-          </a:p>
-          <a:p>
-            <a:pPr>
-              <a:spcAft>
-                <a:spcPts val="800"/>
-              </a:spcAft>
-            </a:pPr>
-            <a:r>
-              <a:rPr sz="1500">
-                <a:solidFill>
-                  <a:srgbClr val="333333"/>
-                </a:solidFill>
-              </a:rPr>
-              <a:t>  模型支持运行时热切换 + Web 下拉 + force_local_mode()</a:t>
-            </a:r>
+              <a:t>◆ OS 原理落地：持久性(文件系统/目录管理) 由第4组工具层直接承载</a:t>
+            </a:r>
+            <a:endParaRPr sz="2400" b="1">
+              <a:solidFill>
+                <a:srgbClr val="333333"/>
+              </a:solidFill>
+            </a:endParaRPr>
           </a:p>
         </p:txBody>
       </p:sp>
@@ -11487,7 +12150,7 @@
 </file>
 
 <file path=ppt/slides/slide21.xml><?xml version="1.0" encoding="utf-8"?>
-<p:sld xmlns:a="http://schemas.openxmlformats.org/drawingml/2006/main" xmlns:p="http://schemas.openxmlformats.org/presentationml/2006/main" xmlns:r="http://schemas.openxmlformats.org/officeDocument/2006/relationships">
+<p:sld xmlns:a="http://schemas.openxmlformats.org/drawingml/2006/main" xmlns:r="http://schemas.openxmlformats.org/officeDocument/2006/relationships" xmlns:p="http://schemas.openxmlformats.org/presentationml/2006/main">
   <p:cSld>
     <p:spTree>
       <p:nvGrpSpPr>
@@ -11567,8 +12230,13 @@
                   <a:srgbClr val="1F3A5F"/>
                 </a:solidFill>
               </a:rPr>
-              <a:t>Web 交互设计：流式 + 折叠面板 + 主题</a:t>
-            </a:r>
+              <a:t>LLM 三层自动回退链（主 → 本地 → 确定性脑）</a:t>
+            </a:r>
+            <a:endParaRPr sz="3000" b="1">
+              <a:solidFill>
+                <a:srgbClr val="1F3A5F"/>
+              </a:solidFill>
+            </a:endParaRPr>
           </a:p>
         </p:txBody>
       </p:sp>
@@ -11624,7 +12292,7 @@
         <p:spPr>
           <a:xfrm>
             <a:off x="640080" y="1371600"/>
-            <a:ext cx="10911205" cy="5029200"/>
+            <a:ext cx="10911205" cy="5241290"/>
           </a:xfrm>
           <a:prstGeom prst="rect">
             <a:avLst/>
@@ -11643,13 +12311,18 @@
               </a:spcAft>
             </a:pPr>
             <a:r>
-              <a:rPr sz="1600" b="1">
+              <a:rPr sz="2400" b="1">
                 <a:solidFill>
                   <a:srgbClr val="333333"/>
                 </a:solidFill>
               </a:rPr>
-              <a:t>◆ SSE 实时流式</a:t>
-            </a:r>
+              <a:t>◆ 第 1 层（主）</a:t>
+            </a:r>
+            <a:endParaRPr sz="2400" b="1">
+              <a:solidFill>
+                <a:srgbClr val="333333"/>
+              </a:solidFill>
+            </a:endParaRPr>
           </a:p>
           <a:p>
             <a:pPr>
@@ -11658,13 +12331,18 @@
               </a:spcAft>
             </a:pPr>
             <a:r>
-              <a:rPr sz="1500">
+              <a:rPr sz="2400">
                 <a:solidFill>
                   <a:srgbClr val="333333"/>
                 </a:solidFill>
               </a:rPr>
-              <a:t>  /chat 立即返 task_id → 后台 run_stream 逐 chunk 入队 → /task/&lt;id&gt;/events 推送</a:t>
-            </a:r>
+              <a:t>  任意 OpenAI 兼容 API：阿里百炼 qwen / DeepSeek / 豆包…  function-calling 驱动 59 工具 + 26 技能</a:t>
+            </a:r>
+            <a:endParaRPr sz="2400">
+              <a:solidFill>
+                <a:srgbClr val="333333"/>
+              </a:solidFill>
+            </a:endParaRPr>
           </a:p>
           <a:p>
             <a:pPr>
@@ -11673,13 +12351,18 @@
               </a:spcAft>
             </a:pPr>
             <a:r>
-              <a:rPr sz="1500">
+              <a:rPr sz="2400" b="1">
                 <a:solidFill>
                   <a:srgbClr val="333333"/>
                 </a:solidFill>
               </a:rPr>
-              <a:t>  reasoning/token/tool_call/confirm/done + 15s 心跳</a:t>
-            </a:r>
+              <a:t>◆ 第 2 层（降级）</a:t>
+            </a:r>
+            <a:endParaRPr sz="2400" b="1">
+              <a:solidFill>
+                <a:srgbClr val="333333"/>
+              </a:solidFill>
+            </a:endParaRPr>
           </a:p>
           <a:p>
             <a:pPr>
@@ -11688,13 +12371,18 @@
               </a:spcAft>
             </a:pPr>
             <a:r>
-              <a:rPr sz="1600" b="1">
+              <a:rPr sz="2400">
                 <a:solidFill>
                   <a:srgbClr val="333333"/>
                 </a:solidFill>
               </a:rPr>
-              <a:t>◆ DeepSeek 式折叠</a:t>
-            </a:r>
+              <a:t>  主 API 超时/鉴权失败/断网时自动切本地 Ollama（localhost），恢复后每 5 分钟自动重试主 API</a:t>
+            </a:r>
+            <a:endParaRPr sz="2400">
+              <a:solidFill>
+                <a:srgbClr val="333333"/>
+              </a:solidFill>
+            </a:endParaRPr>
           </a:p>
           <a:p>
             <a:pPr>
@@ -11703,13 +12391,18 @@
               </a:spcAft>
             </a:pPr>
             <a:r>
-              <a:rPr sz="1500">
+              <a:rPr sz="2400">
                 <a:solidFill>
                   <a:srgbClr val="333333"/>
                 </a:solidFill>
               </a:rPr>
-              <a:t>  思考完成折叠「已深度思考(用时 Xs)」；工具调用折叠「工具调用(N 个)」，限高 260px 内部滚动</a:t>
-            </a:r>
+              <a:t>  本地小模型走 tool_free 纯对话模式（不带几十个工具 schema，省 CPU 解析数十秒）</a:t>
+            </a:r>
+            <a:endParaRPr sz="2400">
+              <a:solidFill>
+                <a:srgbClr val="333333"/>
+              </a:solidFill>
+            </a:endParaRPr>
           </a:p>
           <a:p>
             <a:pPr>
@@ -11718,13 +12411,18 @@
               </a:spcAft>
             </a:pPr>
             <a:r>
-              <a:rPr sz="1500">
+              <a:rPr sz="2400" b="1">
                 <a:solidFill>
                   <a:srgbClr val="333333"/>
                 </a:solidFill>
               </a:rPr>
-              <a:t>  红色「⏹ 停止」按钮可打断死循环/超长输出（两层 stop_check + 幂等断电点）</a:t>
-            </a:r>
+              <a:t>◆ 第 3 层（兜底）</a:t>
+            </a:r>
+            <a:endParaRPr sz="2400" b="1">
+              <a:solidFill>
+                <a:srgbClr val="333333"/>
+              </a:solidFill>
+            </a:endParaRPr>
           </a:p>
           <a:p>
             <a:pPr>
@@ -11733,13 +12431,18 @@
               </a:spcAft>
             </a:pPr>
             <a:r>
-              <a:rPr sz="1600" b="1">
+              <a:rPr sz="2400">
                 <a:solidFill>
                   <a:srgbClr val="333333"/>
                 </a:solidFill>
               </a:rPr>
-              <a:t>◆ 主题 + 语音</a:t>
-            </a:r>
+              <a:t>  确定性脑 DeterministicBrain：纯规则、零依赖、无需网络/API key，离线也能完整演示全流程</a:t>
+            </a:r>
+            <a:endParaRPr sz="2400">
+              <a:solidFill>
+                <a:srgbClr val="333333"/>
+              </a:solidFill>
+            </a:endParaRPr>
           </a:p>
           <a:p>
             <a:pPr>
@@ -11748,13 +12451,18 @@
               </a:spcAft>
             </a:pPr>
             <a:r>
-              <a:rPr sz="1500">
+              <a:rPr sz="2400">
                 <a:solidFill>
                   <a:srgbClr val="333333"/>
                 </a:solidFill>
               </a:rPr>
-              <a:t>  深/浅色 CSS 变量切换 + localStorage 记忆 + 首帧防闪烁；语音用 Web Speech API（Chrome/Edge），连续监听不漏字</a:t>
-            </a:r>
+              <a:t>  模型支持运行时热切换 + Web 下拉 + force_local_mode()</a:t>
+            </a:r>
+            <a:endParaRPr sz="2400">
+              <a:solidFill>
+                <a:srgbClr val="333333"/>
+              </a:solidFill>
+            </a:endParaRPr>
           </a:p>
         </p:txBody>
       </p:sp>
@@ -11767,7 +12475,7 @@
 </file>
 
 <file path=ppt/slides/slide22.xml><?xml version="1.0" encoding="utf-8"?>
-<p:sld xmlns:a="http://schemas.openxmlformats.org/drawingml/2006/main" xmlns:p="http://schemas.openxmlformats.org/presentationml/2006/main" xmlns:r="http://schemas.openxmlformats.org/officeDocument/2006/relationships">
+<p:sld xmlns:a="http://schemas.openxmlformats.org/drawingml/2006/main" xmlns:r="http://schemas.openxmlformats.org/officeDocument/2006/relationships" xmlns:p="http://schemas.openxmlformats.org/presentationml/2006/main">
   <p:cSld>
     <p:spTree>
       <p:nvGrpSpPr>
@@ -11847,8 +12555,13 @@
                   <a:srgbClr val="1F3A5F"/>
                 </a:solidFill>
               </a:rPr>
-              <a:t>授权档位 + 四层安全（base/advanced/full + 沙箱）</a:t>
-            </a:r>
+              <a:t>Web 交互设计：流式 + 折叠面板 + 主题</a:t>
+            </a:r>
+            <a:endParaRPr sz="3000" b="1">
+              <a:solidFill>
+                <a:srgbClr val="1F3A5F"/>
+              </a:solidFill>
+            </a:endParaRPr>
           </a:p>
         </p:txBody>
       </p:sp>
@@ -11904,7 +12617,7 @@
         <p:spPr>
           <a:xfrm>
             <a:off x="640080" y="1371600"/>
-            <a:ext cx="10911205" cy="5029200"/>
+            <a:ext cx="10911205" cy="4502785"/>
           </a:xfrm>
           <a:prstGeom prst="rect">
             <a:avLst/>
@@ -11923,13 +12636,18 @@
               </a:spcAft>
             </a:pPr>
             <a:r>
-              <a:rPr sz="1600" b="1">
+              <a:rPr sz="2400" b="1">
                 <a:solidFill>
                   <a:srgbClr val="333333"/>
                 </a:solidFill>
               </a:rPr>
-              <a:t>◆ 统一安全模型</a:t>
-            </a:r>
+              <a:t>◆ SSE 实时流式</a:t>
+            </a:r>
+            <a:endParaRPr sz="2400" b="1">
+              <a:solidFill>
+                <a:srgbClr val="333333"/>
+              </a:solidFill>
+            </a:endParaRPr>
           </a:p>
           <a:p>
             <a:pPr>
@@ -11938,13 +12656,18 @@
               </a:spcAft>
             </a:pPr>
             <a:r>
-              <a:rPr sz="1500">
+              <a:rPr sz="2400">
                 <a:solidFill>
                   <a:srgbClr val="333333"/>
                 </a:solidFill>
               </a:rPr>
-              <a:t>  网络安全总开关 web_search（开/关一切联网能力）+ 三档授权 agent.authorization</a:t>
-            </a:r>
+              <a:t>  /chat 立即返 task_id → 后台 run_stream 逐 chunk 入队 → /task/&lt;id&gt;/events 推送</a:t>
+            </a:r>
+            <a:endParaRPr sz="2400">
+              <a:solidFill>
+                <a:srgbClr val="333333"/>
+              </a:solidFill>
+            </a:endParaRPr>
           </a:p>
           <a:p>
             <a:pPr>
@@ -11953,13 +12676,18 @@
               </a:spcAft>
             </a:pPr>
             <a:r>
-              <a:rPr sz="1600" b="1">
+              <a:rPr sz="2400">
                 <a:solidFill>
                   <a:srgbClr val="333333"/>
                 </a:solidFill>
               </a:rPr>
-              <a:t>◆ 三档授权</a:t>
-            </a:r>
+              <a:t>  reasoning/token/tool_call/confirm/done + 15s 心跳</a:t>
+            </a:r>
+            <a:endParaRPr sz="2400">
+              <a:solidFill>
+                <a:srgbClr val="333333"/>
+              </a:solidFill>
+            </a:endParaRPr>
           </a:p>
           <a:p>
             <a:pPr>
@@ -11968,13 +12696,18 @@
               </a:spcAft>
             </a:pPr>
             <a:r>
-              <a:rPr sz="1500">
+              <a:rPr sz="2400" b="1">
                 <a:solidFill>
                   <a:srgbClr val="333333"/>
                 </a:solidFill>
               </a:rPr>
-              <a:t>  base 基础授权：全部高危操作需确认；advanced 高级授权：仅永久删除文件需确认；full 全自动：从不确认(含删除)</a:t>
-            </a:r>
+              <a:t>◆ DeepSeek 式折叠</a:t>
+            </a:r>
+            <a:endParaRPr sz="2400" b="1">
+              <a:solidFill>
+                <a:srgbClr val="333333"/>
+              </a:solidFill>
+            </a:endParaRPr>
           </a:p>
           <a:p>
             <a:pPr>
@@ -11983,13 +12716,18 @@
               </a:spcAft>
             </a:pPr>
             <a:r>
-              <a:rPr sz="1500">
+              <a:rPr sz="2400">
                 <a:solidFill>
                   <a:srgbClr val="333333"/>
                 </a:solidFill>
               </a:rPr>
-              <a:t>  Web 顶栏下拉可运行时切换</a:t>
-            </a:r>
+              <a:t>  思考完成折叠「已深度思考(用时 Xs)」；工具调用折叠「工具调用(N 个)」，限高 260px 内部滚动</a:t>
+            </a:r>
+            <a:endParaRPr sz="2400">
+              <a:solidFill>
+                <a:srgbClr val="333333"/>
+              </a:solidFill>
+            </a:endParaRPr>
           </a:p>
           <a:p>
             <a:pPr>
@@ -11998,13 +12736,18 @@
               </a:spcAft>
             </a:pPr>
             <a:r>
-              <a:rPr sz="1600" b="1">
+              <a:rPr sz="2400">
                 <a:solidFill>
                   <a:srgbClr val="333333"/>
                 </a:solidFill>
               </a:rPr>
-              <a:t>◆ 危险指令硬拦截（SafetySandbox 接入执行链）</a:t>
-            </a:r>
+              <a:t>  红色「⏹ 停止」按钮可打断死循环/超长输出（两层 stop_check + 幂等断电点）</a:t>
+            </a:r>
+            <a:endParaRPr sz="2400">
+              <a:solidFill>
+                <a:srgbClr val="333333"/>
+              </a:solidFill>
+            </a:endParaRPr>
           </a:p>
           <a:p>
             <a:pPr>
@@ -12013,13 +12756,18 @@
               </a:spcAft>
             </a:pPr>
             <a:r>
-              <a:rPr sz="1500">
+              <a:rPr sz="2400" b="1">
                 <a:solidFill>
                   <a:srgbClr val="333333"/>
                 </a:solidFill>
               </a:rPr>
-              <a:t>  rm/format/shutdown/dd/mkfs/fdisk/Stop-Computer 等 → 绕过确认门直接拒绝</a:t>
-            </a:r>
+              <a:t>◆ 主题 + 语音</a:t>
+            </a:r>
+            <a:endParaRPr sz="2400" b="1">
+              <a:solidFill>
+                <a:srgbClr val="333333"/>
+              </a:solidFill>
+            </a:endParaRPr>
           </a:p>
           <a:p>
             <a:pPr>
@@ -12028,13 +12776,18 @@
               </a:spcAft>
             </a:pPr>
             <a:r>
-              <a:rPr sz="1500">
+              <a:rPr sz="2400">
                 <a:solidFill>
                   <a:srgbClr val="333333"/>
                 </a:solidFill>
               </a:rPr>
-              <a:t>  实测：shutdown 不再弹确认窗即被拦截；正常操作不受影响（552 测试全绿）</a:t>
-            </a:r>
+              <a:t>  深/浅色 CSS 变量切换 + localStorage 记忆 + 首帧防闪烁；语音用 Web Speech API（Chrome/Edge），连续监听不漏字</a:t>
+            </a:r>
+            <a:endParaRPr sz="2400">
+              <a:solidFill>
+                <a:srgbClr val="333333"/>
+              </a:solidFill>
+            </a:endParaRPr>
           </a:p>
         </p:txBody>
       </p:sp>
@@ -12047,7 +12800,7 @@
 </file>
 
 <file path=ppt/slides/slide23.xml><?xml version="1.0" encoding="utf-8"?>
-<p:sld xmlns:a="http://schemas.openxmlformats.org/drawingml/2006/main" xmlns:p="http://schemas.openxmlformats.org/presentationml/2006/main" xmlns:r="http://schemas.openxmlformats.org/officeDocument/2006/relationships">
+<p:sld xmlns:a="http://schemas.openxmlformats.org/drawingml/2006/main" xmlns:r="http://schemas.openxmlformats.org/officeDocument/2006/relationships" xmlns:p="http://schemas.openxmlformats.org/presentationml/2006/main">
   <p:cSld>
     <p:spTree>
       <p:nvGrpSpPr>
@@ -12127,8 +12880,13 @@
                   <a:srgbClr val="1F3A5F"/>
                 </a:solidFill>
               </a:rPr>
-              <a:t>可移植性与密钥安全（Windows/Linux 双平台）</a:t>
-            </a:r>
+              <a:t>授权档位 + 四层安全（base/advanced/full + 沙箱）</a:t>
+            </a:r>
+            <a:endParaRPr sz="3000" b="1">
+              <a:solidFill>
+                <a:srgbClr val="1F3A5F"/>
+              </a:solidFill>
+            </a:endParaRPr>
           </a:p>
         </p:txBody>
       </p:sp>
@@ -12184,7 +12942,7 @@
         <p:spPr>
           <a:xfrm>
             <a:off x="640080" y="1371600"/>
-            <a:ext cx="10911205" cy="5029200"/>
+            <a:ext cx="10911205" cy="4502785"/>
           </a:xfrm>
           <a:prstGeom prst="rect">
             <a:avLst/>
@@ -12203,13 +12961,359 @@
               </a:spcAft>
             </a:pPr>
             <a:r>
-              <a:rPr sz="1600" b="1">
+              <a:rPr sz="2400" b="1">
                 <a:solidFill>
                   <a:srgbClr val="333333"/>
                 </a:solidFill>
               </a:rPr>
+              <a:t>◆ 统一安全模型</a:t>
+            </a:r>
+            <a:endParaRPr sz="2400" b="1">
+              <a:solidFill>
+                <a:srgbClr val="333333"/>
+              </a:solidFill>
+            </a:endParaRPr>
+          </a:p>
+          <a:p>
+            <a:pPr>
+              <a:spcAft>
+                <a:spcPts val="800"/>
+              </a:spcAft>
+            </a:pPr>
+            <a:r>
+              <a:rPr sz="2400">
+                <a:solidFill>
+                  <a:srgbClr val="333333"/>
+                </a:solidFill>
+              </a:rPr>
+              <a:t>  网络安全总开关 web_search（开/关一切联网能力）+ 三档授权 agent.authorization</a:t>
+            </a:r>
+            <a:endParaRPr sz="2400">
+              <a:solidFill>
+                <a:srgbClr val="333333"/>
+              </a:solidFill>
+            </a:endParaRPr>
+          </a:p>
+          <a:p>
+            <a:pPr>
+              <a:spcAft>
+                <a:spcPts val="800"/>
+              </a:spcAft>
+            </a:pPr>
+            <a:r>
+              <a:rPr sz="2400" b="1">
+                <a:solidFill>
+                  <a:srgbClr val="333333"/>
+                </a:solidFill>
+              </a:rPr>
+              <a:t>◆ 三档授权</a:t>
+            </a:r>
+            <a:endParaRPr sz="2400" b="1">
+              <a:solidFill>
+                <a:srgbClr val="333333"/>
+              </a:solidFill>
+            </a:endParaRPr>
+          </a:p>
+          <a:p>
+            <a:pPr>
+              <a:spcAft>
+                <a:spcPts val="800"/>
+              </a:spcAft>
+            </a:pPr>
+            <a:r>
+              <a:rPr sz="2400">
+                <a:solidFill>
+                  <a:srgbClr val="333333"/>
+                </a:solidFill>
+              </a:rPr>
+              <a:t>  base 基础授权：全部高危操作需确认；advanced 高级授权：仅永久删除文件需确认</a:t>
+            </a:r>
+            <a:r>
+              <a:rPr lang="zh-CN" sz="2400">
+                <a:solidFill>
+                  <a:srgbClr val="333333"/>
+                </a:solidFill>
+              </a:rPr>
+              <a:t>和危及用户正常使用的操作禁止</a:t>
+            </a:r>
+            <a:r>
+              <a:rPr sz="2400">
+                <a:solidFill>
+                  <a:srgbClr val="333333"/>
+                </a:solidFill>
+              </a:rPr>
+              <a:t>；full 全自动：从不确认(含删除)</a:t>
+            </a:r>
+            <a:endParaRPr sz="2400">
+              <a:solidFill>
+                <a:srgbClr val="333333"/>
+              </a:solidFill>
+            </a:endParaRPr>
+          </a:p>
+          <a:p>
+            <a:pPr>
+              <a:spcAft>
+                <a:spcPts val="800"/>
+              </a:spcAft>
+            </a:pPr>
+            <a:r>
+              <a:rPr sz="2400">
+                <a:solidFill>
+                  <a:srgbClr val="333333"/>
+                </a:solidFill>
+              </a:rPr>
+              <a:t>  Web 顶栏下拉可运行时切换</a:t>
+            </a:r>
+            <a:endParaRPr sz="2400">
+              <a:solidFill>
+                <a:srgbClr val="333333"/>
+              </a:solidFill>
+            </a:endParaRPr>
+          </a:p>
+          <a:p>
+            <a:pPr>
+              <a:spcAft>
+                <a:spcPts val="800"/>
+              </a:spcAft>
+            </a:pPr>
+            <a:r>
+              <a:rPr sz="2400" b="1">
+                <a:solidFill>
+                  <a:srgbClr val="333333"/>
+                </a:solidFill>
+              </a:rPr>
+              <a:t>◆ 危险指令硬拦截（SafetySandbox 接入执行链）</a:t>
+            </a:r>
+            <a:endParaRPr sz="2400" b="1">
+              <a:solidFill>
+                <a:srgbClr val="333333"/>
+              </a:solidFill>
+            </a:endParaRPr>
+          </a:p>
+          <a:p>
+            <a:pPr>
+              <a:spcAft>
+                <a:spcPts val="800"/>
+              </a:spcAft>
+            </a:pPr>
+            <a:r>
+              <a:rPr sz="2400">
+                <a:solidFill>
+                  <a:srgbClr val="333333"/>
+                </a:solidFill>
+              </a:rPr>
+              <a:t>  rm/format/shutdown/dd/mkfs/fdisk/Stop-Computer 等 → 绕过确认门直接拒绝</a:t>
+            </a:r>
+            <a:endParaRPr sz="2400">
+              <a:solidFill>
+                <a:srgbClr val="333333"/>
+              </a:solidFill>
+            </a:endParaRPr>
+          </a:p>
+          <a:p>
+            <a:pPr>
+              <a:spcAft>
+                <a:spcPts val="800"/>
+              </a:spcAft>
+            </a:pPr>
+            <a:r>
+              <a:rPr sz="2400">
+                <a:solidFill>
+                  <a:srgbClr val="333333"/>
+                </a:solidFill>
+              </a:rPr>
+              <a:t>  实测：shutdown 不再弹确认窗即被拦截；正常操作不受影响（558 测试全绿）</a:t>
+            </a:r>
+            <a:endParaRPr sz="2400">
+              <a:solidFill>
+                <a:srgbClr val="333333"/>
+              </a:solidFill>
+            </a:endParaRPr>
+          </a:p>
+        </p:txBody>
+      </p:sp>
+    </p:spTree>
+  </p:cSld>
+  <p:clrMapOvr>
+    <a:masterClrMapping/>
+  </p:clrMapOvr>
+</p:sld>
+</file>
+
+<file path=ppt/slides/slide24.xml><?xml version="1.0" encoding="utf-8"?>
+<p:sld xmlns:a="http://schemas.openxmlformats.org/drawingml/2006/main" xmlns:r="http://schemas.openxmlformats.org/officeDocument/2006/relationships" xmlns:p="http://schemas.openxmlformats.org/presentationml/2006/main">
+  <p:cSld>
+    <p:spTree>
+      <p:nvGrpSpPr>
+        <p:cNvPr id="1" name=""/>
+        <p:cNvGrpSpPr/>
+        <p:nvPr/>
+      </p:nvGrpSpPr>
+      <p:grpSpPr/>
+      <p:sp>
+        <p:nvSpPr>
+          <p:cNvPr id="2" name="Rectangle 1"/>
+          <p:cNvSpPr/>
+          <p:nvPr/>
+        </p:nvSpPr>
+        <p:spPr>
+          <a:xfrm>
+            <a:off x="0" y="6711696"/>
+            <a:ext cx="12191365" cy="146304"/>
+          </a:xfrm>
+          <a:prstGeom prst="rect">
+            <a:avLst/>
+          </a:prstGeom>
+          <a:solidFill>
+            <a:srgbClr val="EEF2F6"/>
+          </a:solidFill>
+          <a:ln>
+            <a:noFill/>
+          </a:ln>
+        </p:spPr>
+        <p:style>
+          <a:lnRef idx="1">
+            <a:schemeClr val="accent1"/>
+          </a:lnRef>
+          <a:fillRef idx="3">
+            <a:schemeClr val="accent1"/>
+          </a:fillRef>
+          <a:effectRef idx="2">
+            <a:schemeClr val="accent1"/>
+          </a:effectRef>
+          <a:fontRef idx="minor">
+            <a:schemeClr val="lt1"/>
+          </a:fontRef>
+        </p:style>
+        <p:txBody>
+          <a:bodyPr rtlCol="0" anchor="ctr"/>
+          <a:lstStyle/>
+          <a:p>
+            <a:pPr algn="ctr"/>
+          </a:p>
+        </p:txBody>
+      </p:sp>
+      <p:sp>
+        <p:nvSpPr>
+          <p:cNvPr id="3" name="TextBox 2"/>
+          <p:cNvSpPr txBox="1"/>
+          <p:nvPr/>
+        </p:nvSpPr>
+        <p:spPr>
+          <a:xfrm>
+            <a:off x="548640" y="320040"/>
+            <a:ext cx="11094085" cy="650000"/>
+          </a:xfrm>
+          <a:prstGeom prst="rect">
+            <a:avLst/>
+          </a:prstGeom>
+          <a:noFill/>
+        </p:spPr>
+        <p:txBody>
+          <a:bodyPr wrap="square">
+            <a:spAutoFit/>
+          </a:bodyPr>
+          <a:lstStyle/>
+          <a:p>
+            <a:r>
+              <a:rPr sz="3000" b="1">
+                <a:solidFill>
+                  <a:srgbClr val="1F3A5F"/>
+                </a:solidFill>
+              </a:rPr>
+              <a:t>可移植性与密钥安全（Windows/Linux 双平台）</a:t>
+            </a:r>
+            <a:endParaRPr sz="3000" b="1">
+              <a:solidFill>
+                <a:srgbClr val="1F3A5F"/>
+              </a:solidFill>
+            </a:endParaRPr>
+          </a:p>
+        </p:txBody>
+      </p:sp>
+      <p:sp>
+        <p:nvSpPr>
+          <p:cNvPr id="4" name="Rectangle 3"/>
+          <p:cNvSpPr/>
+          <p:nvPr/>
+        </p:nvSpPr>
+        <p:spPr>
+          <a:xfrm>
+            <a:off x="548640" y="990600"/>
+            <a:ext cx="11094085" cy="27432"/>
+          </a:xfrm>
+          <a:prstGeom prst="rect">
+            <a:avLst/>
+          </a:prstGeom>
+          <a:solidFill>
+            <a:srgbClr val="E8743A"/>
+          </a:solidFill>
+          <a:ln>
+            <a:noFill/>
+          </a:ln>
+        </p:spPr>
+        <p:style>
+          <a:lnRef idx="1">
+            <a:schemeClr val="accent1"/>
+          </a:lnRef>
+          <a:fillRef idx="3">
+            <a:schemeClr val="accent1"/>
+          </a:fillRef>
+          <a:effectRef idx="2">
+            <a:schemeClr val="accent1"/>
+          </a:effectRef>
+          <a:fontRef idx="minor">
+            <a:schemeClr val="lt1"/>
+          </a:fontRef>
+        </p:style>
+        <p:txBody>
+          <a:bodyPr rtlCol="0" anchor="ctr"/>
+          <a:lstStyle/>
+          <a:p>
+            <a:pPr algn="ctr"/>
+          </a:p>
+        </p:txBody>
+      </p:sp>
+      <p:sp>
+        <p:nvSpPr>
+          <p:cNvPr id="5" name="TextBox 4"/>
+          <p:cNvSpPr txBox="1"/>
+          <p:nvPr/>
+        </p:nvSpPr>
+        <p:spPr>
+          <a:xfrm>
+            <a:off x="640080" y="1371600"/>
+            <a:ext cx="10911205" cy="4399915"/>
+          </a:xfrm>
+          <a:prstGeom prst="rect">
+            <a:avLst/>
+          </a:prstGeom>
+          <a:noFill/>
+        </p:spPr>
+        <p:txBody>
+          <a:bodyPr wrap="square">
+            <a:spAutoFit/>
+          </a:bodyPr>
+          <a:lstStyle/>
+          <a:p>
+            <a:pPr>
+              <a:spcAft>
+                <a:spcPts val="800"/>
+              </a:spcAft>
+            </a:pPr>
+            <a:r>
+              <a:rPr sz="2400" b="1">
+                <a:solidFill>
+                  <a:srgbClr val="333333"/>
+                </a:solidFill>
+              </a:rPr>
               <a:t>◆ 双平台同一套代码</a:t>
             </a:r>
+            <a:endParaRPr sz="2400" b="1">
+              <a:solidFill>
+                <a:srgbClr val="333333"/>
+              </a:solidFill>
+            </a:endParaRPr>
           </a:p>
           <a:p>
             <a:pPr>
@@ -12218,13 +13322,18 @@
               </a:spcAft>
             </a:pPr>
             <a:r>
-              <a:rPr sz="1500">
+              <a:rPr sz="2400">
                 <a:solidFill>
                   <a:srgbClr val="333333"/>
                 </a:solidFill>
               </a:rPr>
               <a:t>  相对路径 + pathlib + platform.system() 自动适配；app_controller 分 Windows/Linux；browser_controller 走跨平台 CDP</a:t>
             </a:r>
+            <a:endParaRPr sz="2400">
+              <a:solidFill>
+                <a:srgbClr val="333333"/>
+              </a:solidFill>
+            </a:endParaRPr>
           </a:p>
           <a:p>
             <a:pPr>
@@ -12233,13 +13342,18 @@
               </a:spcAft>
             </a:pPr>
             <a:r>
-              <a:rPr sz="1600" b="1">
+              <a:rPr sz="2400" b="1">
                 <a:solidFill>
                   <a:srgbClr val="333333"/>
                 </a:solidFill>
               </a:rPr>
               <a:t>◆ 密钥不入库</a:t>
             </a:r>
+            <a:endParaRPr sz="2400" b="1">
+              <a:solidFill>
+                <a:srgbClr val="333333"/>
+              </a:solidFill>
+            </a:endParaRPr>
           </a:p>
           <a:p>
             <a:pPr>
@@ -12248,13 +13362,18 @@
               </a:spcAft>
             </a:pPr>
             <a:r>
-              <a:rPr sz="1500">
+              <a:rPr sz="2400">
                 <a:solidFill>
                   <a:srgbClr val="333333"/>
                 </a:solidFill>
               </a:rPr>
               <a:t>  config.yaml（含真实 key/授权码）git skip-worktree 保护不入库；分发只带 config.yaml.example 空模板</a:t>
             </a:r>
+            <a:endParaRPr sz="2400">
+              <a:solidFill>
+                <a:srgbClr val="333333"/>
+              </a:solidFill>
+            </a:endParaRPr>
           </a:p>
           <a:p>
             <a:pPr>
@@ -12263,13 +13382,18 @@
               </a:spcAft>
             </a:pPr>
             <a:r>
-              <a:rPr sz="1500">
+              <a:rPr sz="2400">
                 <a:solidFill>
                   <a:srgbClr val="333333"/>
                 </a:solidFill>
               </a:rPr>
               <a:t>  Ubuntu 一键：setup_linux.sh 装依赖 + 生成配置 + 检测 Xorg/Wayland</a:t>
             </a:r>
+            <a:endParaRPr sz="2400">
+              <a:solidFill>
+                <a:srgbClr val="333333"/>
+              </a:solidFill>
+            </a:endParaRPr>
           </a:p>
           <a:p>
             <a:pPr>
@@ -12278,13 +13402,18 @@
               </a:spcAft>
             </a:pPr>
             <a:r>
-              <a:rPr sz="1600" b="1">
+              <a:rPr sz="2400" b="1">
                 <a:solidFill>
                   <a:srgbClr val="333333"/>
                 </a:solidFill>
               </a:rPr>
               <a:t>◆ 资源效率</a:t>
             </a:r>
+            <a:endParaRPr sz="2400" b="1">
+              <a:solidFill>
+                <a:srgbClr val="333333"/>
+              </a:solidFill>
+            </a:endParaRPr>
           </a:p>
           <a:p>
             <a:pPr>
@@ -12293,12 +13422,467 @@
               </a:spcAft>
             </a:pPr>
             <a:r>
-              <a:rPr sz="1500">
+              <a:rPr sz="2400">
                 <a:solidFill>
                   <a:srgbClr val="333333"/>
                 </a:solidFill>
               </a:rPr>
               <a:t>  工具结果超长截断(默认4000字符) + HTTP 连接池(省 TCP/TLS 握手) + 历史会话侧栏(最近访问排序)</a:t>
+            </a:r>
+            <a:endParaRPr sz="2400">
+              <a:solidFill>
+                <a:srgbClr val="333333"/>
+              </a:solidFill>
+            </a:endParaRPr>
+          </a:p>
+        </p:txBody>
+      </p:sp>
+    </p:spTree>
+  </p:cSld>
+  <p:clrMapOvr>
+    <a:masterClrMapping/>
+  </p:clrMapOvr>
+</p:sld>
+</file>
+
+<file path=ppt/slides/slide25.xml><?xml version="1.0" encoding="utf-8"?>
+<p:sld xmlns:a="http://schemas.openxmlformats.org/drawingml/2006/main" xmlns:r="http://schemas.openxmlformats.org/officeDocument/2006/relationships" xmlns:p="http://schemas.openxmlformats.org/presentationml/2006/main">
+  <p:cSld>
+    <p:spTree>
+      <p:nvGrpSpPr>
+        <p:cNvPr id="1" name=""/>
+        <p:cNvGrpSpPr/>
+        <p:nvPr/>
+      </p:nvGrpSpPr>
+      <p:grpSpPr/>
+      <p:sp>
+        <p:nvSpPr>
+          <p:cNvPr id="2" name="Rectangle 1"/>
+          <p:cNvSpPr/>
+          <p:nvPr/>
+        </p:nvSpPr>
+        <p:spPr>
+          <a:xfrm>
+            <a:off x="0" y="0"/>
+            <a:ext cx="12191695" cy="146304"/>
+          </a:xfrm>
+          <a:prstGeom prst="rect">
+            <a:avLst/>
+          </a:prstGeom>
+          <a:solidFill>
+            <a:srgbClr val="8B5CF6"/>
+          </a:solidFill>
+          <a:ln>
+            <a:noFill/>
+          </a:ln>
+          <a:effectLst/>
+        </p:spPr>
+        <p:style>
+          <a:lnRef idx="1">
+            <a:schemeClr val="accent1"/>
+          </a:lnRef>
+          <a:fillRef idx="3">
+            <a:schemeClr val="accent1"/>
+          </a:fillRef>
+          <a:effectRef idx="2">
+            <a:schemeClr val="accent1"/>
+          </a:effectRef>
+          <a:fontRef idx="minor">
+            <a:schemeClr val="lt1"/>
+          </a:fontRef>
+        </p:style>
+        <p:txBody>
+          <a:bodyPr rtlCol="0" anchor="ctr"/>
+          <a:lstStyle/>
+          <a:p>
+            <a:pPr algn="ctr"/>
+          </a:p>
+        </p:txBody>
+      </p:sp>
+      <p:sp>
+        <p:nvSpPr>
+          <p:cNvPr id="3" name="TextBox 2"/>
+          <p:cNvSpPr txBox="1"/>
+          <p:nvPr/>
+        </p:nvSpPr>
+        <p:spPr>
+          <a:xfrm>
+            <a:off x="548640" y="320040"/>
+            <a:ext cx="9144000" cy="553085"/>
+          </a:xfrm>
+          <a:prstGeom prst="rect">
+            <a:avLst/>
+          </a:prstGeom>
+          <a:noFill/>
+        </p:spPr>
+        <p:txBody>
+          <a:bodyPr wrap="square" anchor="t">
+            <a:spAutoFit/>
+          </a:bodyPr>
+          <a:lstStyle/>
+          <a:p>
+            <a:pPr algn="l">
+              <a:spcAft>
+                <a:spcPts val="400"/>
+              </a:spcAft>
+              <a:defRPr sz="3000" b="1">
+                <a:solidFill>
+                  <a:srgbClr val="1E293B"/>
+                </a:solidFill>
+                <a:latin typeface="微软雅黑" panose="020B0503020204020204" charset="-122"/>
+              </a:defRPr>
+            </a:pPr>
+            <a:r>
+              <a:rPr lang="en-US"/>
+              <a:t>12 </a:t>
+            </a:r>
+            <a:r>
+              <a:t>总结与展望</a:t>
+            </a:r>
+          </a:p>
+        </p:txBody>
+      </p:sp>
+      <p:sp>
+        <p:nvSpPr>
+          <p:cNvPr id="4" name="Rectangle 3"/>
+          <p:cNvSpPr/>
+          <p:nvPr/>
+        </p:nvSpPr>
+        <p:spPr>
+          <a:xfrm>
+            <a:off x="0" y="6711696"/>
+            <a:ext cx="12191695" cy="146304"/>
+          </a:xfrm>
+          <a:prstGeom prst="rect">
+            <a:avLst/>
+          </a:prstGeom>
+          <a:solidFill>
+            <a:srgbClr val="8B5CF6"/>
+          </a:solidFill>
+          <a:ln>
+            <a:noFill/>
+          </a:ln>
+          <a:effectLst/>
+        </p:spPr>
+        <p:style>
+          <a:lnRef idx="1">
+            <a:schemeClr val="accent1"/>
+          </a:lnRef>
+          <a:fillRef idx="3">
+            <a:schemeClr val="accent1"/>
+          </a:fillRef>
+          <a:effectRef idx="2">
+            <a:schemeClr val="accent1"/>
+          </a:effectRef>
+          <a:fontRef idx="minor">
+            <a:schemeClr val="lt1"/>
+          </a:fontRef>
+        </p:style>
+        <p:txBody>
+          <a:bodyPr rtlCol="0" anchor="ctr"/>
+          <a:lstStyle/>
+          <a:p>
+            <a:pPr algn="ctr"/>
+          </a:p>
+        </p:txBody>
+      </p:sp>
+      <p:sp>
+        <p:nvSpPr>
+          <p:cNvPr id="5" name="TextBox 4"/>
+          <p:cNvSpPr txBox="1"/>
+          <p:nvPr/>
+        </p:nvSpPr>
+        <p:spPr>
+          <a:xfrm>
+            <a:off x="321310" y="1758950"/>
+            <a:ext cx="11549380" cy="2348230"/>
+          </a:xfrm>
+          <a:prstGeom prst="rect">
+            <a:avLst/>
+          </a:prstGeom>
+          <a:noFill/>
+        </p:spPr>
+        <p:txBody>
+          <a:bodyPr wrap="square">
+            <a:spAutoFit/>
+          </a:bodyPr>
+          <a:lstStyle/>
+          <a:p>
+            <a:pPr>
+              <a:spcAft>
+                <a:spcPts val="800"/>
+              </a:spcAft>
+            </a:pPr>
+            <a:r>
+              <a:rPr sz="2000" b="1">
+                <a:solidFill>
+                  <a:srgbClr val="8B5CF6"/>
+                </a:solidFill>
+                <a:latin typeface="微软雅黑" panose="020B0503020204020204" charset="-122"/>
+              </a:rPr>
+              <a:t>▍已达成</a:t>
+            </a:r>
+            <a:r>
+              <a:rPr sz="2000">
+                <a:solidFill>
+                  <a:srgbClr val="1E293B"/>
+                </a:solidFill>
+                <a:latin typeface="微软雅黑" panose="020B0503020204020204" charset="-122"/>
+              </a:rPr>
+              <a:t>  59 工具 + 26 技能 + 558 测试全绿 + 6 演示场景全覆盖 + 真机 LLM 联调</a:t>
+            </a:r>
+            <a:r>
+              <a:rPr lang="en-US" sz="2000">
+                <a:solidFill>
+                  <a:srgbClr val="1E293B"/>
+                </a:solidFill>
+                <a:latin typeface="微软雅黑" panose="020B0503020204020204" charset="-122"/>
+              </a:rPr>
+              <a:t>+</a:t>
+            </a:r>
+            <a:r>
+              <a:rPr lang="zh-CN" altLang="en-US" sz="2000">
+                <a:solidFill>
+                  <a:srgbClr val="1E293B"/>
+                </a:solidFill>
+                <a:latin typeface="微软雅黑" panose="020B0503020204020204" charset="-122"/>
+              </a:rPr>
+              <a:t>真实</a:t>
+            </a:r>
+            <a:r>
+              <a:rPr lang="en-US" altLang="zh-CN" sz="2000">
+                <a:solidFill>
+                  <a:srgbClr val="1E293B"/>
+                </a:solidFill>
+                <a:latin typeface="微软雅黑" panose="020B0503020204020204" charset="-122"/>
+              </a:rPr>
+              <a:t>AI</a:t>
+            </a:r>
+            <a:r>
+              <a:rPr lang="zh-CN" altLang="en-US" sz="2000">
+                <a:solidFill>
+                  <a:srgbClr val="1E293B"/>
+                </a:solidFill>
+                <a:latin typeface="微软雅黑" panose="020B0503020204020204" charset="-122"/>
+              </a:rPr>
+              <a:t>助手设计</a:t>
+            </a:r>
+            <a:r>
+              <a:rPr lang="en-US" altLang="zh-CN" sz="2000">
+                <a:solidFill>
+                  <a:srgbClr val="1E293B"/>
+                </a:solidFill>
+                <a:latin typeface="微软雅黑" panose="020B0503020204020204" charset="-122"/>
+              </a:rPr>
+              <a:t>Miniyu</a:t>
+            </a:r>
+            <a:endParaRPr sz="2000">
+              <a:solidFill>
+                <a:srgbClr val="1E293B"/>
+              </a:solidFill>
+              <a:latin typeface="微软雅黑" panose="020B0503020204020204" charset="-122"/>
+            </a:endParaRPr>
+          </a:p>
+          <a:p>
+            <a:pPr>
+              <a:spcAft>
+                <a:spcPts val="800"/>
+              </a:spcAft>
+            </a:pPr>
+            <a:r>
+              <a:rPr sz="2000" b="1">
+                <a:solidFill>
+                  <a:srgbClr val="8B5CF6"/>
+                </a:solidFill>
+                <a:latin typeface="微软雅黑" panose="020B0503020204020204" charset="-122"/>
+              </a:rPr>
+              <a:t>▍架构沉淀</a:t>
+            </a:r>
+            <a:r>
+              <a:rPr sz="2000">
+                <a:solidFill>
+                  <a:srgbClr val="1E293B"/>
+                </a:solidFill>
+                <a:latin typeface="微软雅黑" panose="020B0503020204020204" charset="-122"/>
+              </a:rPr>
+              <a:t>  工具层作为「决策-能力」适配面，统一契约 tool_result_json 贯穿 5 组</a:t>
+            </a:r>
+            <a:endParaRPr sz="2000">
+              <a:solidFill>
+                <a:srgbClr val="1E293B"/>
+              </a:solidFill>
+              <a:latin typeface="微软雅黑" panose="020B0503020204020204" charset="-122"/>
+            </a:endParaRPr>
+          </a:p>
+          <a:p>
+            <a:pPr>
+              <a:spcAft>
+                <a:spcPts val="800"/>
+              </a:spcAft>
+            </a:pPr>
+            <a:r>
+              <a:rPr sz="2000" b="1">
+                <a:solidFill>
+                  <a:srgbClr val="8B5CF6"/>
+                </a:solidFill>
+                <a:latin typeface="微软雅黑" panose="020B0503020204020204" charset="-122"/>
+              </a:rPr>
+              <a:t>▍展望 1</a:t>
+            </a:r>
+            <a:r>
+              <a:rPr sz="2000">
+                <a:solidFill>
+                  <a:srgbClr val="1E293B"/>
+                </a:solidFill>
+                <a:latin typeface="微软雅黑" panose="020B0503020204020204" charset="-122"/>
+              </a:rPr>
+              <a:t>  接入 MCP 服务端，让工具层可被任意 MCP 客户端复用</a:t>
+            </a:r>
+            <a:endParaRPr sz="2000">
+              <a:solidFill>
+                <a:srgbClr val="1E293B"/>
+              </a:solidFill>
+              <a:latin typeface="微软雅黑" panose="020B0503020204020204" charset="-122"/>
+            </a:endParaRPr>
+          </a:p>
+          <a:p>
+            <a:pPr>
+              <a:spcAft>
+                <a:spcPts val="800"/>
+              </a:spcAft>
+            </a:pPr>
+            <a:r>
+              <a:rPr sz="2000" b="1">
+                <a:solidFill>
+                  <a:srgbClr val="8B5CF6"/>
+                </a:solidFill>
+                <a:latin typeface="微软雅黑" panose="020B0503020204020204" charset="-122"/>
+              </a:rPr>
+              <a:t>▍展望 2</a:t>
+            </a:r>
+            <a:r>
+              <a:rPr sz="2000">
+                <a:solidFill>
+                  <a:srgbClr val="1E293B"/>
+                </a:solidFill>
+                <a:latin typeface="微软雅黑" panose="020B0503020204020204" charset="-122"/>
+              </a:rPr>
+              <a:t>  RAG 向量检索升级为 embedding 方案，提升轨迹召回精度</a:t>
+            </a:r>
+            <a:endParaRPr sz="2000">
+              <a:solidFill>
+                <a:srgbClr val="1E293B"/>
+              </a:solidFill>
+              <a:latin typeface="微软雅黑" panose="020B0503020204020204" charset="-122"/>
+            </a:endParaRPr>
+          </a:p>
+          <a:p>
+            <a:pPr>
+              <a:spcAft>
+                <a:spcPts val="800"/>
+              </a:spcAft>
+            </a:pPr>
+            <a:r>
+              <a:rPr sz="2000" b="1">
+                <a:solidFill>
+                  <a:srgbClr val="8B5CF6"/>
+                </a:solidFill>
+                <a:latin typeface="微软雅黑" panose="020B0503020204020204" charset="-122"/>
+              </a:rPr>
+              <a:t>▍展望 3</a:t>
+            </a:r>
+            <a:r>
+              <a:rPr sz="2000">
+                <a:solidFill>
+                  <a:srgbClr val="1E293B"/>
+                </a:solidFill>
+                <a:latin typeface="微软雅黑" panose="020B0503020204020204" charset="-122"/>
+              </a:rPr>
+              <a:t>  Linux 桌面自动化深度适配（AT-SPI 控件检测 + 工具层协同）</a:t>
+            </a:r>
+            <a:endParaRPr sz="2000">
+              <a:solidFill>
+                <a:srgbClr val="1E293B"/>
+              </a:solidFill>
+              <a:latin typeface="微软雅黑" panose="020B0503020204020204" charset="-122"/>
+            </a:endParaRPr>
+          </a:p>
+        </p:txBody>
+      </p:sp>
+      <p:sp>
+        <p:nvSpPr>
+          <p:cNvPr id="6" name="TextBox 5"/>
+          <p:cNvSpPr txBox="1"/>
+          <p:nvPr/>
+        </p:nvSpPr>
+        <p:spPr>
+          <a:xfrm>
+            <a:off x="640080" y="5303520"/>
+            <a:ext cx="10881360" cy="914400"/>
+          </a:xfrm>
+          <a:prstGeom prst="rect">
+            <a:avLst/>
+          </a:prstGeom>
+          <a:noFill/>
+        </p:spPr>
+        <p:txBody>
+          <a:bodyPr wrap="square" anchor="t">
+            <a:spAutoFit/>
+          </a:bodyPr>
+          <a:lstStyle/>
+          <a:p>
+            <a:pPr algn="ctr">
+              <a:spcAft>
+                <a:spcPts val="400"/>
+              </a:spcAft>
+              <a:defRPr sz="2400" b="1">
+                <a:solidFill>
+                  <a:srgbClr val="8B5CF6"/>
+                </a:solidFill>
+                <a:latin typeface="微软雅黑" panose="020B0503020204020204" charset="-122"/>
+              </a:defRPr>
+            </a:pPr>
+            <a:r>
+              <a:t>谢谢观看 · 请各位老师同学指正</a:t>
+            </a:r>
+          </a:p>
+        </p:txBody>
+      </p:sp>
+      <p:sp>
+        <p:nvSpPr>
+          <p:cNvPr id="7" name="TextBox 6"/>
+          <p:cNvSpPr txBox="1"/>
+          <p:nvPr/>
+        </p:nvSpPr>
+        <p:spPr>
+          <a:xfrm>
+            <a:off x="11247120" y="6446520"/>
+            <a:ext cx="822960" cy="274320"/>
+          </a:xfrm>
+          <a:prstGeom prst="rect">
+            <a:avLst/>
+          </a:prstGeom>
+          <a:noFill/>
+        </p:spPr>
+        <p:txBody>
+          <a:bodyPr wrap="square" anchor="t">
+            <a:spAutoFit/>
+          </a:bodyPr>
+          <a:lstStyle/>
+          <a:p>
+            <a:pPr algn="r">
+              <a:spcAft>
+                <a:spcPts val="400"/>
+              </a:spcAft>
+              <a:defRPr sz="1100" b="0">
+                <a:solidFill>
+                  <a:srgbClr val="5A6474"/>
+                </a:solidFill>
+                <a:latin typeface="微软雅黑" panose="020B0503020204020204" charset="-122"/>
+              </a:defRPr>
+            </a:pPr>
+            <a:r>
+              <a:t>18</a:t>
             </a:r>
           </a:p>
         </p:txBody>
@@ -13315,7 +14899,7 @@
         <p:spPr>
           <a:xfrm>
             <a:off x="1920240" y="5989320"/>
-            <a:ext cx="8229600" cy="457200"/>
+            <a:ext cx="8229600" cy="368300"/>
           </a:xfrm>
           <a:prstGeom prst="rect">
             <a:avLst/>
@@ -13340,8 +14924,105 @@
               </a:defRPr>
             </a:pPr>
             <a:r>
+              <a:rPr lang="zh-CN"/>
+              <a:t>完整</a:t>
+            </a:r>
+            <a:r>
+              <a:rPr lang="en-US" altLang="zh-CN"/>
+              <a:t>AI</a:t>
+            </a:r>
+            <a:r>
+              <a:rPr lang="zh-CN" altLang="en-US"/>
+              <a:t>助手设计：</a:t>
+            </a:r>
+            <a:r>
+              <a:rPr lang="en-US" altLang="zh-CN"/>
+              <a:t>Miniyu</a:t>
+            </a:r>
+            <a:endParaRPr lang="en-US" altLang="zh-CN"/>
+          </a:p>
+        </p:txBody>
+      </p:sp>
+      <p:sp>
+        <p:nvSpPr>
+          <p:cNvPr id="28" name="文本框 27"/>
+          <p:cNvSpPr txBox="1"/>
+          <p:nvPr/>
+        </p:nvSpPr>
+        <p:spPr>
+          <a:xfrm>
+            <a:off x="1097280" y="6313170"/>
+            <a:ext cx="6096000" cy="398780"/>
+          </a:xfrm>
+          <a:prstGeom prst="rect">
+            <a:avLst/>
+          </a:prstGeom>
+          <a:noFill/>
+        </p:spPr>
+        <p:txBody>
+          <a:bodyPr wrap="square" rtlCol="0" anchor="t">
+            <a:spAutoFit/>
+          </a:bodyPr>
+          <a:p>
+            <a:pPr algn="l">
+              <a:spcAft>
+                <a:spcPts val="400"/>
+              </a:spcAft>
+              <a:defRPr sz="2000" b="1">
+                <a:solidFill>
+                  <a:srgbClr val="8B5CF6"/>
+                </a:solidFill>
+                <a:latin typeface="微软雅黑" panose="020B0503020204020204" charset="-122"/>
+              </a:defRPr>
+            </a:pPr>
+            <a:r>
+              <a:rPr>
+                <a:sym typeface="+mn-ea"/>
+              </a:rPr>
+              <a:t>1</a:t>
+            </a:r>
+            <a:r>
+              <a:rPr lang="en-US">
+                <a:sym typeface="+mn-ea"/>
+              </a:rPr>
+              <a:t>2</a:t>
+            </a:r>
+            <a:endParaRPr lang="en-US">
+              <a:sym typeface="+mn-ea"/>
+            </a:endParaRPr>
+          </a:p>
+        </p:txBody>
+      </p:sp>
+      <p:sp>
+        <p:nvSpPr>
+          <p:cNvPr id="29" name="文本框 28"/>
+          <p:cNvSpPr txBox="1"/>
+          <p:nvPr/>
+        </p:nvSpPr>
+        <p:spPr>
+          <a:xfrm>
+            <a:off x="1920240" y="6343650"/>
+            <a:ext cx="6096000" cy="368300"/>
+          </a:xfrm>
+          <a:prstGeom prst="rect">
+            <a:avLst/>
+          </a:prstGeom>
+          <a:noFill/>
+        </p:spPr>
+        <p:txBody>
+          <a:bodyPr wrap="square" rtlCol="0" anchor="t">
+            <a:spAutoFit/>
+          </a:bodyPr>
+          <a:p>
+            <a:r>
+              <a:rPr>
+                <a:sym typeface="+mn-ea"/>
+              </a:rPr>
               <a:t>总结与展望</a:t>
             </a:r>
+            <a:endParaRPr lang="zh-CN" altLang="en-US">
+              <a:sym typeface="+mn-ea"/>
+            </a:endParaRPr>
           </a:p>
         </p:txBody>
       </p:sp>
@@ -13416,7 +15097,7 @@
         <p:spPr>
           <a:xfrm>
             <a:off x="548640" y="320040"/>
-            <a:ext cx="9144000" cy="640080"/>
+            <a:ext cx="9144000" cy="553085"/>
           </a:xfrm>
           <a:prstGeom prst="rect">
             <a:avLst/>
@@ -13440,6 +15121,10 @@
                 <a:latin typeface="微软雅黑" panose="020B0503020204020204" charset="-122"/>
               </a:defRPr>
             </a:pPr>
+            <a:r>
+              <a:rPr lang="en-US"/>
+              <a:t>01</a:t>
+            </a:r>
             <a:r>
               <a:t>项目背景与目标</a:t>
             </a:r>
@@ -13817,7 +15502,7 @@
         <p:spPr>
           <a:xfrm>
             <a:off x="548640" y="320040"/>
-            <a:ext cx="9144000" cy="640080"/>
+            <a:ext cx="9144000" cy="553085"/>
           </a:xfrm>
           <a:prstGeom prst="rect">
             <a:avLst/>
@@ -13841,6 +15526,10 @@
                 <a:latin typeface="微软雅黑" panose="020B0503020204020204" charset="-122"/>
               </a:defRPr>
             </a:pPr>
+            <a:r>
+              <a:rPr lang="en-US"/>
+              <a:t>02 </a:t>
+            </a:r>
             <a:r>
               <a:t>UFO² 架构与第 4 组定位</a:t>
             </a:r>
@@ -14461,7 +16150,7 @@
         <p:spPr>
           <a:xfrm>
             <a:off x="548640" y="320040"/>
-            <a:ext cx="9144000" cy="640080"/>
+            <a:ext cx="9144000" cy="553085"/>
           </a:xfrm>
           <a:prstGeom prst="rect">
             <a:avLst/>
@@ -14485,6 +16174,10 @@
                 <a:latin typeface="微软雅黑" panose="020B0503020204020204" charset="-122"/>
               </a:defRPr>
             </a:pPr>
+            <a:r>
+              <a:rPr lang="en-US"/>
+              <a:t>03 </a:t>
+            </a:r>
             <a:r>
               <a:t>调研：MCP 协议与竞品对标</a:t>
             </a:r>
@@ -14862,7 +16555,7 @@
         <p:spPr>
           <a:xfrm>
             <a:off x="548640" y="320040"/>
-            <a:ext cx="9144000" cy="640080"/>
+            <a:ext cx="9144000" cy="553085"/>
           </a:xfrm>
           <a:prstGeom prst="rect">
             <a:avLst/>
@@ -14886,6 +16579,10 @@
                 <a:latin typeface="微软雅黑" panose="020B0503020204020204" charset="-122"/>
               </a:defRPr>
             </a:pPr>
+            <a:r>
+              <a:rPr lang="en-US"/>
+              <a:t>04 </a:t>
+            </a:r>
             <a:r>
               <a:t>系统架构与接口契约</a:t>
             </a:r>
@@ -16515,7 +18212,7 @@
         <p:spPr>
           <a:xfrm>
             <a:off x="548640" y="320040"/>
-            <a:ext cx="9144000" cy="640080"/>
+            <a:ext cx="9144000" cy="553085"/>
           </a:xfrm>
           <a:prstGeom prst="rect">
             <a:avLst/>
@@ -16540,7 +18237,10 @@
               </a:defRPr>
             </a:pPr>
             <a:r>
-              <a:rPr/>
+              <a:rPr lang="en-US"/>
+              <a:t>05 </a:t>
+            </a:r>
+            <a:r>
               <a:t>模块设计：ToolRegistry（59 个系统工具）</a:t>
             </a:r>
           </a:p>
@@ -16917,7 +18617,7 @@
         <p:spPr>
           <a:xfrm>
             <a:off x="548640" y="320040"/>
-            <a:ext cx="9144000" cy="640080"/>
+            <a:ext cx="9144000" cy="553085"/>
           </a:xfrm>
           <a:prstGeom prst="rect">
             <a:avLst/>
@@ -16941,6 +18641,10 @@
                 <a:latin typeface="微软雅黑" panose="020B0503020204020204" charset="-122"/>
               </a:defRPr>
             </a:pPr>
+            <a:r>
+              <a:rPr lang="en-US"/>
+              <a:t>06 </a:t>
+            </a:r>
             <a:r>
               <a:t>模块设计：SkillLibrary（26 个 OS 技能）</a:t>
             </a:r>
@@ -17034,7 +18738,11 @@
         <p:nvSpPr>
           <p:cNvPr id="6" name="Rectangle 5"/>
           <p:cNvSpPr/>
-          <p:nvPr/>
+          <p:nvPr>
+            <p:custDataLst>
+              <p:tags r:id="rId1"/>
+            </p:custDataLst>
+          </p:nvPr>
         </p:nvSpPr>
         <p:spPr>
           <a:xfrm>
@@ -17078,7 +18786,11 @@
         <p:nvSpPr>
           <p:cNvPr id="7" name="Rectangle 6"/>
           <p:cNvSpPr/>
-          <p:nvPr/>
+          <p:nvPr>
+            <p:custDataLst>
+              <p:tags r:id="rId2"/>
+            </p:custDataLst>
+          </p:nvPr>
         </p:nvSpPr>
         <p:spPr>
           <a:xfrm>
@@ -17122,7 +18834,11 @@
         <p:nvSpPr>
           <p:cNvPr id="8" name="TextBox 7"/>
           <p:cNvSpPr txBox="1"/>
-          <p:nvPr/>
+          <p:nvPr>
+            <p:custDataLst>
+              <p:tags r:id="rId3"/>
+            </p:custDataLst>
+          </p:nvPr>
         </p:nvSpPr>
         <p:spPr>
           <a:xfrm>
@@ -17161,7 +18877,11 @@
         <p:nvSpPr>
           <p:cNvPr id="9" name="TextBox 8"/>
           <p:cNvSpPr txBox="1"/>
-          <p:nvPr/>
+          <p:nvPr>
+            <p:custDataLst>
+              <p:tags r:id="rId4"/>
+            </p:custDataLst>
+          </p:nvPr>
         </p:nvSpPr>
         <p:spPr>
           <a:xfrm>
@@ -17248,7 +18968,11 @@
         <p:nvSpPr>
           <p:cNvPr id="10" name="Rectangle 9"/>
           <p:cNvSpPr/>
-          <p:nvPr/>
+          <p:nvPr>
+            <p:custDataLst>
+              <p:tags r:id="rId5"/>
+            </p:custDataLst>
+          </p:nvPr>
         </p:nvSpPr>
         <p:spPr>
           <a:xfrm>
@@ -17292,7 +19016,11 @@
         <p:nvSpPr>
           <p:cNvPr id="11" name="Rectangle 10"/>
           <p:cNvSpPr/>
-          <p:nvPr/>
+          <p:nvPr>
+            <p:custDataLst>
+              <p:tags r:id="rId6"/>
+            </p:custDataLst>
+          </p:nvPr>
         </p:nvSpPr>
         <p:spPr>
           <a:xfrm>
@@ -17336,7 +19064,11 @@
         <p:nvSpPr>
           <p:cNvPr id="12" name="TextBox 11"/>
           <p:cNvSpPr txBox="1"/>
-          <p:nvPr/>
+          <p:nvPr>
+            <p:custDataLst>
+              <p:tags r:id="rId7"/>
+            </p:custDataLst>
+          </p:nvPr>
         </p:nvSpPr>
         <p:spPr>
           <a:xfrm>
@@ -17375,7 +19107,11 @@
         <p:nvSpPr>
           <p:cNvPr id="13" name="TextBox 12"/>
           <p:cNvSpPr txBox="1"/>
-          <p:nvPr/>
+          <p:nvPr>
+            <p:custDataLst>
+              <p:tags r:id="rId8"/>
+            </p:custDataLst>
+          </p:nvPr>
         </p:nvSpPr>
         <p:spPr>
           <a:xfrm>
@@ -17462,7 +19198,11 @@
         <p:nvSpPr>
           <p:cNvPr id="14" name="Rectangle 13"/>
           <p:cNvSpPr/>
-          <p:nvPr/>
+          <p:nvPr>
+            <p:custDataLst>
+              <p:tags r:id="rId9"/>
+            </p:custDataLst>
+          </p:nvPr>
         </p:nvSpPr>
         <p:spPr>
           <a:xfrm>
@@ -17506,7 +19246,11 @@
         <p:nvSpPr>
           <p:cNvPr id="15" name="Rectangle 14"/>
           <p:cNvSpPr/>
-          <p:nvPr/>
+          <p:nvPr>
+            <p:custDataLst>
+              <p:tags r:id="rId10"/>
+            </p:custDataLst>
+          </p:nvPr>
         </p:nvSpPr>
         <p:spPr>
           <a:xfrm>
@@ -17550,7 +19294,11 @@
         <p:nvSpPr>
           <p:cNvPr id="16" name="TextBox 15"/>
           <p:cNvSpPr txBox="1"/>
-          <p:nvPr/>
+          <p:nvPr>
+            <p:custDataLst>
+              <p:tags r:id="rId11"/>
+            </p:custDataLst>
+          </p:nvPr>
         </p:nvSpPr>
         <p:spPr>
           <a:xfrm>
@@ -17589,7 +19337,11 @@
         <p:nvSpPr>
           <p:cNvPr id="17" name="TextBox 16"/>
           <p:cNvSpPr txBox="1"/>
-          <p:nvPr/>
+          <p:nvPr>
+            <p:custDataLst>
+              <p:tags r:id="rId12"/>
+            </p:custDataLst>
+          </p:nvPr>
         </p:nvSpPr>
         <p:spPr>
           <a:xfrm>
@@ -17676,7 +19428,11 @@
         <p:nvSpPr>
           <p:cNvPr id="18" name="Rectangle 17"/>
           <p:cNvSpPr/>
-          <p:nvPr/>
+          <p:nvPr>
+            <p:custDataLst>
+              <p:tags r:id="rId13"/>
+            </p:custDataLst>
+          </p:nvPr>
         </p:nvSpPr>
         <p:spPr>
           <a:xfrm>
@@ -17720,7 +19476,11 @@
         <p:nvSpPr>
           <p:cNvPr id="19" name="Rectangle 18"/>
           <p:cNvSpPr/>
-          <p:nvPr/>
+          <p:nvPr>
+            <p:custDataLst>
+              <p:tags r:id="rId14"/>
+            </p:custDataLst>
+          </p:nvPr>
         </p:nvSpPr>
         <p:spPr>
           <a:xfrm>
@@ -17764,7 +19524,11 @@
         <p:nvSpPr>
           <p:cNvPr id="20" name="TextBox 19"/>
           <p:cNvSpPr txBox="1"/>
-          <p:nvPr/>
+          <p:nvPr>
+            <p:custDataLst>
+              <p:tags r:id="rId15"/>
+            </p:custDataLst>
+          </p:nvPr>
         </p:nvSpPr>
         <p:spPr>
           <a:xfrm>
@@ -17803,7 +19567,11 @@
         <p:nvSpPr>
           <p:cNvPr id="21" name="TextBox 20"/>
           <p:cNvSpPr txBox="1"/>
-          <p:nvPr/>
+          <p:nvPr>
+            <p:custDataLst>
+              <p:tags r:id="rId16"/>
+            </p:custDataLst>
+          </p:nvPr>
         </p:nvSpPr>
         <p:spPr>
           <a:xfrm>
@@ -17986,6 +19754,174 @@
     <a:masterClrMapping/>
   </p:clrMapOvr>
 </p:sld>
+</file>
+
+<file path=ppt/tags/tag1.xml><?xml version="1.0" encoding="utf-8"?>
+<p:tagLst xmlns:p="http://schemas.openxmlformats.org/presentationml/2006/main">
+  <p:tag name="KSO_WM_DIAGRAM_VIRTUALLY_FRAME" val="{&quot;height&quot;:165.6,&quot;left&quot;:50.4,&quot;top&quot;:108,&quot;width&quot;:864}"/>
+</p:tagLst>
+</file>
+
+<file path=ppt/tags/tag10.xml><?xml version="1.0" encoding="utf-8"?>
+<p:tagLst xmlns:p="http://schemas.openxmlformats.org/presentationml/2006/main">
+  <p:tag name="KSO_WM_DIAGRAM_VIRTUALLY_FRAME" val="{&quot;height&quot;:165.6,&quot;left&quot;:50.4,&quot;top&quot;:108,&quot;width&quot;:864}"/>
+</p:tagLst>
+</file>
+
+<file path=ppt/tags/tag11.xml><?xml version="1.0" encoding="utf-8"?>
+<p:tagLst xmlns:p="http://schemas.openxmlformats.org/presentationml/2006/main">
+  <p:tag name="KSO_WM_DIAGRAM_VIRTUALLY_FRAME" val="{&quot;height&quot;:165.6,&quot;left&quot;:50.4,&quot;top&quot;:108,&quot;width&quot;:864}"/>
+</p:tagLst>
+</file>
+
+<file path=ppt/tags/tag12.xml><?xml version="1.0" encoding="utf-8"?>
+<p:tagLst xmlns:p="http://schemas.openxmlformats.org/presentationml/2006/main">
+  <p:tag name="KSO_WM_DIAGRAM_VIRTUALLY_FRAME" val="{&quot;height&quot;:165.6,&quot;left&quot;:50.4,&quot;top&quot;:108,&quot;width&quot;:864}"/>
+</p:tagLst>
+</file>
+
+<file path=ppt/tags/tag13.xml><?xml version="1.0" encoding="utf-8"?>
+<p:tagLst xmlns:p="http://schemas.openxmlformats.org/presentationml/2006/main">
+  <p:tag name="KSO_WM_DIAGRAM_VIRTUALLY_FRAME" val="{&quot;height&quot;:165.6,&quot;left&quot;:50.4,&quot;top&quot;:108,&quot;width&quot;:864}"/>
+</p:tagLst>
+</file>
+
+<file path=ppt/tags/tag14.xml><?xml version="1.0" encoding="utf-8"?>
+<p:tagLst xmlns:p="http://schemas.openxmlformats.org/presentationml/2006/main">
+  <p:tag name="KSO_WM_DIAGRAM_VIRTUALLY_FRAME" val="{&quot;height&quot;:165.6,&quot;left&quot;:50.4,&quot;top&quot;:108,&quot;width&quot;:864}"/>
+</p:tagLst>
+</file>
+
+<file path=ppt/tags/tag15.xml><?xml version="1.0" encoding="utf-8"?>
+<p:tagLst xmlns:p="http://schemas.openxmlformats.org/presentationml/2006/main">
+  <p:tag name="KSO_WM_DIAGRAM_VIRTUALLY_FRAME" val="{&quot;height&quot;:165.6,&quot;left&quot;:50.4,&quot;top&quot;:108,&quot;width&quot;:864}"/>
+</p:tagLst>
+</file>
+
+<file path=ppt/tags/tag16.xml><?xml version="1.0" encoding="utf-8"?>
+<p:tagLst xmlns:p="http://schemas.openxmlformats.org/presentationml/2006/main">
+  <p:tag name="KSO_WM_DIAGRAM_VIRTUALLY_FRAME" val="{&quot;height&quot;:165.6,&quot;left&quot;:50.4,&quot;top&quot;:108,&quot;width&quot;:864}"/>
+</p:tagLst>
+</file>
+
+<file path=ppt/tags/tag17.xml><?xml version="1.0" encoding="utf-8"?>
+<p:tagLst xmlns:p="http://schemas.openxmlformats.org/presentationml/2006/main">
+  <p:tag name="KSO_WM_DIAGRAM_VIRTUALLY_FRAME" val="{&quot;height&quot;:158.4,&quot;left&quot;:331.2,&quot;top&quot;:115.2,&quot;width&quot;:619.2}"/>
+</p:tagLst>
+</file>
+
+<file path=ppt/tags/tag18.xml><?xml version="1.0" encoding="utf-8"?>
+<p:tagLst xmlns:p="http://schemas.openxmlformats.org/presentationml/2006/main">
+  <p:tag name="KSO_WM_DIAGRAM_VIRTUALLY_FRAME" val="{&quot;height&quot;:158.4,&quot;left&quot;:331.2,&quot;top&quot;:115.2,&quot;width&quot;:619.2}"/>
+</p:tagLst>
+</file>
+
+<file path=ppt/tags/tag19.xml><?xml version="1.0" encoding="utf-8"?>
+<p:tagLst xmlns:p="http://schemas.openxmlformats.org/presentationml/2006/main">
+  <p:tag name="KSO_WM_DIAGRAM_VIRTUALLY_FRAME" val="{&quot;height&quot;:158.4,&quot;left&quot;:331.2,&quot;top&quot;:115.2,&quot;width&quot;:619.2}"/>
+</p:tagLst>
+</file>
+
+<file path=ppt/tags/tag2.xml><?xml version="1.0" encoding="utf-8"?>
+<p:tagLst xmlns:p="http://schemas.openxmlformats.org/presentationml/2006/main">
+  <p:tag name="KSO_WM_DIAGRAM_VIRTUALLY_FRAME" val="{&quot;height&quot;:165.6,&quot;left&quot;:50.4,&quot;top&quot;:108,&quot;width&quot;:864}"/>
+</p:tagLst>
+</file>
+
+<file path=ppt/tags/tag20.xml><?xml version="1.0" encoding="utf-8"?>
+<p:tagLst xmlns:p="http://schemas.openxmlformats.org/presentationml/2006/main">
+  <p:tag name="KSO_WM_DIAGRAM_VIRTUALLY_FRAME" val="{&quot;height&quot;:158.4,&quot;left&quot;:331.2,&quot;top&quot;:115.2,&quot;width&quot;:619.2}"/>
+</p:tagLst>
+</file>
+
+<file path=ppt/tags/tag21.xml><?xml version="1.0" encoding="utf-8"?>
+<p:tagLst xmlns:p="http://schemas.openxmlformats.org/presentationml/2006/main">
+  <p:tag name="KSO_WM_DIAGRAM_VIRTUALLY_FRAME" val="{&quot;height&quot;:158.4,&quot;left&quot;:331.2,&quot;top&quot;:115.2,&quot;width&quot;:619.2}"/>
+</p:tagLst>
+</file>
+
+<file path=ppt/tags/tag22.xml><?xml version="1.0" encoding="utf-8"?>
+<p:tagLst xmlns:p="http://schemas.openxmlformats.org/presentationml/2006/main">
+  <p:tag name="KSO_WM_DIAGRAM_VIRTUALLY_FRAME" val="{&quot;height&quot;:158.4,&quot;left&quot;:331.2,&quot;top&quot;:115.2,&quot;width&quot;:619.2}"/>
+</p:tagLst>
+</file>
+
+<file path=ppt/tags/tag23.xml><?xml version="1.0" encoding="utf-8"?>
+<p:tagLst xmlns:p="http://schemas.openxmlformats.org/presentationml/2006/main">
+  <p:tag name="KSO_WM_DIAGRAM_VIRTUALLY_FRAME" val="{&quot;height&quot;:158.4,&quot;left&quot;:331.2,&quot;top&quot;:115.2,&quot;width&quot;:619.2}"/>
+</p:tagLst>
+</file>
+
+<file path=ppt/tags/tag24.xml><?xml version="1.0" encoding="utf-8"?>
+<p:tagLst xmlns:p="http://schemas.openxmlformats.org/presentationml/2006/main">
+  <p:tag name="KSO_WM_DIAGRAM_VIRTUALLY_FRAME" val="{&quot;height&quot;:158.4,&quot;left&quot;:331.2,&quot;top&quot;:115.2,&quot;width&quot;:619.2}"/>
+</p:tagLst>
+</file>
+
+<file path=ppt/tags/tag25.xml><?xml version="1.0" encoding="utf-8"?>
+<p:tagLst xmlns:p="http://schemas.openxmlformats.org/presentationml/2006/main">
+  <p:tag name="KSO_WM_DIAGRAM_VIRTUALLY_FRAME" val="{&quot;height&quot;:158.4,&quot;left&quot;:331.2,&quot;top&quot;:115.2,&quot;width&quot;:619.2}"/>
+</p:tagLst>
+</file>
+
+<file path=ppt/tags/tag26.xml><?xml version="1.0" encoding="utf-8"?>
+<p:tagLst xmlns:p="http://schemas.openxmlformats.org/presentationml/2006/main">
+  <p:tag name="KSO_WM_DIAGRAM_VIRTUALLY_FRAME" val="{&quot;height&quot;:158.4,&quot;left&quot;:331.2,&quot;top&quot;:115.2,&quot;width&quot;:619.2}"/>
+</p:tagLst>
+</file>
+
+<file path=ppt/tags/tag27.xml><?xml version="1.0" encoding="utf-8"?>
+<p:tagLst xmlns:p="http://schemas.openxmlformats.org/presentationml/2006/main">
+  <p:tag name="KSO_WM_DIAGRAM_VIRTUALLY_FRAME" val="{&quot;height&quot;:158.4,&quot;left&quot;:331.2,&quot;top&quot;:115.2,&quot;width&quot;:619.2}"/>
+</p:tagLst>
+</file>
+
+<file path=ppt/tags/tag28.xml><?xml version="1.0" encoding="utf-8"?>
+<p:tagLst xmlns:p="http://schemas.openxmlformats.org/presentationml/2006/main">
+  <p:tag name="KSO_WM_DIAGRAM_VIRTUALLY_FRAME" val="{&quot;height&quot;:158.4,&quot;left&quot;:331.2,&quot;top&quot;:115.2,&quot;width&quot;:619.2}"/>
+</p:tagLst>
+</file>
+
+<file path=ppt/tags/tag3.xml><?xml version="1.0" encoding="utf-8"?>
+<p:tagLst xmlns:p="http://schemas.openxmlformats.org/presentationml/2006/main">
+  <p:tag name="KSO_WM_DIAGRAM_VIRTUALLY_FRAME" val="{&quot;height&quot;:165.6,&quot;left&quot;:50.4,&quot;top&quot;:108,&quot;width&quot;:864}"/>
+</p:tagLst>
+</file>
+
+<file path=ppt/tags/tag4.xml><?xml version="1.0" encoding="utf-8"?>
+<p:tagLst xmlns:p="http://schemas.openxmlformats.org/presentationml/2006/main">
+  <p:tag name="KSO_WM_DIAGRAM_VIRTUALLY_FRAME" val="{&quot;height&quot;:165.6,&quot;left&quot;:50.4,&quot;top&quot;:108,&quot;width&quot;:864}"/>
+</p:tagLst>
+</file>
+
+<file path=ppt/tags/tag5.xml><?xml version="1.0" encoding="utf-8"?>
+<p:tagLst xmlns:p="http://schemas.openxmlformats.org/presentationml/2006/main">
+  <p:tag name="KSO_WM_DIAGRAM_VIRTUALLY_FRAME" val="{&quot;height&quot;:165.6,&quot;left&quot;:50.4,&quot;top&quot;:108,&quot;width&quot;:864}"/>
+</p:tagLst>
+</file>
+
+<file path=ppt/tags/tag6.xml><?xml version="1.0" encoding="utf-8"?>
+<p:tagLst xmlns:p="http://schemas.openxmlformats.org/presentationml/2006/main">
+  <p:tag name="KSO_WM_DIAGRAM_VIRTUALLY_FRAME" val="{&quot;height&quot;:165.6,&quot;left&quot;:50.4,&quot;top&quot;:108,&quot;width&quot;:864}"/>
+</p:tagLst>
+</file>
+
+<file path=ppt/tags/tag7.xml><?xml version="1.0" encoding="utf-8"?>
+<p:tagLst xmlns:p="http://schemas.openxmlformats.org/presentationml/2006/main">
+  <p:tag name="KSO_WM_DIAGRAM_VIRTUALLY_FRAME" val="{&quot;height&quot;:165.6,&quot;left&quot;:50.4,&quot;top&quot;:108,&quot;width&quot;:864}"/>
+</p:tagLst>
+</file>
+
+<file path=ppt/tags/tag8.xml><?xml version="1.0" encoding="utf-8"?>
+<p:tagLst xmlns:p="http://schemas.openxmlformats.org/presentationml/2006/main">
+  <p:tag name="KSO_WM_DIAGRAM_VIRTUALLY_FRAME" val="{&quot;height&quot;:165.6,&quot;left&quot;:50.4,&quot;top&quot;:108,&quot;width&quot;:864}"/>
+</p:tagLst>
+</file>
+
+<file path=ppt/tags/tag9.xml><?xml version="1.0" encoding="utf-8"?>
+<p:tagLst xmlns:p="http://schemas.openxmlformats.org/presentationml/2006/main">
+  <p:tag name="KSO_WM_DIAGRAM_VIRTUALLY_FRAME" val="{&quot;height&quot;:165.6,&quot;left&quot;:50.4,&quot;top&quot;:108,&quot;width&quot;:864}"/>
+</p:tagLst>
 </file>
 
 <file path=ppt/theme/theme1.xml><?xml version="1.0" encoding="utf-8"?>
